--- a/output/wordlabs-spect-3day.pptx
+++ b/output/wordlabs-spect-3day.pptx
@@ -4240,7 +4240,7 @@
                 <a:ea typeface="Calibri" pitchFamily="34" charset="-122"/>
                 <a:cs typeface="Calibri" pitchFamily="34" charset="-120"/>
               </a:rPr>
-              <a:t>"to look, watch, see"</a:t>
+              <a:t>"look; watch"</a:t>
             </a:r>
             <a:endParaRPr lang="en-US" sz="2200" dirty="0"/>
           </a:p>
@@ -4279,7 +4279,7 @@
                 <a:ea typeface="Calibri" pitchFamily="34" charset="-122"/>
                 <a:cs typeface="Calibri" pitchFamily="34" charset="-120"/>
               </a:rPr>
-              <a:t>Origin: Latin: spectare</a:t>
+              <a:t>Origin: Latin root</a:t>
             </a:r>
             <a:endParaRPr lang="en-US" sz="1300" dirty="0"/>
           </a:p>
@@ -5288,7 +5288,7 @@
                 <a:ea typeface="Calibri" pitchFamily="34" charset="-122"/>
                 <a:cs typeface="Calibri" pitchFamily="34" charset="-120"/>
               </a:rPr>
-              <a:t>Word Labs  •  wordlabs.app  •  Root: 'spect' = to look, watch, see</a:t>
+              <a:t>Word Labs  •  wordlabs.app  •  Root: 'spect' = look; watch</a:t>
             </a:r>
             <a:endParaRPr lang="en-US" sz="800" dirty="0"/>
           </a:p>
@@ -5928,7 +5928,7 @@
                 <a:ea typeface="Calibri" pitchFamily="34" charset="-122"/>
                 <a:cs typeface="Calibri" pitchFamily="34" charset="-120"/>
               </a:rPr>
-              <a:t>Word Labs  •  wordlabs.app  •  Root: 'spect' = to look, watch, see</a:t>
+              <a:t>Word Labs  •  wordlabs.app  •  Root: 'spect' = look; watch</a:t>
             </a:r>
             <a:endParaRPr lang="en-US" sz="800" dirty="0"/>
           </a:p>
@@ -6057,7 +6057,7 @@
                 <a:ea typeface="Calibri" pitchFamily="34" charset="-122"/>
                 <a:cs typeface="Calibri" pitchFamily="34" charset="-120"/>
               </a:rPr>
-              <a:t>inspector</a:t>
+              <a:t>prospective</a:t>
             </a:r>
             <a:pPr algn="l" indent="0" marL="0">
               <a:buNone/>
@@ -6071,7 +6071,7 @@
                 <a:ea typeface="Calibri" pitchFamily="34" charset="-122"/>
                 <a:cs typeface="Calibri" pitchFamily="34" charset="-120"/>
               </a:rPr>
-              <a:t> had to </a:t>
+              <a:t> students toured the school before applying. The most interesting </a:t>
             </a:r>
             <a:pPr algn="l" indent="0" marL="0">
               <a:buNone/>
@@ -6088,7 +6088,7 @@
                 <a:ea typeface="Calibri" pitchFamily="34" charset="-122"/>
                 <a:cs typeface="Calibri" pitchFamily="34" charset="-120"/>
               </a:rPr>
-              <a:t>inspect</a:t>
+              <a:t>aspect</a:t>
             </a:r>
             <a:pPr algn="l" indent="0" marL="0">
               <a:buNone/>
@@ -6102,7 +6102,7 @@
                 <a:ea typeface="Calibri" pitchFamily="34" charset="-122"/>
                 <a:cs typeface="Calibri" pitchFamily="34" charset="-120"/>
               </a:rPr>
-              <a:t> the old bridge before anyone could cross it safely.</a:t>
+              <a:t> of the trip was visiting the museum.</a:t>
             </a:r>
             <a:endParaRPr lang="en-US" sz="1800" dirty="0"/>
           </a:p>
@@ -6257,7 +6257,7 @@
                 <a:ea typeface="Trebuchet MS" pitchFamily="34" charset="-122"/>
                 <a:cs typeface="Trebuchet MS" pitchFamily="34" charset="-120"/>
               </a:rPr>
-              <a:t>inspector</a:t>
+              <a:t>prospective</a:t>
             </a:r>
             <a:endParaRPr lang="en-US" sz="1400" dirty="0"/>
           </a:p>
@@ -6385,7 +6385,7 @@
                 <a:ea typeface="Trebuchet MS" pitchFamily="34" charset="-122"/>
                 <a:cs typeface="Trebuchet MS" pitchFamily="34" charset="-120"/>
               </a:rPr>
-              <a:t>inspect</a:t>
+              <a:t>aspect</a:t>
             </a:r>
             <a:endParaRPr lang="en-US" sz="1400" dirty="0"/>
           </a:p>
@@ -6716,7 +6716,7 @@
                 <a:ea typeface="Calibri" pitchFamily="34" charset="-122"/>
                 <a:cs typeface="Calibri" pitchFamily="34" charset="-120"/>
               </a:rPr>
-              <a:t>Word Labs  •  wordlabs.app  •  Root: 'spect' = to look, watch, see</a:t>
+              <a:t>Word Labs  •  wordlabs.app  •  Root: 'spect' = look; watch</a:t>
             </a:r>
             <a:endParaRPr lang="en-US" sz="800" dirty="0"/>
           </a:p>
@@ -6855,7 +6855,7 @@
                 <a:ea typeface="Trebuchet MS" pitchFamily="34" charset="-122"/>
                 <a:cs typeface="Trebuchet MS" pitchFamily="34" charset="-120"/>
               </a:rPr>
-              <a:t>inspector</a:t>
+              <a:t>prospective</a:t>
             </a:r>
             <a:endParaRPr lang="en-US" sz="2800" dirty="0"/>
           </a:p>
@@ -7543,7 +7543,7 @@
                 <a:ea typeface="Calibri" pitchFamily="34" charset="-122"/>
                 <a:cs typeface="Calibri" pitchFamily="34" charset="-120"/>
               </a:rPr>
-              <a:t>Word Labs  •  wordlabs.app  •  Root: 'spect' = to look, watch, see</a:t>
+              <a:t>Word Labs  •  wordlabs.app  •  Root: 'spect' = look; watch</a:t>
             </a:r>
             <a:endParaRPr lang="en-US" sz="800" dirty="0"/>
           </a:p>
@@ -7682,7 +7682,7 @@
                 <a:ea typeface="Trebuchet MS" pitchFamily="34" charset="-122"/>
                 <a:cs typeface="Trebuchet MS" pitchFamily="34" charset="-120"/>
               </a:rPr>
-              <a:t>inspector</a:t>
+              <a:t>prospective</a:t>
             </a:r>
             <a:endParaRPr lang="en-US" sz="2800" dirty="0"/>
           </a:p>
@@ -7821,7 +7821,7 @@
                 <a:ea typeface="Trebuchet MS" pitchFamily="34" charset="-122"/>
                 <a:cs typeface="Trebuchet MS" pitchFamily="34" charset="-120"/>
               </a:rPr>
-              <a:t>in</a:t>
+              <a:t>pro</a:t>
             </a:r>
             <a:endParaRPr lang="en-US" sz="1300" dirty="0"/>
           </a:p>
@@ -7860,7 +7860,7 @@
                 <a:ea typeface="Calibri" pitchFamily="34" charset="-122"/>
                 <a:cs typeface="Calibri" pitchFamily="34" charset="-120"/>
               </a:rPr>
-              <a:t>into, upon</a:t>
+              <a:t>in favour of; forward</a:t>
             </a:r>
             <a:endParaRPr lang="en-US" sz="850" dirty="0"/>
           </a:p>
@@ -7972,7 +7972,7 @@
                 <a:ea typeface="Calibri" pitchFamily="34" charset="-122"/>
                 <a:cs typeface="Calibri" pitchFamily="34" charset="-120"/>
               </a:rPr>
-              <a:t>to look</a:t>
+              <a:t>look; watch</a:t>
             </a:r>
             <a:endParaRPr lang="en-US" sz="850" dirty="0"/>
           </a:p>
@@ -8045,7 +8045,7 @@
                 <a:ea typeface="Trebuchet MS" pitchFamily="34" charset="-122"/>
                 <a:cs typeface="Trebuchet MS" pitchFamily="34" charset="-120"/>
               </a:rPr>
-              <a:t>or</a:t>
+              <a:t>ive</a:t>
             </a:r>
             <a:endParaRPr lang="en-US" sz="1300" dirty="0"/>
           </a:p>
@@ -8084,7 +8084,7 @@
                 <a:ea typeface="Calibri" pitchFamily="34" charset="-122"/>
                 <a:cs typeface="Calibri" pitchFamily="34" charset="-120"/>
               </a:rPr>
-              <a:t>person who does something</a:t>
+              <a:t>having quality of</a:t>
             </a:r>
             <a:endParaRPr lang="en-US" sz="850" dirty="0"/>
           </a:p>
@@ -8640,7 +8640,7 @@
                 <a:ea typeface="Calibri" pitchFamily="34" charset="-122"/>
                 <a:cs typeface="Calibri" pitchFamily="34" charset="-120"/>
               </a:rPr>
-              <a:t>Word Labs  •  wordlabs.app  •  Root: 'spect' = to look, watch, see</a:t>
+              <a:t>Word Labs  •  wordlabs.app  •  Root: 'spect' = look; watch</a:t>
             </a:r>
             <a:endParaRPr lang="en-US" sz="800" dirty="0"/>
           </a:p>
@@ -8779,7 +8779,7 @@
                 <a:ea typeface="Trebuchet MS" pitchFamily="34" charset="-122"/>
                 <a:cs typeface="Trebuchet MS" pitchFamily="34" charset="-120"/>
               </a:rPr>
-              <a:t>inspector</a:t>
+              <a:t>prospective</a:t>
             </a:r>
             <a:endParaRPr lang="en-US" sz="2800" dirty="0"/>
           </a:p>
@@ -8918,7 +8918,7 @@
                 <a:ea typeface="Trebuchet MS" pitchFamily="34" charset="-122"/>
                 <a:cs typeface="Trebuchet MS" pitchFamily="34" charset="-120"/>
               </a:rPr>
-              <a:t>in</a:t>
+              <a:t>pro</a:t>
             </a:r>
             <a:endParaRPr lang="en-US" sz="1300" dirty="0"/>
           </a:p>
@@ -8957,7 +8957,7 @@
                 <a:ea typeface="Calibri" pitchFamily="34" charset="-122"/>
                 <a:cs typeface="Calibri" pitchFamily="34" charset="-120"/>
               </a:rPr>
-              <a:t>into, upon</a:t>
+              <a:t>in favour of; forward</a:t>
             </a:r>
             <a:endParaRPr lang="en-US" sz="850" dirty="0"/>
           </a:p>
@@ -9069,7 +9069,7 @@
                 <a:ea typeface="Calibri" pitchFamily="34" charset="-122"/>
                 <a:cs typeface="Calibri" pitchFamily="34" charset="-120"/>
               </a:rPr>
-              <a:t>to look</a:t>
+              <a:t>look; watch</a:t>
             </a:r>
             <a:endParaRPr lang="en-US" sz="850" dirty="0"/>
           </a:p>
@@ -9142,7 +9142,7 @@
                 <a:ea typeface="Trebuchet MS" pitchFamily="34" charset="-122"/>
                 <a:cs typeface="Trebuchet MS" pitchFamily="34" charset="-120"/>
               </a:rPr>
-              <a:t>or</a:t>
+              <a:t>ive</a:t>
             </a:r>
             <a:endParaRPr lang="en-US" sz="1300" dirty="0"/>
           </a:p>
@@ -9181,7 +9181,7 @@
                 <a:ea typeface="Calibri" pitchFamily="34" charset="-122"/>
                 <a:cs typeface="Calibri" pitchFamily="34" charset="-120"/>
               </a:rPr>
-              <a:t>person who does something</a:t>
+              <a:t>having quality of</a:t>
             </a:r>
             <a:endParaRPr lang="en-US" sz="850" dirty="0"/>
           </a:p>
@@ -9340,7 +9340,7 @@
                 <a:ea typeface="Trebuchet MS" pitchFamily="34" charset="-122"/>
                 <a:cs typeface="Trebuchet MS" pitchFamily="34" charset="-120"/>
               </a:rPr>
-              <a:t>in</a:t>
+              <a:t>pro</a:t>
             </a:r>
             <a:endParaRPr lang="en-US" sz="1400" dirty="0"/>
           </a:p>
@@ -9550,7 +9550,7 @@
                 <a:ea typeface="Trebuchet MS" pitchFamily="34" charset="-122"/>
                 <a:cs typeface="Trebuchet MS" pitchFamily="34" charset="-120"/>
               </a:rPr>
-              <a:t>tor</a:t>
+              <a:t>tive</a:t>
             </a:r>
             <a:endParaRPr lang="en-US" sz="1400" dirty="0"/>
           </a:p>
@@ -9974,7 +9974,7 @@
                 <a:ea typeface="Calibri" pitchFamily="34" charset="-122"/>
                 <a:cs typeface="Calibri" pitchFamily="34" charset="-120"/>
               </a:rPr>
-              <a:t>Word Labs  •  wordlabs.app  •  Root: 'spect' = to look, watch, see</a:t>
+              <a:t>Word Labs  •  wordlabs.app  •  Root: 'spect' = look; watch</a:t>
             </a:r>
             <a:endParaRPr lang="en-US" sz="800" dirty="0"/>
           </a:p>
@@ -10113,7 +10113,7 @@
                 <a:ea typeface="Trebuchet MS" pitchFamily="34" charset="-122"/>
                 <a:cs typeface="Trebuchet MS" pitchFamily="34" charset="-120"/>
               </a:rPr>
-              <a:t>inspector</a:t>
+              <a:t>prospective</a:t>
             </a:r>
             <a:endParaRPr lang="en-US" sz="2800" dirty="0"/>
           </a:p>
@@ -10252,7 +10252,7 @@
                 <a:ea typeface="Trebuchet MS" pitchFamily="34" charset="-122"/>
                 <a:cs typeface="Trebuchet MS" pitchFamily="34" charset="-120"/>
               </a:rPr>
-              <a:t>in</a:t>
+              <a:t>pro</a:t>
             </a:r>
             <a:endParaRPr lang="en-US" sz="1300" dirty="0"/>
           </a:p>
@@ -10291,7 +10291,7 @@
                 <a:ea typeface="Calibri" pitchFamily="34" charset="-122"/>
                 <a:cs typeface="Calibri" pitchFamily="34" charset="-120"/>
               </a:rPr>
-              <a:t>into, upon</a:t>
+              <a:t>in favour of; forward</a:t>
             </a:r>
             <a:endParaRPr lang="en-US" sz="850" dirty="0"/>
           </a:p>
@@ -10403,7 +10403,7 @@
                 <a:ea typeface="Calibri" pitchFamily="34" charset="-122"/>
                 <a:cs typeface="Calibri" pitchFamily="34" charset="-120"/>
               </a:rPr>
-              <a:t>to look</a:t>
+              <a:t>look; watch</a:t>
             </a:r>
             <a:endParaRPr lang="en-US" sz="850" dirty="0"/>
           </a:p>
@@ -10476,7 +10476,7 @@
                 <a:ea typeface="Trebuchet MS" pitchFamily="34" charset="-122"/>
                 <a:cs typeface="Trebuchet MS" pitchFamily="34" charset="-120"/>
               </a:rPr>
-              <a:t>or</a:t>
+              <a:t>ive</a:t>
             </a:r>
             <a:endParaRPr lang="en-US" sz="1300" dirty="0"/>
           </a:p>
@@ -10515,7 +10515,7 @@
                 <a:ea typeface="Calibri" pitchFamily="34" charset="-122"/>
                 <a:cs typeface="Calibri" pitchFamily="34" charset="-120"/>
               </a:rPr>
-              <a:t>person who does something</a:t>
+              <a:t>having quality of</a:t>
             </a:r>
             <a:endParaRPr lang="en-US" sz="850" dirty="0"/>
           </a:p>
@@ -10674,7 +10674,7 @@
                 <a:ea typeface="Trebuchet MS" pitchFamily="34" charset="-122"/>
                 <a:cs typeface="Trebuchet MS" pitchFamily="34" charset="-120"/>
               </a:rPr>
-              <a:t>in</a:t>
+              <a:t>pro</a:t>
             </a:r>
             <a:endParaRPr lang="en-US" sz="1400" dirty="0"/>
           </a:p>
@@ -10884,7 +10884,7 @@
                 <a:ea typeface="Trebuchet MS" pitchFamily="34" charset="-122"/>
                 <a:cs typeface="Trebuchet MS" pitchFamily="34" charset="-120"/>
               </a:rPr>
-              <a:t>tor</a:t>
+              <a:t>tive</a:t>
             </a:r>
             <a:endParaRPr lang="en-US" sz="1400" dirty="0"/>
           </a:p>
@@ -10965,11 +10965,11 @@
         <p:spPr>
           <a:xfrm>
             <a:off x="1874520" y="4096512"/>
-            <a:ext cx="6903720" cy="804672"/>
+            <a:ext cx="6903720" cy="658368"/>
           </a:xfrm>
           <a:prstGeom prst="rect">
             <a:avLst>
-              <a:gd name="adj" fmla="val 6818"/>
+              <a:gd name="adj" fmla="val 8333"/>
             </a:avLst>
           </a:prstGeom>
           <a:solidFill>
@@ -10991,12 +10991,12 @@
         </p:nvSpPr>
         <p:spPr>
           <a:xfrm>
-            <a:off x="2023872" y="4169664"/>
-            <a:ext cx="685800" cy="384048"/>
+            <a:off x="1952244" y="4169664"/>
+            <a:ext cx="543652" cy="475488"/>
           </a:xfrm>
           <a:prstGeom prst="rect">
             <a:avLst>
-              <a:gd name="adj" fmla="val 9524"/>
+              <a:gd name="adj" fmla="val 7692"/>
             </a:avLst>
           </a:prstGeom>
           <a:solidFill>
@@ -11018,8 +11018,8 @@
         </p:nvSpPr>
         <p:spPr>
           <a:xfrm>
-            <a:off x="2023872" y="4169664"/>
-            <a:ext cx="685800" cy="384048"/>
+            <a:off x="1952244" y="4169664"/>
+            <a:ext cx="543652" cy="475488"/>
           </a:xfrm>
           <a:prstGeom prst="rect">
             <a:avLst/>
@@ -11043,7 +11043,7 @@
                 <a:ea typeface="Trebuchet MS" pitchFamily="34" charset="-122"/>
                 <a:cs typeface="Trebuchet MS" pitchFamily="34" charset="-120"/>
               </a:rPr>
-              <a:t>i</a:t>
+              <a:t>p</a:t>
             </a:r>
             <a:endParaRPr lang="en-US" sz="900" dirty="0"/>
           </a:p>
@@ -11057,12 +11057,12 @@
         </p:nvSpPr>
         <p:spPr>
           <a:xfrm>
-            <a:off x="2831592" y="4169664"/>
-            <a:ext cx="685800" cy="384048"/>
+            <a:off x="2546188" y="4169664"/>
+            <a:ext cx="543652" cy="475488"/>
           </a:xfrm>
           <a:prstGeom prst="rect">
             <a:avLst>
-              <a:gd name="adj" fmla="val 9524"/>
+              <a:gd name="adj" fmla="val 7692"/>
             </a:avLst>
           </a:prstGeom>
           <a:solidFill>
@@ -11084,8 +11084,8 @@
         </p:nvSpPr>
         <p:spPr>
           <a:xfrm>
-            <a:off x="2831592" y="4169664"/>
-            <a:ext cx="685800" cy="384048"/>
+            <a:off x="2546188" y="4169664"/>
+            <a:ext cx="543652" cy="475488"/>
           </a:xfrm>
           <a:prstGeom prst="rect">
             <a:avLst/>
@@ -11109,7 +11109,7 @@
                 <a:ea typeface="Trebuchet MS" pitchFamily="34" charset="-122"/>
                 <a:cs typeface="Trebuchet MS" pitchFamily="34" charset="-120"/>
               </a:rPr>
-              <a:t>n</a:t>
+              <a:t>r</a:t>
             </a:r>
             <a:endParaRPr lang="en-US" sz="900" dirty="0"/>
           </a:p>
@@ -11123,12 +11123,12 @@
         </p:nvSpPr>
         <p:spPr>
           <a:xfrm>
-            <a:off x="3639312" y="4169664"/>
-            <a:ext cx="685800" cy="384048"/>
+            <a:off x="3140133" y="4169664"/>
+            <a:ext cx="543652" cy="475488"/>
           </a:xfrm>
           <a:prstGeom prst="rect">
             <a:avLst>
-              <a:gd name="adj" fmla="val 9524"/>
+              <a:gd name="adj" fmla="val 7692"/>
             </a:avLst>
           </a:prstGeom>
           <a:solidFill>
@@ -11150,8 +11150,8 @@
         </p:nvSpPr>
         <p:spPr>
           <a:xfrm>
-            <a:off x="3639312" y="4169664"/>
-            <a:ext cx="685800" cy="384048"/>
+            <a:off x="3140133" y="4169664"/>
+            <a:ext cx="543652" cy="475488"/>
           </a:xfrm>
           <a:prstGeom prst="rect">
             <a:avLst/>
@@ -11175,7 +11175,7 @@
                 <a:ea typeface="Trebuchet MS" pitchFamily="34" charset="-122"/>
                 <a:cs typeface="Trebuchet MS" pitchFamily="34" charset="-120"/>
               </a:rPr>
-              <a:t>s</a:t>
+              <a:t>o</a:t>
             </a:r>
             <a:endParaRPr lang="en-US" sz="900" dirty="0"/>
           </a:p>
@@ -11189,12 +11189,12 @@
         </p:nvSpPr>
         <p:spPr>
           <a:xfrm>
-            <a:off x="4447032" y="4169664"/>
-            <a:ext cx="685800" cy="384048"/>
+            <a:off x="3734077" y="4169664"/>
+            <a:ext cx="543652" cy="475488"/>
           </a:xfrm>
           <a:prstGeom prst="rect">
             <a:avLst>
-              <a:gd name="adj" fmla="val 9524"/>
+              <a:gd name="adj" fmla="val 7692"/>
             </a:avLst>
           </a:prstGeom>
           <a:solidFill>
@@ -11216,8 +11216,8 @@
         </p:nvSpPr>
         <p:spPr>
           <a:xfrm>
-            <a:off x="4447032" y="4169664"/>
-            <a:ext cx="685800" cy="384048"/>
+            <a:off x="3734077" y="4169664"/>
+            <a:ext cx="543652" cy="475488"/>
           </a:xfrm>
           <a:prstGeom prst="rect">
             <a:avLst/>
@@ -11241,7 +11241,7 @@
                 <a:ea typeface="Trebuchet MS" pitchFamily="34" charset="-122"/>
                 <a:cs typeface="Trebuchet MS" pitchFamily="34" charset="-120"/>
               </a:rPr>
-              <a:t>p</a:t>
+              <a:t>s</a:t>
             </a:r>
             <a:endParaRPr lang="en-US" sz="900" dirty="0"/>
           </a:p>
@@ -11255,12 +11255,12 @@
         </p:nvSpPr>
         <p:spPr>
           <a:xfrm>
-            <a:off x="5254752" y="4169664"/>
-            <a:ext cx="685800" cy="384048"/>
+            <a:off x="4328021" y="4169664"/>
+            <a:ext cx="543652" cy="475488"/>
           </a:xfrm>
           <a:prstGeom prst="rect">
             <a:avLst>
-              <a:gd name="adj" fmla="val 9524"/>
+              <a:gd name="adj" fmla="val 7692"/>
             </a:avLst>
           </a:prstGeom>
           <a:solidFill>
@@ -11282,8 +11282,8 @@
         </p:nvSpPr>
         <p:spPr>
           <a:xfrm>
-            <a:off x="5254752" y="4169664"/>
-            <a:ext cx="685800" cy="384048"/>
+            <a:off x="4328021" y="4169664"/>
+            <a:ext cx="543652" cy="475488"/>
           </a:xfrm>
           <a:prstGeom prst="rect">
             <a:avLst/>
@@ -11307,7 +11307,7 @@
                 <a:ea typeface="Trebuchet MS" pitchFamily="34" charset="-122"/>
                 <a:cs typeface="Trebuchet MS" pitchFamily="34" charset="-120"/>
               </a:rPr>
-              <a:t>e</a:t>
+              <a:t>p</a:t>
             </a:r>
             <a:endParaRPr lang="en-US" sz="900" dirty="0"/>
           </a:p>
@@ -11321,12 +11321,12 @@
         </p:nvSpPr>
         <p:spPr>
           <a:xfrm>
-            <a:off x="6062472" y="4169664"/>
-            <a:ext cx="685800" cy="384048"/>
+            <a:off x="4921966" y="4169664"/>
+            <a:ext cx="543652" cy="475488"/>
           </a:xfrm>
           <a:prstGeom prst="rect">
             <a:avLst>
-              <a:gd name="adj" fmla="val 9524"/>
+              <a:gd name="adj" fmla="val 7692"/>
             </a:avLst>
           </a:prstGeom>
           <a:solidFill>
@@ -11348,8 +11348,8 @@
         </p:nvSpPr>
         <p:spPr>
           <a:xfrm>
-            <a:off x="6062472" y="4169664"/>
-            <a:ext cx="685800" cy="384048"/>
+            <a:off x="4921966" y="4169664"/>
+            <a:ext cx="543652" cy="475488"/>
           </a:xfrm>
           <a:prstGeom prst="rect">
             <a:avLst/>
@@ -11373,7 +11373,7 @@
                 <a:ea typeface="Trebuchet MS" pitchFamily="34" charset="-122"/>
                 <a:cs typeface="Trebuchet MS" pitchFamily="34" charset="-120"/>
               </a:rPr>
-              <a:t>c</a:t>
+              <a:t>e</a:t>
             </a:r>
             <a:endParaRPr lang="en-US" sz="900" dirty="0"/>
           </a:p>
@@ -11381,57 +11381,18 @@
       </p:sp>
       <p:sp>
         <p:nvSpPr>
-          <p:cNvPr id="51" name="Text 49"/>
-          <p:cNvSpPr/>
-          <p:nvPr/>
-        </p:nvSpPr>
-        <p:spPr>
-          <a:xfrm>
-            <a:off x="6062472" y="4572000"/>
-            <a:ext cx="685800" cy="219456"/>
-          </a:xfrm>
-          <a:prstGeom prst="rect">
-            <a:avLst/>
-          </a:prstGeom>
-          <a:noFill/>
-          <a:ln/>
-        </p:spPr>
-        <p:txBody>
-          <a:bodyPr wrap="square" lIns="0" tIns="0" rIns="0" bIns="0" rtlCol="0" anchor="t"/>
-          <a:lstStyle/>
-          <a:p>
-            <a:pPr algn="ctr" indent="0" marL="0">
-              <a:buNone/>
-            </a:pPr>
-            <a:r>
-              <a:rPr lang="en-US" sz="750" i="1" dirty="0">
-                <a:solidFill>
-                  <a:srgbClr val="94A3B8"/>
-                </a:solidFill>
-                <a:latin typeface="Calibri" pitchFamily="34" charset="0"/>
-                <a:ea typeface="Calibri" pitchFamily="34" charset="-122"/>
-                <a:cs typeface="Calibri" pitchFamily="34" charset="-120"/>
-              </a:rPr>
-              <a:t>/k/</a:t>
-            </a:r>
-            <a:endParaRPr lang="en-US" sz="750" dirty="0"/>
-          </a:p>
-        </p:txBody>
-      </p:sp>
-      <p:sp>
-        <p:nvSpPr>
-          <p:cNvPr id="52" name="Shape 50"/>
-          <p:cNvSpPr/>
-          <p:nvPr/>
-        </p:nvSpPr>
-        <p:spPr>
-          <a:xfrm>
-            <a:off x="6870192" y="4169664"/>
-            <a:ext cx="685800" cy="384048"/>
+          <p:cNvPr id="51" name="Shape 49"/>
+          <p:cNvSpPr/>
+          <p:nvPr/>
+        </p:nvSpPr>
+        <p:spPr>
+          <a:xfrm>
+            <a:off x="5515910" y="4169664"/>
+            <a:ext cx="543652" cy="475488"/>
           </a:xfrm>
           <a:prstGeom prst="rect">
             <a:avLst>
-              <a:gd name="adj" fmla="val 9524"/>
+              <a:gd name="adj" fmla="val 7692"/>
             </a:avLst>
           </a:prstGeom>
           <a:solidFill>
@@ -11447,14 +11408,14 @@
       </p:sp>
       <p:sp>
         <p:nvSpPr>
-          <p:cNvPr id="53" name="Text 51"/>
-          <p:cNvSpPr/>
-          <p:nvPr/>
-        </p:nvSpPr>
-        <p:spPr>
-          <a:xfrm>
-            <a:off x="6870192" y="4169664"/>
-            <a:ext cx="685800" cy="384048"/>
+          <p:cNvPr id="52" name="Text 50"/>
+          <p:cNvSpPr/>
+          <p:nvPr/>
+        </p:nvSpPr>
+        <p:spPr>
+          <a:xfrm>
+            <a:off x="5515910" y="4169664"/>
+            <a:ext cx="543652" cy="475488"/>
           </a:xfrm>
           <a:prstGeom prst="rect">
             <a:avLst/>
@@ -11478,7 +11439,7 @@
                 <a:ea typeface="Trebuchet MS" pitchFamily="34" charset="-122"/>
                 <a:cs typeface="Trebuchet MS" pitchFamily="34" charset="-120"/>
               </a:rPr>
-              <a:t>t</a:t>
+              <a:t>c</a:t>
             </a:r>
             <a:endParaRPr lang="en-US" sz="900" dirty="0"/>
           </a:p>
@@ -11486,18 +11447,18 @@
       </p:sp>
       <p:sp>
         <p:nvSpPr>
-          <p:cNvPr id="54" name="Shape 52"/>
-          <p:cNvSpPr/>
-          <p:nvPr/>
-        </p:nvSpPr>
-        <p:spPr>
-          <a:xfrm>
-            <a:off x="7677912" y="4169664"/>
-            <a:ext cx="685800" cy="384048"/>
+          <p:cNvPr id="53" name="Shape 51"/>
+          <p:cNvSpPr/>
+          <p:nvPr/>
+        </p:nvSpPr>
+        <p:spPr>
+          <a:xfrm>
+            <a:off x="6109855" y="4169664"/>
+            <a:ext cx="543652" cy="475488"/>
           </a:xfrm>
           <a:prstGeom prst="rect">
             <a:avLst>
-              <a:gd name="adj" fmla="val 9524"/>
+              <a:gd name="adj" fmla="val 7692"/>
             </a:avLst>
           </a:prstGeom>
           <a:solidFill>
@@ -11513,14 +11474,14 @@
       </p:sp>
       <p:sp>
         <p:nvSpPr>
-          <p:cNvPr id="55" name="Text 53"/>
-          <p:cNvSpPr/>
-          <p:nvPr/>
-        </p:nvSpPr>
-        <p:spPr>
-          <a:xfrm>
-            <a:off x="7677912" y="4169664"/>
-            <a:ext cx="685800" cy="384048"/>
+          <p:cNvPr id="54" name="Text 52"/>
+          <p:cNvSpPr/>
+          <p:nvPr/>
+        </p:nvSpPr>
+        <p:spPr>
+          <a:xfrm>
+            <a:off x="6109855" y="4169664"/>
+            <a:ext cx="543652" cy="475488"/>
           </a:xfrm>
           <a:prstGeom prst="rect">
             <a:avLst/>
@@ -11544,7 +11505,205 @@
                 <a:ea typeface="Trebuchet MS" pitchFamily="34" charset="-122"/>
                 <a:cs typeface="Trebuchet MS" pitchFamily="34" charset="-120"/>
               </a:rPr>
-              <a:t>or</a:t>
+              <a:t>t</a:t>
+            </a:r>
+            <a:endParaRPr lang="en-US" sz="900" dirty="0"/>
+          </a:p>
+        </p:txBody>
+      </p:sp>
+      <p:sp>
+        <p:nvSpPr>
+          <p:cNvPr id="55" name="Shape 53"/>
+          <p:cNvSpPr/>
+          <p:nvPr/>
+        </p:nvSpPr>
+        <p:spPr>
+          <a:xfrm>
+            <a:off x="6703799" y="4169664"/>
+            <a:ext cx="543652" cy="475488"/>
+          </a:xfrm>
+          <a:prstGeom prst="rect">
+            <a:avLst>
+              <a:gd name="adj" fmla="val 7692"/>
+            </a:avLst>
+          </a:prstGeom>
+          <a:solidFill>
+            <a:srgbClr val="FFFFFF"/>
+          </a:solidFill>
+          <a:ln w="12700">
+            <a:solidFill>
+              <a:srgbClr val="DB2777"/>
+            </a:solidFill>
+            <a:prstDash val="solid"/>
+          </a:ln>
+        </p:spPr>
+      </p:sp>
+      <p:sp>
+        <p:nvSpPr>
+          <p:cNvPr id="56" name="Text 54"/>
+          <p:cNvSpPr/>
+          <p:nvPr/>
+        </p:nvSpPr>
+        <p:spPr>
+          <a:xfrm>
+            <a:off x="6703799" y="4169664"/>
+            <a:ext cx="543652" cy="475488"/>
+          </a:xfrm>
+          <a:prstGeom prst="rect">
+            <a:avLst/>
+          </a:prstGeom>
+          <a:noFill/>
+          <a:ln/>
+        </p:spPr>
+        <p:txBody>
+          <a:bodyPr wrap="square" lIns="0" tIns="0" rIns="0" bIns="0" rtlCol="0" anchor="ctr"/>
+          <a:lstStyle/>
+          <a:p>
+            <a:pPr algn="ctr" indent="0" marL="0">
+              <a:buNone/>
+            </a:pPr>
+            <a:r>
+              <a:rPr lang="en-US" sz="900" b="1" dirty="0">
+                <a:solidFill>
+                  <a:srgbClr val="9D174D"/>
+                </a:solidFill>
+                <a:latin typeface="Trebuchet MS" pitchFamily="34" charset="0"/>
+                <a:ea typeface="Trebuchet MS" pitchFamily="34" charset="-122"/>
+                <a:cs typeface="Trebuchet MS" pitchFamily="34" charset="-120"/>
+              </a:rPr>
+              <a:t>i</a:t>
+            </a:r>
+            <a:endParaRPr lang="en-US" sz="900" dirty="0"/>
+          </a:p>
+        </p:txBody>
+      </p:sp>
+      <p:sp>
+        <p:nvSpPr>
+          <p:cNvPr id="57" name="Shape 55"/>
+          <p:cNvSpPr/>
+          <p:nvPr/>
+        </p:nvSpPr>
+        <p:spPr>
+          <a:xfrm>
+            <a:off x="7297743" y="4169664"/>
+            <a:ext cx="543652" cy="475488"/>
+          </a:xfrm>
+          <a:prstGeom prst="rect">
+            <a:avLst>
+              <a:gd name="adj" fmla="val 7692"/>
+            </a:avLst>
+          </a:prstGeom>
+          <a:solidFill>
+            <a:srgbClr val="FFFFFF"/>
+          </a:solidFill>
+          <a:ln w="12700">
+            <a:solidFill>
+              <a:srgbClr val="DB2777"/>
+            </a:solidFill>
+            <a:prstDash val="solid"/>
+          </a:ln>
+        </p:spPr>
+      </p:sp>
+      <p:sp>
+        <p:nvSpPr>
+          <p:cNvPr id="58" name="Text 56"/>
+          <p:cNvSpPr/>
+          <p:nvPr/>
+        </p:nvSpPr>
+        <p:spPr>
+          <a:xfrm>
+            <a:off x="7297743" y="4169664"/>
+            <a:ext cx="543652" cy="475488"/>
+          </a:xfrm>
+          <a:prstGeom prst="rect">
+            <a:avLst/>
+          </a:prstGeom>
+          <a:noFill/>
+          <a:ln/>
+        </p:spPr>
+        <p:txBody>
+          <a:bodyPr wrap="square" lIns="0" tIns="0" rIns="0" bIns="0" rtlCol="0" anchor="ctr"/>
+          <a:lstStyle/>
+          <a:p>
+            <a:pPr algn="ctr" indent="0" marL="0">
+              <a:buNone/>
+            </a:pPr>
+            <a:r>
+              <a:rPr lang="en-US" sz="900" b="1" dirty="0">
+                <a:solidFill>
+                  <a:srgbClr val="9D174D"/>
+                </a:solidFill>
+                <a:latin typeface="Trebuchet MS" pitchFamily="34" charset="0"/>
+                <a:ea typeface="Trebuchet MS" pitchFamily="34" charset="-122"/>
+                <a:cs typeface="Trebuchet MS" pitchFamily="34" charset="-120"/>
+              </a:rPr>
+              <a:t>v</a:t>
+            </a:r>
+            <a:endParaRPr lang="en-US" sz="900" dirty="0"/>
+          </a:p>
+        </p:txBody>
+      </p:sp>
+      <p:sp>
+        <p:nvSpPr>
+          <p:cNvPr id="59" name="Shape 57"/>
+          <p:cNvSpPr/>
+          <p:nvPr/>
+        </p:nvSpPr>
+        <p:spPr>
+          <a:xfrm>
+            <a:off x="7891688" y="4169664"/>
+            <a:ext cx="543652" cy="475488"/>
+          </a:xfrm>
+          <a:prstGeom prst="rect">
+            <a:avLst>
+              <a:gd name="adj" fmla="val 7692"/>
+            </a:avLst>
+          </a:prstGeom>
+          <a:solidFill>
+            <a:srgbClr val="FFFFFF"/>
+          </a:solidFill>
+          <a:ln w="12700">
+            <a:solidFill>
+              <a:srgbClr val="DB2777"/>
+            </a:solidFill>
+            <a:prstDash val="solid"/>
+          </a:ln>
+        </p:spPr>
+      </p:sp>
+      <p:sp>
+        <p:nvSpPr>
+          <p:cNvPr id="60" name="Text 58"/>
+          <p:cNvSpPr/>
+          <p:nvPr/>
+        </p:nvSpPr>
+        <p:spPr>
+          <a:xfrm>
+            <a:off x="7891688" y="4169664"/>
+            <a:ext cx="543652" cy="475488"/>
+          </a:xfrm>
+          <a:prstGeom prst="rect">
+            <a:avLst/>
+          </a:prstGeom>
+          <a:noFill/>
+          <a:ln/>
+        </p:spPr>
+        <p:txBody>
+          <a:bodyPr wrap="square" lIns="0" tIns="0" rIns="0" bIns="0" rtlCol="0" anchor="ctr"/>
+          <a:lstStyle/>
+          <a:p>
+            <a:pPr algn="ctr" indent="0" marL="0">
+              <a:buNone/>
+            </a:pPr>
+            <a:r>
+              <a:rPr lang="en-US" sz="900" b="1" dirty="0">
+                <a:solidFill>
+                  <a:srgbClr val="9D174D"/>
+                </a:solidFill>
+                <a:latin typeface="Trebuchet MS" pitchFamily="34" charset="0"/>
+                <a:ea typeface="Trebuchet MS" pitchFamily="34" charset="-122"/>
+                <a:cs typeface="Trebuchet MS" pitchFamily="34" charset="-120"/>
+              </a:rPr>
+              <a:t>e</a:t>
             </a:r>
             <a:endParaRPr lang="en-US" sz="900" dirty="0"/>
           </a:p>
@@ -11836,7 +11995,7 @@
                 <a:ea typeface="Calibri" pitchFamily="34" charset="-122"/>
                 <a:cs typeface="Calibri" pitchFamily="34" charset="-120"/>
               </a:rPr>
-              <a:t>Word Labs  •  wordlabs.app  •  Root: 'spect' = to look, watch, see</a:t>
+              <a:t>Word Labs  •  wordlabs.app  •  Root: 'spect' = look; watch</a:t>
             </a:r>
             <a:endParaRPr lang="en-US" sz="800" dirty="0"/>
           </a:p>
@@ -11975,7 +12134,7 @@
                 <a:ea typeface="Trebuchet MS" pitchFamily="34" charset="-122"/>
                 <a:cs typeface="Trebuchet MS" pitchFamily="34" charset="-120"/>
               </a:rPr>
-              <a:t>inspect</a:t>
+              <a:t>aspect</a:t>
             </a:r>
             <a:endParaRPr lang="en-US" sz="2800" dirty="0"/>
           </a:p>
@@ -12663,7 +12822,7 @@
                 <a:ea typeface="Calibri" pitchFamily="34" charset="-122"/>
                 <a:cs typeface="Calibri" pitchFamily="34" charset="-120"/>
               </a:rPr>
-              <a:t>Word Labs  •  wordlabs.app  •  Root: 'spect' = to look, watch, see</a:t>
+              <a:t>Word Labs  •  wordlabs.app  •  Root: 'spect' = look; watch</a:t>
             </a:r>
             <a:endParaRPr lang="en-US" sz="800" dirty="0"/>
           </a:p>
@@ -12802,7 +12961,7 @@
                 <a:ea typeface="Trebuchet MS" pitchFamily="34" charset="-122"/>
                 <a:cs typeface="Trebuchet MS" pitchFamily="34" charset="-120"/>
               </a:rPr>
-              <a:t>inspect</a:t>
+              <a:t>aspect</a:t>
             </a:r>
             <a:endParaRPr lang="en-US" sz="2800" dirty="0"/>
           </a:p>
@@ -12941,7 +13100,7 @@
                 <a:ea typeface="Trebuchet MS" pitchFamily="34" charset="-122"/>
                 <a:cs typeface="Trebuchet MS" pitchFamily="34" charset="-120"/>
               </a:rPr>
-              <a:t>in</a:t>
+              <a:t>a</a:t>
             </a:r>
             <a:endParaRPr lang="en-US" sz="1300" dirty="0"/>
           </a:p>
@@ -12980,7 +13139,7 @@
                 <a:ea typeface="Calibri" pitchFamily="34" charset="-122"/>
                 <a:cs typeface="Calibri" pitchFamily="34" charset="-120"/>
               </a:rPr>
-              <a:t>into, upon</a:t>
+              <a:t>not; without</a:t>
             </a:r>
             <a:endParaRPr lang="en-US" sz="850" dirty="0"/>
           </a:p>
@@ -13092,7 +13251,7 @@
                 <a:ea typeface="Calibri" pitchFamily="34" charset="-122"/>
                 <a:cs typeface="Calibri" pitchFamily="34" charset="-120"/>
               </a:rPr>
-              <a:t>to look</a:t>
+              <a:t>look; watch</a:t>
             </a:r>
             <a:endParaRPr lang="en-US" sz="850" dirty="0"/>
           </a:p>
@@ -13648,7 +13807,7 @@
                 <a:ea typeface="Calibri" pitchFamily="34" charset="-122"/>
                 <a:cs typeface="Calibri" pitchFamily="34" charset="-120"/>
               </a:rPr>
-              <a:t>Word Labs  •  wordlabs.app  •  Root: 'spect' = to look, watch, see</a:t>
+              <a:t>Word Labs  •  wordlabs.app  •  Root: 'spect' = look; watch</a:t>
             </a:r>
             <a:endParaRPr lang="en-US" sz="800" dirty="0"/>
           </a:p>
@@ -13787,7 +13946,7 @@
                 <a:ea typeface="Trebuchet MS" pitchFamily="34" charset="-122"/>
                 <a:cs typeface="Trebuchet MS" pitchFamily="34" charset="-120"/>
               </a:rPr>
-              <a:t>inspect</a:t>
+              <a:t>aspect</a:t>
             </a:r>
             <a:endParaRPr lang="en-US" sz="2800" dirty="0"/>
           </a:p>
@@ -13926,7 +14085,7 @@
                 <a:ea typeface="Trebuchet MS" pitchFamily="34" charset="-122"/>
                 <a:cs typeface="Trebuchet MS" pitchFamily="34" charset="-120"/>
               </a:rPr>
-              <a:t>in</a:t>
+              <a:t>a</a:t>
             </a:r>
             <a:endParaRPr lang="en-US" sz="1300" dirty="0"/>
           </a:p>
@@ -13965,7 +14124,7 @@
                 <a:ea typeface="Calibri" pitchFamily="34" charset="-122"/>
                 <a:cs typeface="Calibri" pitchFamily="34" charset="-120"/>
               </a:rPr>
-              <a:t>into, upon</a:t>
+              <a:t>not; without</a:t>
             </a:r>
             <a:endParaRPr lang="en-US" sz="850" dirty="0"/>
           </a:p>
@@ -14077,7 +14236,7 @@
                 <a:ea typeface="Calibri" pitchFamily="34" charset="-122"/>
                 <a:cs typeface="Calibri" pitchFamily="34" charset="-120"/>
               </a:rPr>
-              <a:t>to look</a:t>
+              <a:t>look; watch</a:t>
             </a:r>
             <a:endParaRPr lang="en-US" sz="850" dirty="0"/>
           </a:p>
@@ -14236,7 +14395,7 @@
                 <a:ea typeface="Trebuchet MS" pitchFamily="34" charset="-122"/>
                 <a:cs typeface="Trebuchet MS" pitchFamily="34" charset="-120"/>
               </a:rPr>
-              <a:t>in</a:t>
+              <a:t>as</a:t>
             </a:r>
             <a:endParaRPr lang="en-US" sz="1400" dirty="0"/>
           </a:p>
@@ -14341,7 +14500,7 @@
                 <a:ea typeface="Trebuchet MS" pitchFamily="34" charset="-122"/>
                 <a:cs typeface="Trebuchet MS" pitchFamily="34" charset="-120"/>
               </a:rPr>
-              <a:t>spect</a:t>
+              <a:t>pect</a:t>
             </a:r>
             <a:endParaRPr lang="en-US" sz="1400" dirty="0"/>
           </a:p>
@@ -14674,7 +14833,7 @@
                 <a:ea typeface="Calibri" pitchFamily="34" charset="-122"/>
                 <a:cs typeface="Calibri" pitchFamily="34" charset="-120"/>
               </a:rPr>
-              <a:t>Root 'spect' — to look, watch, see</a:t>
+              <a:t>Root 'spect' — look; watch</a:t>
             </a:r>
             <a:endParaRPr lang="en-US" sz="1600" dirty="0"/>
           </a:p>
@@ -15030,7 +15189,7 @@
                 <a:ea typeface="Calibri" pitchFamily="34" charset="-122"/>
                 <a:cs typeface="Calibri" pitchFamily="34" charset="-120"/>
               </a:rPr>
-              <a:t>Word Labs  •  wordlabs.app  •  Root: 'spect' = to look, watch, see</a:t>
+              <a:t>Word Labs  •  wordlabs.app  •  Root: 'spect' = look; watch</a:t>
             </a:r>
             <a:endParaRPr lang="en-US" sz="800" dirty="0"/>
           </a:p>
@@ -15169,7 +15328,7 @@
                 <a:ea typeface="Trebuchet MS" pitchFamily="34" charset="-122"/>
                 <a:cs typeface="Trebuchet MS" pitchFamily="34" charset="-120"/>
               </a:rPr>
-              <a:t>inspect</a:t>
+              <a:t>aspect</a:t>
             </a:r>
             <a:endParaRPr lang="en-US" sz="2800" dirty="0"/>
           </a:p>
@@ -15308,7 +15467,7 @@
                 <a:ea typeface="Trebuchet MS" pitchFamily="34" charset="-122"/>
                 <a:cs typeface="Trebuchet MS" pitchFamily="34" charset="-120"/>
               </a:rPr>
-              <a:t>in</a:t>
+              <a:t>a</a:t>
             </a:r>
             <a:endParaRPr lang="en-US" sz="1300" dirty="0"/>
           </a:p>
@@ -15347,7 +15506,7 @@
                 <a:ea typeface="Calibri" pitchFamily="34" charset="-122"/>
                 <a:cs typeface="Calibri" pitchFamily="34" charset="-120"/>
               </a:rPr>
-              <a:t>into, upon</a:t>
+              <a:t>not; without</a:t>
             </a:r>
             <a:endParaRPr lang="en-US" sz="850" dirty="0"/>
           </a:p>
@@ -15459,7 +15618,7 @@
                 <a:ea typeface="Calibri" pitchFamily="34" charset="-122"/>
                 <a:cs typeface="Calibri" pitchFamily="34" charset="-120"/>
               </a:rPr>
-              <a:t>to look</a:t>
+              <a:t>look; watch</a:t>
             </a:r>
             <a:endParaRPr lang="en-US" sz="850" dirty="0"/>
           </a:p>
@@ -15618,7 +15777,7 @@
                 <a:ea typeface="Trebuchet MS" pitchFamily="34" charset="-122"/>
                 <a:cs typeface="Trebuchet MS" pitchFamily="34" charset="-120"/>
               </a:rPr>
-              <a:t>in</a:t>
+              <a:t>as</a:t>
             </a:r>
             <a:endParaRPr lang="en-US" sz="1400" dirty="0"/>
           </a:p>
@@ -15723,7 +15882,7 @@
                 <a:ea typeface="Trebuchet MS" pitchFamily="34" charset="-122"/>
                 <a:cs typeface="Trebuchet MS" pitchFamily="34" charset="-120"/>
               </a:rPr>
-              <a:t>spect</a:t>
+              <a:t>pect</a:t>
             </a:r>
             <a:endParaRPr lang="en-US" sz="1400" dirty="0"/>
           </a:p>
@@ -15804,11 +15963,11 @@
         <p:spPr>
           <a:xfrm>
             <a:off x="1874520" y="4096512"/>
-            <a:ext cx="6903720" cy="804672"/>
+            <a:ext cx="6903720" cy="658368"/>
           </a:xfrm>
           <a:prstGeom prst="rect">
             <a:avLst>
-              <a:gd name="adj" fmla="val 6818"/>
+              <a:gd name="adj" fmla="val 8333"/>
             </a:avLst>
           </a:prstGeom>
           <a:solidFill>
@@ -15830,12 +15989,12 @@
         </p:nvSpPr>
         <p:spPr>
           <a:xfrm>
-            <a:off x="2124837" y="4169664"/>
-            <a:ext cx="685800" cy="384048"/>
+            <a:off x="2254649" y="4169664"/>
+            <a:ext cx="685800" cy="475488"/>
           </a:xfrm>
           <a:prstGeom prst="rect">
             <a:avLst>
-              <a:gd name="adj" fmla="val 9524"/>
+              <a:gd name="adj" fmla="val 7692"/>
             </a:avLst>
           </a:prstGeom>
           <a:solidFill>
@@ -15857,8 +16016,8 @@
         </p:nvSpPr>
         <p:spPr>
           <a:xfrm>
-            <a:off x="2124837" y="4169664"/>
-            <a:ext cx="685800" cy="384048"/>
+            <a:off x="2254649" y="4169664"/>
+            <a:ext cx="685800" cy="475488"/>
           </a:xfrm>
           <a:prstGeom prst="rect">
             <a:avLst/>
@@ -15882,7 +16041,7 @@
                 <a:ea typeface="Trebuchet MS" pitchFamily="34" charset="-122"/>
                 <a:cs typeface="Trebuchet MS" pitchFamily="34" charset="-120"/>
               </a:rPr>
-              <a:t>i</a:t>
+              <a:t>a</a:t>
             </a:r>
             <a:endParaRPr lang="en-US" sz="900" dirty="0"/>
           </a:p>
@@ -15896,12 +16055,12 @@
         </p:nvSpPr>
         <p:spPr>
           <a:xfrm>
-            <a:off x="3033522" y="4169664"/>
-            <a:ext cx="685800" cy="384048"/>
+            <a:off x="3293146" y="4169664"/>
+            <a:ext cx="685800" cy="475488"/>
           </a:xfrm>
           <a:prstGeom prst="rect">
             <a:avLst>
-              <a:gd name="adj" fmla="val 9524"/>
+              <a:gd name="adj" fmla="val 7692"/>
             </a:avLst>
           </a:prstGeom>
           <a:solidFill>
@@ -15923,8 +16082,8 @@
         </p:nvSpPr>
         <p:spPr>
           <a:xfrm>
-            <a:off x="3033522" y="4169664"/>
-            <a:ext cx="685800" cy="384048"/>
+            <a:off x="3293146" y="4169664"/>
+            <a:ext cx="685800" cy="475488"/>
           </a:xfrm>
           <a:prstGeom prst="rect">
             <a:avLst/>
@@ -15948,7 +16107,7 @@
                 <a:ea typeface="Trebuchet MS" pitchFamily="34" charset="-122"/>
                 <a:cs typeface="Trebuchet MS" pitchFamily="34" charset="-120"/>
               </a:rPr>
-              <a:t>n</a:t>
+              <a:t>s</a:t>
             </a:r>
             <a:endParaRPr lang="en-US" sz="900" dirty="0"/>
           </a:p>
@@ -15962,12 +16121,12 @@
         </p:nvSpPr>
         <p:spPr>
           <a:xfrm>
-            <a:off x="3942207" y="4169664"/>
-            <a:ext cx="685800" cy="384048"/>
+            <a:off x="4331643" y="4169664"/>
+            <a:ext cx="685800" cy="475488"/>
           </a:xfrm>
           <a:prstGeom prst="rect">
             <a:avLst>
-              <a:gd name="adj" fmla="val 9524"/>
+              <a:gd name="adj" fmla="val 7692"/>
             </a:avLst>
           </a:prstGeom>
           <a:solidFill>
@@ -15989,8 +16148,8 @@
         </p:nvSpPr>
         <p:spPr>
           <a:xfrm>
-            <a:off x="3942207" y="4169664"/>
-            <a:ext cx="685800" cy="384048"/>
+            <a:off x="4331643" y="4169664"/>
+            <a:ext cx="685800" cy="475488"/>
           </a:xfrm>
           <a:prstGeom prst="rect">
             <a:avLst/>
@@ -16014,7 +16173,7 @@
                 <a:ea typeface="Trebuchet MS" pitchFamily="34" charset="-122"/>
                 <a:cs typeface="Trebuchet MS" pitchFamily="34" charset="-120"/>
               </a:rPr>
-              <a:t>s</a:t>
+              <a:t>p</a:t>
             </a:r>
             <a:endParaRPr lang="en-US" sz="900" dirty="0"/>
           </a:p>
@@ -16028,12 +16187,12 @@
         </p:nvSpPr>
         <p:spPr>
           <a:xfrm>
-            <a:off x="4850892" y="4169664"/>
-            <a:ext cx="685800" cy="384048"/>
+            <a:off x="5370141" y="4169664"/>
+            <a:ext cx="685800" cy="475488"/>
           </a:xfrm>
           <a:prstGeom prst="rect">
             <a:avLst>
-              <a:gd name="adj" fmla="val 9524"/>
+              <a:gd name="adj" fmla="val 7692"/>
             </a:avLst>
           </a:prstGeom>
           <a:solidFill>
@@ -16055,8 +16214,8 @@
         </p:nvSpPr>
         <p:spPr>
           <a:xfrm>
-            <a:off x="4850892" y="4169664"/>
-            <a:ext cx="685800" cy="384048"/>
+            <a:off x="5370141" y="4169664"/>
+            <a:ext cx="685800" cy="475488"/>
           </a:xfrm>
           <a:prstGeom prst="rect">
             <a:avLst/>
@@ -16080,7 +16239,7 @@
                 <a:ea typeface="Trebuchet MS" pitchFamily="34" charset="-122"/>
                 <a:cs typeface="Trebuchet MS" pitchFamily="34" charset="-120"/>
               </a:rPr>
-              <a:t>p</a:t>
+              <a:t>e</a:t>
             </a:r>
             <a:endParaRPr lang="en-US" sz="900" dirty="0"/>
           </a:p>
@@ -16094,12 +16253,12 @@
         </p:nvSpPr>
         <p:spPr>
           <a:xfrm>
-            <a:off x="5759577" y="4169664"/>
-            <a:ext cx="685800" cy="384048"/>
+            <a:off x="6408638" y="4169664"/>
+            <a:ext cx="685800" cy="475488"/>
           </a:xfrm>
           <a:prstGeom prst="rect">
             <a:avLst>
-              <a:gd name="adj" fmla="val 9524"/>
+              <a:gd name="adj" fmla="val 7692"/>
             </a:avLst>
           </a:prstGeom>
           <a:solidFill>
@@ -16121,8 +16280,8 @@
         </p:nvSpPr>
         <p:spPr>
           <a:xfrm>
-            <a:off x="5759577" y="4169664"/>
-            <a:ext cx="685800" cy="384048"/>
+            <a:off x="6408638" y="4169664"/>
+            <a:ext cx="685800" cy="475488"/>
           </a:xfrm>
           <a:prstGeom prst="rect">
             <a:avLst/>
@@ -16146,7 +16305,7 @@
                 <a:ea typeface="Trebuchet MS" pitchFamily="34" charset="-122"/>
                 <a:cs typeface="Trebuchet MS" pitchFamily="34" charset="-120"/>
               </a:rPr>
-              <a:t>e</a:t>
+              <a:t>c</a:t>
             </a:r>
             <a:endParaRPr lang="en-US" sz="900" dirty="0"/>
           </a:p>
@@ -16160,12 +16319,12 @@
         </p:nvSpPr>
         <p:spPr>
           <a:xfrm>
-            <a:off x="6668262" y="4169664"/>
-            <a:ext cx="685800" cy="384048"/>
+            <a:off x="7447135" y="4169664"/>
+            <a:ext cx="685800" cy="475488"/>
           </a:xfrm>
           <a:prstGeom prst="rect">
             <a:avLst>
-              <a:gd name="adj" fmla="val 9524"/>
+              <a:gd name="adj" fmla="val 7692"/>
             </a:avLst>
           </a:prstGeom>
           <a:solidFill>
@@ -16187,113 +16346,8 @@
         </p:nvSpPr>
         <p:spPr>
           <a:xfrm>
-            <a:off x="6668262" y="4169664"/>
-            <a:ext cx="685800" cy="384048"/>
-          </a:xfrm>
-          <a:prstGeom prst="rect">
-            <a:avLst/>
-          </a:prstGeom>
-          <a:noFill/>
-          <a:ln/>
-        </p:spPr>
-        <p:txBody>
-          <a:bodyPr wrap="square" lIns="0" tIns="0" rIns="0" bIns="0" rtlCol="0" anchor="ctr"/>
-          <a:lstStyle/>
-          <a:p>
-            <a:pPr algn="ctr" indent="0" marL="0">
-              <a:buNone/>
-            </a:pPr>
-            <a:r>
-              <a:rPr lang="en-US" sz="900" b="1" dirty="0">
-                <a:solidFill>
-                  <a:srgbClr val="9D174D"/>
-                </a:solidFill>
-                <a:latin typeface="Trebuchet MS" pitchFamily="34" charset="0"/>
-                <a:ea typeface="Trebuchet MS" pitchFamily="34" charset="-122"/>
-                <a:cs typeface="Trebuchet MS" pitchFamily="34" charset="-120"/>
-              </a:rPr>
-              <a:t>c</a:t>
-            </a:r>
-            <a:endParaRPr lang="en-US" sz="900" dirty="0"/>
-          </a:p>
-        </p:txBody>
-      </p:sp>
-      <p:sp>
-        <p:nvSpPr>
-          <p:cNvPr id="45" name="Text 43"/>
-          <p:cNvSpPr/>
-          <p:nvPr/>
-        </p:nvSpPr>
-        <p:spPr>
-          <a:xfrm>
-            <a:off x="6668262" y="4572000"/>
-            <a:ext cx="685800" cy="219456"/>
-          </a:xfrm>
-          <a:prstGeom prst="rect">
-            <a:avLst/>
-          </a:prstGeom>
-          <a:noFill/>
-          <a:ln/>
-        </p:spPr>
-        <p:txBody>
-          <a:bodyPr wrap="square" lIns="0" tIns="0" rIns="0" bIns="0" rtlCol="0" anchor="t"/>
-          <a:lstStyle/>
-          <a:p>
-            <a:pPr algn="ctr" indent="0" marL="0">
-              <a:buNone/>
-            </a:pPr>
-            <a:r>
-              <a:rPr lang="en-US" sz="750" i="1" dirty="0">
-                <a:solidFill>
-                  <a:srgbClr val="94A3B8"/>
-                </a:solidFill>
-                <a:latin typeface="Calibri" pitchFamily="34" charset="0"/>
-                <a:ea typeface="Calibri" pitchFamily="34" charset="-122"/>
-                <a:cs typeface="Calibri" pitchFamily="34" charset="-120"/>
-              </a:rPr>
-              <a:t>/k/</a:t>
-            </a:r>
-            <a:endParaRPr lang="en-US" sz="750" dirty="0"/>
-          </a:p>
-        </p:txBody>
-      </p:sp>
-      <p:sp>
-        <p:nvSpPr>
-          <p:cNvPr id="46" name="Shape 44"/>
-          <p:cNvSpPr/>
-          <p:nvPr/>
-        </p:nvSpPr>
-        <p:spPr>
-          <a:xfrm>
-            <a:off x="7576947" y="4169664"/>
-            <a:ext cx="685800" cy="384048"/>
-          </a:xfrm>
-          <a:prstGeom prst="rect">
-            <a:avLst>
-              <a:gd name="adj" fmla="val 9524"/>
-            </a:avLst>
-          </a:prstGeom>
-          <a:solidFill>
-            <a:srgbClr val="FFFFFF"/>
-          </a:solidFill>
-          <a:ln w="12700">
-            <a:solidFill>
-              <a:srgbClr val="DB2777"/>
-            </a:solidFill>
-            <a:prstDash val="solid"/>
-          </a:ln>
-        </p:spPr>
-      </p:sp>
-      <p:sp>
-        <p:nvSpPr>
-          <p:cNvPr id="47" name="Text 45"/>
-          <p:cNvSpPr/>
-          <p:nvPr/>
-        </p:nvSpPr>
-        <p:spPr>
-          <a:xfrm>
-            <a:off x="7576947" y="4169664"/>
-            <a:ext cx="685800" cy="384048"/>
+            <a:off x="7447135" y="4169664"/>
+            <a:ext cx="685800" cy="475488"/>
           </a:xfrm>
           <a:prstGeom prst="rect">
             <a:avLst/>
@@ -16891,7 +16945,7 @@
                 <a:ea typeface="Calibri" pitchFamily="34" charset="-122"/>
                 <a:cs typeface="Calibri" pitchFamily="34" charset="-120"/>
               </a:rPr>
-              <a:t>Word Labs  •  wordlabs.app  •  Root: 'spect' = to look, watch, see</a:t>
+              <a:t>Word Labs  •  wordlabs.app  •  Root: 'spect' = look; watch</a:t>
             </a:r>
             <a:endParaRPr lang="en-US" sz="800" dirty="0"/>
           </a:p>
@@ -17225,7 +17279,7 @@
                 <a:ea typeface="Trebuchet MS" pitchFamily="34" charset="-122"/>
                 <a:cs typeface="Trebuchet MS" pitchFamily="34" charset="-120"/>
               </a:rPr>
-              <a:t>0</a:t>
+              <a:t>1</a:t>
             </a:r>
             <a:pPr algn="ctr" indent="0" marL="0">
               <a:buNone/>
@@ -17531,7 +17585,7 @@
                 <a:ea typeface="Calibri" pitchFamily="34" charset="-122"/>
                 <a:cs typeface="Calibri" pitchFamily="34" charset="-120"/>
               </a:rPr>
-              <a:t>Word Labs  •  wordlabs.app  •  Root: 'spect' = to look, watch, see</a:t>
+              <a:t>Word Labs  •  wordlabs.app  •  Root: 'spect' = look; watch</a:t>
             </a:r>
             <a:endParaRPr lang="en-US" sz="800" dirty="0"/>
           </a:p>
@@ -17643,7 +17697,7 @@
                 <a:ea typeface="Calibri" pitchFamily="34" charset="-122"/>
                 <a:cs typeface="Calibri" pitchFamily="34" charset="-120"/>
               </a:rPr>
-              <a:t>Every </a:t>
+              <a:t>There are several </a:t>
             </a:r>
             <a:pPr algn="l" indent="0" marL="0">
               <a:buNone/>
@@ -17660,7 +17714,7 @@
                 <a:ea typeface="Calibri" pitchFamily="34" charset="-122"/>
                 <a:cs typeface="Calibri" pitchFamily="34" charset="-120"/>
               </a:rPr>
-              <a:t>spectator</a:t>
+              <a:t>aspects</a:t>
             </a:r>
             <a:pPr algn="l" indent="0" marL="0">
               <a:buNone/>
@@ -17674,7 +17728,7 @@
                 <a:ea typeface="Calibri" pitchFamily="34" charset="-122"/>
                 <a:cs typeface="Calibri" pitchFamily="34" charset="-120"/>
               </a:rPr>
-              <a:t> watched with </a:t>
+              <a:t> of the project we still need to finish. In </a:t>
             </a:r>
             <a:pPr algn="l" indent="0" marL="0">
               <a:buNone/>
@@ -17691,7 +17745,7 @@
                 <a:ea typeface="Calibri" pitchFamily="34" charset="-122"/>
                 <a:cs typeface="Calibri" pitchFamily="34" charset="-120"/>
               </a:rPr>
-              <a:t>respect</a:t>
+              <a:t>retrospect</a:t>
             </a:r>
             <a:pPr algn="l" indent="0" marL="0">
               <a:buNone/>
@@ -17705,7 +17759,7 @@
                 <a:ea typeface="Calibri" pitchFamily="34" charset="-122"/>
                 <a:cs typeface="Calibri" pitchFamily="34" charset="-120"/>
               </a:rPr>
-              <a:t> as the </a:t>
+              <a:t>, we should have left much earlier for the airport. The gallery held a </a:t>
             </a:r>
             <a:pPr algn="l" indent="0" marL="0">
               <a:buNone/>
@@ -17722,7 +17776,7 @@
                 <a:ea typeface="Calibri" pitchFamily="34" charset="-122"/>
                 <a:cs typeface="Calibri" pitchFamily="34" charset="-120"/>
               </a:rPr>
-              <a:t>spectacular</a:t>
+              <a:t>retrospective</a:t>
             </a:r>
             <a:pPr algn="l" indent="0" marL="0">
               <a:buNone/>
@@ -17736,7 +17790,7 @@
                 <a:ea typeface="Calibri" pitchFamily="34" charset="-122"/>
                 <a:cs typeface="Calibri" pitchFamily="34" charset="-120"/>
               </a:rPr>
-              <a:t> parade marched past.</a:t>
+              <a:t> exhibition of the artist's early work.</a:t>
             </a:r>
             <a:endParaRPr lang="en-US" sz="1800" dirty="0"/>
           </a:p>
@@ -17891,7 +17945,7 @@
                 <a:ea typeface="Trebuchet MS" pitchFamily="34" charset="-122"/>
                 <a:cs typeface="Trebuchet MS" pitchFamily="34" charset="-120"/>
               </a:rPr>
-              <a:t>spectator</a:t>
+              <a:t>aspects</a:t>
             </a:r>
             <a:endParaRPr lang="en-US" sz="1400" dirty="0"/>
           </a:p>
@@ -18019,7 +18073,7 @@
                 <a:ea typeface="Trebuchet MS" pitchFamily="34" charset="-122"/>
                 <a:cs typeface="Trebuchet MS" pitchFamily="34" charset="-120"/>
               </a:rPr>
-              <a:t>respect</a:t>
+              <a:t>retrospect</a:t>
             </a:r>
             <a:endParaRPr lang="en-US" sz="1400" dirty="0"/>
           </a:p>
@@ -18147,7 +18201,7 @@
                 <a:ea typeface="Trebuchet MS" pitchFamily="34" charset="-122"/>
                 <a:cs typeface="Trebuchet MS" pitchFamily="34" charset="-120"/>
               </a:rPr>
-              <a:t>spectacular</a:t>
+              <a:t>retrospective</a:t>
             </a:r>
             <a:endParaRPr lang="en-US" sz="1400" dirty="0"/>
           </a:p>
@@ -18478,7 +18532,7 @@
                 <a:ea typeface="Calibri" pitchFamily="34" charset="-122"/>
                 <a:cs typeface="Calibri" pitchFamily="34" charset="-120"/>
               </a:rPr>
-              <a:t>Word Labs  •  wordlabs.app  •  Root: 'spect' = to look, watch, see</a:t>
+              <a:t>Word Labs  •  wordlabs.app  •  Root: 'spect' = look; watch</a:t>
             </a:r>
             <a:endParaRPr lang="en-US" sz="800" dirty="0"/>
           </a:p>
@@ -18617,7 +18671,7 @@
                 <a:ea typeface="Trebuchet MS" pitchFamily="34" charset="-122"/>
                 <a:cs typeface="Trebuchet MS" pitchFamily="34" charset="-120"/>
               </a:rPr>
-              <a:t>spectator</a:t>
+              <a:t>aspects</a:t>
             </a:r>
             <a:endParaRPr lang="en-US" sz="2800" dirty="0"/>
           </a:p>
@@ -19305,7 +19359,7 @@
                 <a:ea typeface="Calibri" pitchFamily="34" charset="-122"/>
                 <a:cs typeface="Calibri" pitchFamily="34" charset="-120"/>
               </a:rPr>
-              <a:t>Word Labs  •  wordlabs.app  •  Root: 'spect' = to look, watch, see</a:t>
+              <a:t>Word Labs  •  wordlabs.app  •  Root: 'spect' = look; watch</a:t>
             </a:r>
             <a:endParaRPr lang="en-US" sz="800" dirty="0"/>
           </a:p>
@@ -19444,7 +19498,7 @@
                 <a:ea typeface="Trebuchet MS" pitchFamily="34" charset="-122"/>
                 <a:cs typeface="Trebuchet MS" pitchFamily="34" charset="-120"/>
               </a:rPr>
-              <a:t>spectator</a:t>
+              <a:t>aspects</a:t>
             </a:r>
             <a:endParaRPr lang="en-US" sz="2800" dirty="0"/>
           </a:p>
@@ -19533,11 +19587,11 @@
             </a:avLst>
           </a:prstGeom>
           <a:solidFill>
-            <a:srgbClr val="CCFBF1"/>
+            <a:srgbClr val="DDD6FE"/>
           </a:solidFill>
           <a:ln w="19050">
             <a:solidFill>
-              <a:srgbClr val="0D9488"/>
+              <a:srgbClr val="7C3AED"/>
             </a:solidFill>
             <a:prstDash val="solid"/>
           </a:ln>
@@ -19577,13 +19631,13 @@
             <a:r>
               <a:rPr lang="en-US" sz="1300" b="1" dirty="0">
                 <a:solidFill>
-                  <a:srgbClr val="0F766E"/>
+                  <a:srgbClr val="4C1D95"/>
                 </a:solidFill>
                 <a:latin typeface="Trebuchet MS" pitchFamily="34" charset="0"/>
                 <a:ea typeface="Trebuchet MS" pitchFamily="34" charset="-122"/>
                 <a:cs typeface="Trebuchet MS" pitchFamily="34" charset="-120"/>
               </a:rPr>
-              <a:t>spect</a:t>
+              <a:t>a</a:t>
             </a:r>
             <a:endParaRPr lang="en-US" sz="1300" dirty="0"/>
           </a:p>
@@ -19622,7 +19676,7 @@
                 <a:ea typeface="Calibri" pitchFamily="34" charset="-122"/>
                 <a:cs typeface="Calibri" pitchFamily="34" charset="-120"/>
               </a:rPr>
-              <a:t>to look</a:t>
+              <a:t>not; without</a:t>
             </a:r>
             <a:endParaRPr lang="en-US" sz="850" dirty="0"/>
           </a:p>
@@ -19645,11 +19699,11 @@
             </a:avLst>
           </a:prstGeom>
           <a:solidFill>
-            <a:srgbClr val="FCE7F3"/>
+            <a:srgbClr val="CCFBF1"/>
           </a:solidFill>
           <a:ln w="19050">
             <a:solidFill>
-              <a:srgbClr val="DB2777"/>
+              <a:srgbClr val="0D9488"/>
             </a:solidFill>
             <a:prstDash val="solid"/>
           </a:ln>
@@ -19689,13 +19743,13 @@
             <a:r>
               <a:rPr lang="en-US" sz="1300" b="1" dirty="0">
                 <a:solidFill>
-                  <a:srgbClr val="9D174D"/>
+                  <a:srgbClr val="0F766E"/>
                 </a:solidFill>
                 <a:latin typeface="Trebuchet MS" pitchFamily="34" charset="0"/>
                 <a:ea typeface="Trebuchet MS" pitchFamily="34" charset="-122"/>
                 <a:cs typeface="Trebuchet MS" pitchFamily="34" charset="-120"/>
               </a:rPr>
-              <a:t>at</a:t>
+              <a:t>spect</a:t>
             </a:r>
             <a:endParaRPr lang="en-US" sz="1300" dirty="0"/>
           </a:p>
@@ -19734,7 +19788,7 @@
                 <a:ea typeface="Calibri" pitchFamily="34" charset="-122"/>
                 <a:cs typeface="Calibri" pitchFamily="34" charset="-120"/>
               </a:rPr>
-              <a:t>connecting element</a:t>
+              <a:t>look; watch</a:t>
             </a:r>
             <a:endParaRPr lang="en-US" sz="850" dirty="0"/>
           </a:p>
@@ -19807,7 +19861,7 @@
                 <a:ea typeface="Trebuchet MS" pitchFamily="34" charset="-122"/>
                 <a:cs typeface="Trebuchet MS" pitchFamily="34" charset="-120"/>
               </a:rPr>
-              <a:t>or</a:t>
+              <a:t>s</a:t>
             </a:r>
             <a:endParaRPr lang="en-US" sz="1300" dirty="0"/>
           </a:p>
@@ -19846,7 +19900,7 @@
                 <a:ea typeface="Calibri" pitchFamily="34" charset="-122"/>
                 <a:cs typeface="Calibri" pitchFamily="34" charset="-120"/>
               </a:rPr>
-              <a:t>person who does something</a:t>
+              <a:t>plural or present tense</a:t>
             </a:r>
             <a:endParaRPr lang="en-US" sz="850" dirty="0"/>
           </a:p>
@@ -20402,7 +20456,7 @@
                 <a:ea typeface="Calibri" pitchFamily="34" charset="-122"/>
                 <a:cs typeface="Calibri" pitchFamily="34" charset="-120"/>
               </a:rPr>
-              <a:t>Word Labs  •  wordlabs.app  •  Root: 'spect' = to look, watch, see</a:t>
+              <a:t>Word Labs  •  wordlabs.app  •  Root: 'spect' = look; watch</a:t>
             </a:r>
             <a:endParaRPr lang="en-US" sz="800" dirty="0"/>
           </a:p>
@@ -20541,7 +20595,7 @@
                 <a:ea typeface="Trebuchet MS" pitchFamily="34" charset="-122"/>
                 <a:cs typeface="Trebuchet MS" pitchFamily="34" charset="-120"/>
               </a:rPr>
-              <a:t>spectator</a:t>
+              <a:t>aspects</a:t>
             </a:r>
             <a:endParaRPr lang="en-US" sz="2800" dirty="0"/>
           </a:p>
@@ -20630,11 +20684,11 @@
             </a:avLst>
           </a:prstGeom>
           <a:solidFill>
-            <a:srgbClr val="CCFBF1"/>
+            <a:srgbClr val="DDD6FE"/>
           </a:solidFill>
           <a:ln w="19050">
             <a:solidFill>
-              <a:srgbClr val="0D9488"/>
+              <a:srgbClr val="7C3AED"/>
             </a:solidFill>
             <a:prstDash val="solid"/>
           </a:ln>
@@ -20674,13 +20728,13 @@
             <a:r>
               <a:rPr lang="en-US" sz="1300" b="1" dirty="0">
                 <a:solidFill>
-                  <a:srgbClr val="0F766E"/>
+                  <a:srgbClr val="4C1D95"/>
                 </a:solidFill>
                 <a:latin typeface="Trebuchet MS" pitchFamily="34" charset="0"/>
                 <a:ea typeface="Trebuchet MS" pitchFamily="34" charset="-122"/>
                 <a:cs typeface="Trebuchet MS" pitchFamily="34" charset="-120"/>
               </a:rPr>
-              <a:t>spect</a:t>
+              <a:t>a</a:t>
             </a:r>
             <a:endParaRPr lang="en-US" sz="1300" dirty="0"/>
           </a:p>
@@ -20719,7 +20773,7 @@
                 <a:ea typeface="Calibri" pitchFamily="34" charset="-122"/>
                 <a:cs typeface="Calibri" pitchFamily="34" charset="-120"/>
               </a:rPr>
-              <a:t>to look</a:t>
+              <a:t>not; without</a:t>
             </a:r>
             <a:endParaRPr lang="en-US" sz="850" dirty="0"/>
           </a:p>
@@ -20742,11 +20796,11 @@
             </a:avLst>
           </a:prstGeom>
           <a:solidFill>
-            <a:srgbClr val="FCE7F3"/>
+            <a:srgbClr val="CCFBF1"/>
           </a:solidFill>
           <a:ln w="19050">
             <a:solidFill>
-              <a:srgbClr val="DB2777"/>
+              <a:srgbClr val="0D9488"/>
             </a:solidFill>
             <a:prstDash val="solid"/>
           </a:ln>
@@ -20786,13 +20840,13 @@
             <a:r>
               <a:rPr lang="en-US" sz="1300" b="1" dirty="0">
                 <a:solidFill>
-                  <a:srgbClr val="9D174D"/>
+                  <a:srgbClr val="0F766E"/>
                 </a:solidFill>
                 <a:latin typeface="Trebuchet MS" pitchFamily="34" charset="0"/>
                 <a:ea typeface="Trebuchet MS" pitchFamily="34" charset="-122"/>
                 <a:cs typeface="Trebuchet MS" pitchFamily="34" charset="-120"/>
               </a:rPr>
-              <a:t>at</a:t>
+              <a:t>spect</a:t>
             </a:r>
             <a:endParaRPr lang="en-US" sz="1300" dirty="0"/>
           </a:p>
@@ -20831,7 +20885,7 @@
                 <a:ea typeface="Calibri" pitchFamily="34" charset="-122"/>
                 <a:cs typeface="Calibri" pitchFamily="34" charset="-120"/>
               </a:rPr>
-              <a:t>connecting element</a:t>
+              <a:t>look; watch</a:t>
             </a:r>
             <a:endParaRPr lang="en-US" sz="850" dirty="0"/>
           </a:p>
@@ -20904,7 +20958,7 @@
                 <a:ea typeface="Trebuchet MS" pitchFamily="34" charset="-122"/>
                 <a:cs typeface="Trebuchet MS" pitchFamily="34" charset="-120"/>
               </a:rPr>
-              <a:t>or</a:t>
+              <a:t>s</a:t>
             </a:r>
             <a:endParaRPr lang="en-US" sz="1300" dirty="0"/>
           </a:p>
@@ -20943,7 +20997,7 @@
                 <a:ea typeface="Calibri" pitchFamily="34" charset="-122"/>
                 <a:cs typeface="Calibri" pitchFamily="34" charset="-120"/>
               </a:rPr>
-              <a:t>person who does something</a:t>
+              <a:t>plural or present tense</a:t>
             </a:r>
             <a:endParaRPr lang="en-US" sz="850" dirty="0"/>
           </a:p>
@@ -21050,7 +21104,7 @@
         </p:nvSpPr>
         <p:spPr>
           <a:xfrm>
-            <a:off x="2313432" y="3364992"/>
+            <a:off x="2999232" y="3364992"/>
             <a:ext cx="1645920" cy="475488"/>
           </a:xfrm>
           <a:prstGeom prst="rect">
@@ -21077,7 +21131,7 @@
         </p:nvSpPr>
         <p:spPr>
           <a:xfrm>
-            <a:off x="2313432" y="3364992"/>
+            <a:off x="2999232" y="3364992"/>
             <a:ext cx="1645920" cy="475488"/>
           </a:xfrm>
           <a:prstGeom prst="rect">
@@ -21102,7 +21156,7 @@
                 <a:ea typeface="Trebuchet MS" pitchFamily="34" charset="-122"/>
                 <a:cs typeface="Trebuchet MS" pitchFamily="34" charset="-120"/>
               </a:rPr>
-              <a:t>spec</a:t>
+              <a:t>as</a:t>
             </a:r>
             <a:endParaRPr lang="en-US" sz="1400" dirty="0"/>
           </a:p>
@@ -21116,8 +21170,8 @@
         </p:nvSpPr>
         <p:spPr>
           <a:xfrm>
-            <a:off x="3959352" y="3364992"/>
-            <a:ext cx="411480" cy="475488"/>
+            <a:off x="4645152" y="3364992"/>
+            <a:ext cx="1097280" cy="475488"/>
           </a:xfrm>
           <a:prstGeom prst="rect">
             <a:avLst/>
@@ -21155,7 +21209,7 @@
         </p:nvSpPr>
         <p:spPr>
           <a:xfrm>
-            <a:off x="4370832" y="3364992"/>
+            <a:off x="5742432" y="3364992"/>
             <a:ext cx="1645920" cy="475488"/>
           </a:xfrm>
           <a:prstGeom prst="rect">
@@ -21182,7 +21236,7 @@
         </p:nvSpPr>
         <p:spPr>
           <a:xfrm>
-            <a:off x="4370832" y="3364992"/>
+            <a:off x="5742432" y="3364992"/>
             <a:ext cx="1645920" cy="475488"/>
           </a:xfrm>
           <a:prstGeom prst="rect">
@@ -21207,7 +21261,7 @@
                 <a:ea typeface="Trebuchet MS" pitchFamily="34" charset="-122"/>
                 <a:cs typeface="Trebuchet MS" pitchFamily="34" charset="-120"/>
               </a:rPr>
-              <a:t>ta</a:t>
+              <a:t>pects</a:t>
             </a:r>
             <a:endParaRPr lang="en-US" sz="1400" dirty="0"/>
           </a:p>
@@ -21215,119 +21269,80 @@
       </p:sp>
       <p:sp>
         <p:nvSpPr>
-          <p:cNvPr id="33" name="Text 31"/>
-          <p:cNvSpPr/>
-          <p:nvPr/>
-        </p:nvSpPr>
-        <p:spPr>
-          <a:xfrm>
-            <a:off x="6016752" y="3364992"/>
-            <a:ext cx="411480" cy="475488"/>
-          </a:xfrm>
-          <a:prstGeom prst="rect">
-            <a:avLst/>
-          </a:prstGeom>
-          <a:noFill/>
-          <a:ln/>
-        </p:spPr>
-        <p:txBody>
-          <a:bodyPr wrap="square" lIns="0" tIns="0" rIns="0" bIns="0" rtlCol="0" anchor="ctr"/>
-          <a:lstStyle/>
-          <a:p>
-            <a:pPr algn="ctr" indent="0" marL="0">
-              <a:buNone/>
-            </a:pPr>
-            <a:r>
-              <a:rPr lang="en-US" sz="1600" b="1" dirty="0">
-                <a:solidFill>
-                  <a:srgbClr val="0D9488"/>
+          <p:cNvPr id="33" name="Shape 31"/>
+          <p:cNvSpPr/>
+          <p:nvPr/>
+        </p:nvSpPr>
+        <p:spPr>
+          <a:xfrm>
+            <a:off x="365760" y="4096512"/>
+            <a:ext cx="1371600" cy="804672"/>
+          </a:xfrm>
+          <a:prstGeom prst="rect">
+            <a:avLst>
+              <a:gd name="adj" fmla="val 6818"/>
+            </a:avLst>
+          </a:prstGeom>
+          <a:solidFill>
+            <a:srgbClr val="E2E8F0"/>
+          </a:solidFill>
+          <a:ln w="12700">
+            <a:solidFill>
+              <a:srgbClr val="E2E8F0"/>
+            </a:solidFill>
+            <a:prstDash val="solid"/>
+          </a:ln>
+        </p:spPr>
+      </p:sp>
+      <p:sp>
+        <p:nvSpPr>
+          <p:cNvPr id="34" name="Text 32"/>
+          <p:cNvSpPr/>
+          <p:nvPr/>
+        </p:nvSpPr>
+        <p:spPr>
+          <a:xfrm>
+            <a:off x="365760" y="4096512"/>
+            <a:ext cx="1371600" cy="804672"/>
+          </a:xfrm>
+          <a:prstGeom prst="rect">
+            <a:avLst/>
+          </a:prstGeom>
+          <a:noFill/>
+          <a:ln/>
+        </p:spPr>
+        <p:txBody>
+          <a:bodyPr wrap="square" lIns="0" tIns="0" rIns="0" bIns="0" rtlCol="0" anchor="ctr"/>
+          <a:lstStyle/>
+          <a:p>
+            <a:pPr algn="ctr" indent="0" marL="0">
+              <a:buNone/>
+            </a:pPr>
+            <a:r>
+              <a:rPr lang="en-US" sz="1100" b="1" dirty="0">
+                <a:solidFill>
+                  <a:srgbClr val="475569"/>
                 </a:solidFill>
                 <a:latin typeface="Trebuchet MS" pitchFamily="34" charset="0"/>
                 <a:ea typeface="Trebuchet MS" pitchFamily="34" charset="-122"/>
                 <a:cs typeface="Trebuchet MS" pitchFamily="34" charset="-120"/>
               </a:rPr>
-              <a:t>·</a:t>
-            </a:r>
-            <a:endParaRPr lang="en-US" sz="1600" dirty="0"/>
-          </a:p>
-        </p:txBody>
-      </p:sp>
-      <p:sp>
-        <p:nvSpPr>
-          <p:cNvPr id="34" name="Shape 32"/>
-          <p:cNvSpPr/>
-          <p:nvPr/>
-        </p:nvSpPr>
-        <p:spPr>
-          <a:xfrm>
-            <a:off x="6428232" y="3364992"/>
-            <a:ext cx="1645920" cy="475488"/>
-          </a:xfrm>
-          <a:prstGeom prst="rect">
-            <a:avLst>
-              <a:gd name="adj" fmla="val 9615"/>
-            </a:avLst>
-          </a:prstGeom>
-          <a:solidFill>
-            <a:srgbClr val="FFFFFF"/>
-          </a:solidFill>
-          <a:ln w="12700">
-            <a:solidFill>
-              <a:srgbClr val="0D9488"/>
-            </a:solidFill>
-            <a:prstDash val="solid"/>
-          </a:ln>
-        </p:spPr>
-      </p:sp>
-      <p:sp>
-        <p:nvSpPr>
-          <p:cNvPr id="35" name="Text 33"/>
-          <p:cNvSpPr/>
-          <p:nvPr/>
-        </p:nvSpPr>
-        <p:spPr>
-          <a:xfrm>
-            <a:off x="6428232" y="3364992"/>
-            <a:ext cx="1645920" cy="475488"/>
-          </a:xfrm>
-          <a:prstGeom prst="rect">
-            <a:avLst/>
-          </a:prstGeom>
-          <a:noFill/>
-          <a:ln/>
-        </p:spPr>
-        <p:txBody>
-          <a:bodyPr wrap="square" lIns="0" tIns="0" rIns="0" bIns="0" rtlCol="0" anchor="ctr"/>
-          <a:lstStyle/>
-          <a:p>
-            <a:pPr algn="ctr" indent="0" marL="0">
-              <a:buNone/>
-            </a:pPr>
-            <a:r>
-              <a:rPr lang="en-US" sz="1400" b="1" dirty="0">
-                <a:solidFill>
-                  <a:srgbClr val="0D9488"/>
-                </a:solidFill>
-                <a:latin typeface="Trebuchet MS" pitchFamily="34" charset="0"/>
-                <a:ea typeface="Trebuchet MS" pitchFamily="34" charset="-122"/>
-                <a:cs typeface="Trebuchet MS" pitchFamily="34" charset="-120"/>
-              </a:rPr>
-              <a:t>tor</a:t>
-            </a:r>
-            <a:endParaRPr lang="en-US" sz="1400" dirty="0"/>
-          </a:p>
-        </p:txBody>
-      </p:sp>
-      <p:sp>
-        <p:nvSpPr>
-          <p:cNvPr id="36" name="Shape 34"/>
-          <p:cNvSpPr/>
-          <p:nvPr/>
-        </p:nvSpPr>
-        <p:spPr>
-          <a:xfrm>
-            <a:off x="365760" y="4096512"/>
-            <a:ext cx="1371600" cy="804672"/>
+              <a:t>Phonemes</a:t>
+            </a:r>
+            <a:endParaRPr lang="en-US" sz="1100" dirty="0"/>
+          </a:p>
+        </p:txBody>
+      </p:sp>
+      <p:sp>
+        <p:nvSpPr>
+          <p:cNvPr id="35" name="Shape 33"/>
+          <p:cNvSpPr/>
+          <p:nvPr/>
+        </p:nvSpPr>
+        <p:spPr>
+          <a:xfrm>
+            <a:off x="1874520" y="4096512"/>
+            <a:ext cx="6903720" cy="804672"/>
           </a:xfrm>
           <a:prstGeom prst="rect">
             <a:avLst>
@@ -21335,85 +21350,19 @@
             </a:avLst>
           </a:prstGeom>
           <a:solidFill>
-            <a:srgbClr val="E2E8F0"/>
+            <a:srgbClr val="F8FAFC"/>
           </a:solidFill>
           <a:ln w="12700">
             <a:solidFill>
               <a:srgbClr val="E2E8F0"/>
             </a:solidFill>
-            <a:prstDash val="solid"/>
-          </a:ln>
-        </p:spPr>
-      </p:sp>
-      <p:sp>
-        <p:nvSpPr>
-          <p:cNvPr id="37" name="Text 35"/>
-          <p:cNvSpPr/>
-          <p:nvPr/>
-        </p:nvSpPr>
-        <p:spPr>
-          <a:xfrm>
-            <a:off x="365760" y="4096512"/>
-            <a:ext cx="1371600" cy="804672"/>
-          </a:xfrm>
-          <a:prstGeom prst="rect">
-            <a:avLst/>
-          </a:prstGeom>
-          <a:noFill/>
-          <a:ln/>
-        </p:spPr>
-        <p:txBody>
-          <a:bodyPr wrap="square" lIns="0" tIns="0" rIns="0" bIns="0" rtlCol="0" anchor="ctr"/>
-          <a:lstStyle/>
-          <a:p>
-            <a:pPr algn="ctr" indent="0" marL="0">
-              <a:buNone/>
-            </a:pPr>
-            <a:r>
-              <a:rPr lang="en-US" sz="1100" b="1" dirty="0">
-                <a:solidFill>
-                  <a:srgbClr val="475569"/>
-                </a:solidFill>
-                <a:latin typeface="Trebuchet MS" pitchFamily="34" charset="0"/>
-                <a:ea typeface="Trebuchet MS" pitchFamily="34" charset="-122"/>
-                <a:cs typeface="Trebuchet MS" pitchFamily="34" charset="-120"/>
-              </a:rPr>
-              <a:t>Phonemes</a:t>
-            </a:r>
-            <a:endParaRPr lang="en-US" sz="1100" dirty="0"/>
-          </a:p>
-        </p:txBody>
-      </p:sp>
-      <p:sp>
-        <p:nvSpPr>
-          <p:cNvPr id="38" name="Shape 36"/>
-          <p:cNvSpPr/>
-          <p:nvPr/>
-        </p:nvSpPr>
-        <p:spPr>
-          <a:xfrm>
-            <a:off x="1874520" y="4096512"/>
-            <a:ext cx="6903720" cy="804672"/>
-          </a:xfrm>
-          <a:prstGeom prst="rect">
-            <a:avLst>
-              <a:gd name="adj" fmla="val 6818"/>
-            </a:avLst>
-          </a:prstGeom>
-          <a:solidFill>
-            <a:srgbClr val="F8FAFC"/>
-          </a:solidFill>
-          <a:ln w="12700">
-            <a:solidFill>
-              <a:srgbClr val="E2E8F0"/>
-            </a:solidFill>
             <a:prstDash val="dash"/>
           </a:ln>
         </p:spPr>
       </p:sp>
       <p:sp>
         <p:nvSpPr>
-          <p:cNvPr id="39" name="Text 37"/>
+          <p:cNvPr id="36" name="Text 34"/>
           <p:cNvSpPr/>
           <p:nvPr/>
         </p:nvSpPr>
@@ -21736,7 +21685,7 @@
                 <a:ea typeface="Calibri" pitchFamily="34" charset="-122"/>
                 <a:cs typeface="Calibri" pitchFamily="34" charset="-120"/>
               </a:rPr>
-              <a:t>Word Labs  •  wordlabs.app  •  Root: 'spect' = to look, watch, see</a:t>
+              <a:t>Word Labs  •  wordlabs.app  •  Root: 'spect' = look; watch</a:t>
             </a:r>
             <a:endParaRPr lang="en-US" sz="800" dirty="0"/>
           </a:p>
@@ -21875,7 +21824,7 @@
                 <a:ea typeface="Trebuchet MS" pitchFamily="34" charset="-122"/>
                 <a:cs typeface="Trebuchet MS" pitchFamily="34" charset="-120"/>
               </a:rPr>
-              <a:t>spectator</a:t>
+              <a:t>aspects</a:t>
             </a:r>
             <a:endParaRPr lang="en-US" sz="2800" dirty="0"/>
           </a:p>
@@ -21964,11 +21913,11 @@
             </a:avLst>
           </a:prstGeom>
           <a:solidFill>
-            <a:srgbClr val="CCFBF1"/>
+            <a:srgbClr val="DDD6FE"/>
           </a:solidFill>
           <a:ln w="19050">
             <a:solidFill>
-              <a:srgbClr val="0D9488"/>
+              <a:srgbClr val="7C3AED"/>
             </a:solidFill>
             <a:prstDash val="solid"/>
           </a:ln>
@@ -22008,13 +21957,13 @@
             <a:r>
               <a:rPr lang="en-US" sz="1300" b="1" dirty="0">
                 <a:solidFill>
-                  <a:srgbClr val="0F766E"/>
+                  <a:srgbClr val="4C1D95"/>
                 </a:solidFill>
                 <a:latin typeface="Trebuchet MS" pitchFamily="34" charset="0"/>
                 <a:ea typeface="Trebuchet MS" pitchFamily="34" charset="-122"/>
                 <a:cs typeface="Trebuchet MS" pitchFamily="34" charset="-120"/>
               </a:rPr>
-              <a:t>spect</a:t>
+              <a:t>a</a:t>
             </a:r>
             <a:endParaRPr lang="en-US" sz="1300" dirty="0"/>
           </a:p>
@@ -22053,7 +22002,7 @@
                 <a:ea typeface="Calibri" pitchFamily="34" charset="-122"/>
                 <a:cs typeface="Calibri" pitchFamily="34" charset="-120"/>
               </a:rPr>
-              <a:t>to look</a:t>
+              <a:t>not; without</a:t>
             </a:r>
             <a:endParaRPr lang="en-US" sz="850" dirty="0"/>
           </a:p>
@@ -22076,11 +22025,11 @@
             </a:avLst>
           </a:prstGeom>
           <a:solidFill>
-            <a:srgbClr val="FCE7F3"/>
+            <a:srgbClr val="CCFBF1"/>
           </a:solidFill>
           <a:ln w="19050">
             <a:solidFill>
-              <a:srgbClr val="DB2777"/>
+              <a:srgbClr val="0D9488"/>
             </a:solidFill>
             <a:prstDash val="solid"/>
           </a:ln>
@@ -22120,13 +22069,13 @@
             <a:r>
               <a:rPr lang="en-US" sz="1300" b="1" dirty="0">
                 <a:solidFill>
-                  <a:srgbClr val="9D174D"/>
+                  <a:srgbClr val="0F766E"/>
                 </a:solidFill>
                 <a:latin typeface="Trebuchet MS" pitchFamily="34" charset="0"/>
                 <a:ea typeface="Trebuchet MS" pitchFamily="34" charset="-122"/>
                 <a:cs typeface="Trebuchet MS" pitchFamily="34" charset="-120"/>
               </a:rPr>
-              <a:t>at</a:t>
+              <a:t>spect</a:t>
             </a:r>
             <a:endParaRPr lang="en-US" sz="1300" dirty="0"/>
           </a:p>
@@ -22165,7 +22114,7 @@
                 <a:ea typeface="Calibri" pitchFamily="34" charset="-122"/>
                 <a:cs typeface="Calibri" pitchFamily="34" charset="-120"/>
               </a:rPr>
-              <a:t>connecting element</a:t>
+              <a:t>look; watch</a:t>
             </a:r>
             <a:endParaRPr lang="en-US" sz="850" dirty="0"/>
           </a:p>
@@ -22238,7 +22187,7 @@
                 <a:ea typeface="Trebuchet MS" pitchFamily="34" charset="-122"/>
                 <a:cs typeface="Trebuchet MS" pitchFamily="34" charset="-120"/>
               </a:rPr>
-              <a:t>or</a:t>
+              <a:t>s</a:t>
             </a:r>
             <a:endParaRPr lang="en-US" sz="1300" dirty="0"/>
           </a:p>
@@ -22277,7 +22226,7 @@
                 <a:ea typeface="Calibri" pitchFamily="34" charset="-122"/>
                 <a:cs typeface="Calibri" pitchFamily="34" charset="-120"/>
               </a:rPr>
-              <a:t>person who does something</a:t>
+              <a:t>plural or present tense</a:t>
             </a:r>
             <a:endParaRPr lang="en-US" sz="850" dirty="0"/>
           </a:p>
@@ -22384,7 +22333,7 @@
         </p:nvSpPr>
         <p:spPr>
           <a:xfrm>
-            <a:off x="2313432" y="3364992"/>
+            <a:off x="2999232" y="3364992"/>
             <a:ext cx="1645920" cy="475488"/>
           </a:xfrm>
           <a:prstGeom prst="rect">
@@ -22411,7 +22360,7 @@
         </p:nvSpPr>
         <p:spPr>
           <a:xfrm>
-            <a:off x="2313432" y="3364992"/>
+            <a:off x="2999232" y="3364992"/>
             <a:ext cx="1645920" cy="475488"/>
           </a:xfrm>
           <a:prstGeom prst="rect">
@@ -22436,7 +22385,7 @@
                 <a:ea typeface="Trebuchet MS" pitchFamily="34" charset="-122"/>
                 <a:cs typeface="Trebuchet MS" pitchFamily="34" charset="-120"/>
               </a:rPr>
-              <a:t>spec</a:t>
+              <a:t>as</a:t>
             </a:r>
             <a:endParaRPr lang="en-US" sz="1400" dirty="0"/>
           </a:p>
@@ -22450,8 +22399,8 @@
         </p:nvSpPr>
         <p:spPr>
           <a:xfrm>
-            <a:off x="3959352" y="3364992"/>
-            <a:ext cx="411480" cy="475488"/>
+            <a:off x="4645152" y="3364992"/>
+            <a:ext cx="1097280" cy="475488"/>
           </a:xfrm>
           <a:prstGeom prst="rect">
             <a:avLst/>
@@ -22489,7 +22438,7 @@
         </p:nvSpPr>
         <p:spPr>
           <a:xfrm>
-            <a:off x="4370832" y="3364992"/>
+            <a:off x="5742432" y="3364992"/>
             <a:ext cx="1645920" cy="475488"/>
           </a:xfrm>
           <a:prstGeom prst="rect">
@@ -22516,7 +22465,7 @@
         </p:nvSpPr>
         <p:spPr>
           <a:xfrm>
-            <a:off x="4370832" y="3364992"/>
+            <a:off x="5742432" y="3364992"/>
             <a:ext cx="1645920" cy="475488"/>
           </a:xfrm>
           <a:prstGeom prst="rect">
@@ -22541,7 +22490,7 @@
                 <a:ea typeface="Trebuchet MS" pitchFamily="34" charset="-122"/>
                 <a:cs typeface="Trebuchet MS" pitchFamily="34" charset="-120"/>
               </a:rPr>
-              <a:t>ta</a:t>
+              <a:t>pects</a:t>
             </a:r>
             <a:endParaRPr lang="en-US" sz="1400" dirty="0"/>
           </a:p>
@@ -22549,193 +22498,247 @@
       </p:sp>
       <p:sp>
         <p:nvSpPr>
-          <p:cNvPr id="33" name="Text 31"/>
-          <p:cNvSpPr/>
-          <p:nvPr/>
-        </p:nvSpPr>
-        <p:spPr>
-          <a:xfrm>
-            <a:off x="6016752" y="3364992"/>
-            <a:ext cx="411480" cy="475488"/>
-          </a:xfrm>
-          <a:prstGeom prst="rect">
-            <a:avLst/>
-          </a:prstGeom>
-          <a:noFill/>
-          <a:ln/>
-        </p:spPr>
-        <p:txBody>
-          <a:bodyPr wrap="square" lIns="0" tIns="0" rIns="0" bIns="0" rtlCol="0" anchor="ctr"/>
-          <a:lstStyle/>
-          <a:p>
-            <a:pPr algn="ctr" indent="0" marL="0">
-              <a:buNone/>
-            </a:pPr>
-            <a:r>
-              <a:rPr lang="en-US" sz="1600" b="1" dirty="0">
-                <a:solidFill>
-                  <a:srgbClr val="0D9488"/>
+          <p:cNvPr id="33" name="Shape 31"/>
+          <p:cNvSpPr/>
+          <p:nvPr/>
+        </p:nvSpPr>
+        <p:spPr>
+          <a:xfrm>
+            <a:off x="365760" y="4096512"/>
+            <a:ext cx="1371600" cy="804672"/>
+          </a:xfrm>
+          <a:prstGeom prst="rect">
+            <a:avLst>
+              <a:gd name="adj" fmla="val 6818"/>
+            </a:avLst>
+          </a:prstGeom>
+          <a:solidFill>
+            <a:srgbClr val="E2E8F0"/>
+          </a:solidFill>
+          <a:ln w="12700">
+            <a:solidFill>
+              <a:srgbClr val="E2E8F0"/>
+            </a:solidFill>
+            <a:prstDash val="solid"/>
+          </a:ln>
+        </p:spPr>
+      </p:sp>
+      <p:sp>
+        <p:nvSpPr>
+          <p:cNvPr id="34" name="Text 32"/>
+          <p:cNvSpPr/>
+          <p:nvPr/>
+        </p:nvSpPr>
+        <p:spPr>
+          <a:xfrm>
+            <a:off x="365760" y="4096512"/>
+            <a:ext cx="1371600" cy="804672"/>
+          </a:xfrm>
+          <a:prstGeom prst="rect">
+            <a:avLst/>
+          </a:prstGeom>
+          <a:noFill/>
+          <a:ln/>
+        </p:spPr>
+        <p:txBody>
+          <a:bodyPr wrap="square" lIns="0" tIns="0" rIns="0" bIns="0" rtlCol="0" anchor="ctr"/>
+          <a:lstStyle/>
+          <a:p>
+            <a:pPr algn="ctr" indent="0" marL="0">
+              <a:buNone/>
+            </a:pPr>
+            <a:r>
+              <a:rPr lang="en-US" sz="1100" b="1" dirty="0">
+                <a:solidFill>
+                  <a:srgbClr val="475569"/>
                 </a:solidFill>
                 <a:latin typeface="Trebuchet MS" pitchFamily="34" charset="0"/>
                 <a:ea typeface="Trebuchet MS" pitchFamily="34" charset="-122"/>
                 <a:cs typeface="Trebuchet MS" pitchFamily="34" charset="-120"/>
               </a:rPr>
-              <a:t>·</a:t>
-            </a:r>
-            <a:endParaRPr lang="en-US" sz="1600" dirty="0"/>
-          </a:p>
-        </p:txBody>
-      </p:sp>
-      <p:sp>
-        <p:nvSpPr>
-          <p:cNvPr id="34" name="Shape 32"/>
-          <p:cNvSpPr/>
-          <p:nvPr/>
-        </p:nvSpPr>
-        <p:spPr>
-          <a:xfrm>
-            <a:off x="6428232" y="3364992"/>
-            <a:ext cx="1645920" cy="475488"/>
+              <a:t>Phonemes</a:t>
+            </a:r>
+            <a:endParaRPr lang="en-US" sz="1100" dirty="0"/>
+          </a:p>
+        </p:txBody>
+      </p:sp>
+      <p:sp>
+        <p:nvSpPr>
+          <p:cNvPr id="35" name="Shape 33"/>
+          <p:cNvSpPr/>
+          <p:nvPr/>
+        </p:nvSpPr>
+        <p:spPr>
+          <a:xfrm>
+            <a:off x="1874520" y="4096512"/>
+            <a:ext cx="6903720" cy="658368"/>
           </a:xfrm>
           <a:prstGeom prst="rect">
             <a:avLst>
-              <a:gd name="adj" fmla="val 9615"/>
+              <a:gd name="adj" fmla="val 8333"/>
             </a:avLst>
           </a:prstGeom>
           <a:solidFill>
+            <a:srgbClr val="FCE7F3"/>
+          </a:solidFill>
+          <a:ln w="12700">
+            <a:solidFill>
+              <a:srgbClr val="DB2777"/>
+            </a:solidFill>
+            <a:prstDash val="solid"/>
+          </a:ln>
+        </p:spPr>
+      </p:sp>
+      <p:sp>
+        <p:nvSpPr>
+          <p:cNvPr id="36" name="Shape 34"/>
+          <p:cNvSpPr/>
+          <p:nvPr/>
+        </p:nvSpPr>
+        <p:spPr>
+          <a:xfrm>
+            <a:off x="2124837" y="4169664"/>
+            <a:ext cx="685800" cy="475488"/>
+          </a:xfrm>
+          <a:prstGeom prst="rect">
+            <a:avLst>
+              <a:gd name="adj" fmla="val 7692"/>
+            </a:avLst>
+          </a:prstGeom>
+          <a:solidFill>
             <a:srgbClr val="FFFFFF"/>
           </a:solidFill>
           <a:ln w="12700">
             <a:solidFill>
-              <a:srgbClr val="0D9488"/>
-            </a:solidFill>
-            <a:prstDash val="solid"/>
-          </a:ln>
-        </p:spPr>
-      </p:sp>
-      <p:sp>
-        <p:nvSpPr>
-          <p:cNvPr id="35" name="Text 33"/>
-          <p:cNvSpPr/>
-          <p:nvPr/>
-        </p:nvSpPr>
-        <p:spPr>
-          <a:xfrm>
-            <a:off x="6428232" y="3364992"/>
-            <a:ext cx="1645920" cy="475488"/>
-          </a:xfrm>
-          <a:prstGeom prst="rect">
-            <a:avLst/>
-          </a:prstGeom>
-          <a:noFill/>
-          <a:ln/>
-        </p:spPr>
-        <p:txBody>
-          <a:bodyPr wrap="square" lIns="0" tIns="0" rIns="0" bIns="0" rtlCol="0" anchor="ctr"/>
-          <a:lstStyle/>
-          <a:p>
-            <a:pPr algn="ctr" indent="0" marL="0">
-              <a:buNone/>
-            </a:pPr>
-            <a:r>
-              <a:rPr lang="en-US" sz="1400" b="1" dirty="0">
-                <a:solidFill>
-                  <a:srgbClr val="0D9488"/>
+              <a:srgbClr val="DB2777"/>
+            </a:solidFill>
+            <a:prstDash val="solid"/>
+          </a:ln>
+        </p:spPr>
+      </p:sp>
+      <p:sp>
+        <p:nvSpPr>
+          <p:cNvPr id="37" name="Text 35"/>
+          <p:cNvSpPr/>
+          <p:nvPr/>
+        </p:nvSpPr>
+        <p:spPr>
+          <a:xfrm>
+            <a:off x="2124837" y="4169664"/>
+            <a:ext cx="685800" cy="475488"/>
+          </a:xfrm>
+          <a:prstGeom prst="rect">
+            <a:avLst/>
+          </a:prstGeom>
+          <a:noFill/>
+          <a:ln/>
+        </p:spPr>
+        <p:txBody>
+          <a:bodyPr wrap="square" lIns="0" tIns="0" rIns="0" bIns="0" rtlCol="0" anchor="ctr"/>
+          <a:lstStyle/>
+          <a:p>
+            <a:pPr algn="ctr" indent="0" marL="0">
+              <a:buNone/>
+            </a:pPr>
+            <a:r>
+              <a:rPr lang="en-US" sz="900" b="1" dirty="0">
+                <a:solidFill>
+                  <a:srgbClr val="9D174D"/>
                 </a:solidFill>
                 <a:latin typeface="Trebuchet MS" pitchFamily="34" charset="0"/>
                 <a:ea typeface="Trebuchet MS" pitchFamily="34" charset="-122"/>
                 <a:cs typeface="Trebuchet MS" pitchFamily="34" charset="-120"/>
               </a:rPr>
-              <a:t>tor</a:t>
-            </a:r>
-            <a:endParaRPr lang="en-US" sz="1400" dirty="0"/>
-          </a:p>
-        </p:txBody>
-      </p:sp>
-      <p:sp>
-        <p:nvSpPr>
-          <p:cNvPr id="36" name="Shape 34"/>
-          <p:cNvSpPr/>
-          <p:nvPr/>
-        </p:nvSpPr>
-        <p:spPr>
-          <a:xfrm>
-            <a:off x="365760" y="4096512"/>
-            <a:ext cx="1371600" cy="804672"/>
+              <a:t>a</a:t>
+            </a:r>
+            <a:endParaRPr lang="en-US" sz="900" dirty="0"/>
+          </a:p>
+        </p:txBody>
+      </p:sp>
+      <p:sp>
+        <p:nvSpPr>
+          <p:cNvPr id="38" name="Shape 36"/>
+          <p:cNvSpPr/>
+          <p:nvPr/>
+        </p:nvSpPr>
+        <p:spPr>
+          <a:xfrm>
+            <a:off x="3033522" y="4169664"/>
+            <a:ext cx="685800" cy="475488"/>
           </a:xfrm>
           <a:prstGeom prst="rect">
             <a:avLst>
-              <a:gd name="adj" fmla="val 6818"/>
+              <a:gd name="adj" fmla="val 7692"/>
             </a:avLst>
           </a:prstGeom>
           <a:solidFill>
-            <a:srgbClr val="E2E8F0"/>
-          </a:solidFill>
-          <a:ln w="12700">
-            <a:solidFill>
-              <a:srgbClr val="E2E8F0"/>
-            </a:solidFill>
-            <a:prstDash val="solid"/>
-          </a:ln>
-        </p:spPr>
-      </p:sp>
-      <p:sp>
-        <p:nvSpPr>
-          <p:cNvPr id="37" name="Text 35"/>
-          <p:cNvSpPr/>
-          <p:nvPr/>
-        </p:nvSpPr>
-        <p:spPr>
-          <a:xfrm>
-            <a:off x="365760" y="4096512"/>
-            <a:ext cx="1371600" cy="804672"/>
-          </a:xfrm>
-          <a:prstGeom prst="rect">
-            <a:avLst/>
-          </a:prstGeom>
-          <a:noFill/>
-          <a:ln/>
-        </p:spPr>
-        <p:txBody>
-          <a:bodyPr wrap="square" lIns="0" tIns="0" rIns="0" bIns="0" rtlCol="0" anchor="ctr"/>
-          <a:lstStyle/>
-          <a:p>
-            <a:pPr algn="ctr" indent="0" marL="0">
-              <a:buNone/>
-            </a:pPr>
-            <a:r>
-              <a:rPr lang="en-US" sz="1100" b="1" dirty="0">
-                <a:solidFill>
-                  <a:srgbClr val="475569"/>
+            <a:srgbClr val="FFFFFF"/>
+          </a:solidFill>
+          <a:ln w="12700">
+            <a:solidFill>
+              <a:srgbClr val="DB2777"/>
+            </a:solidFill>
+            <a:prstDash val="solid"/>
+          </a:ln>
+        </p:spPr>
+      </p:sp>
+      <p:sp>
+        <p:nvSpPr>
+          <p:cNvPr id="39" name="Text 37"/>
+          <p:cNvSpPr/>
+          <p:nvPr/>
+        </p:nvSpPr>
+        <p:spPr>
+          <a:xfrm>
+            <a:off x="3033522" y="4169664"/>
+            <a:ext cx="685800" cy="475488"/>
+          </a:xfrm>
+          <a:prstGeom prst="rect">
+            <a:avLst/>
+          </a:prstGeom>
+          <a:noFill/>
+          <a:ln/>
+        </p:spPr>
+        <p:txBody>
+          <a:bodyPr wrap="square" lIns="0" tIns="0" rIns="0" bIns="0" rtlCol="0" anchor="ctr"/>
+          <a:lstStyle/>
+          <a:p>
+            <a:pPr algn="ctr" indent="0" marL="0">
+              <a:buNone/>
+            </a:pPr>
+            <a:r>
+              <a:rPr lang="en-US" sz="900" b="1" dirty="0">
+                <a:solidFill>
+                  <a:srgbClr val="9D174D"/>
                 </a:solidFill>
                 <a:latin typeface="Trebuchet MS" pitchFamily="34" charset="0"/>
                 <a:ea typeface="Trebuchet MS" pitchFamily="34" charset="-122"/>
                 <a:cs typeface="Trebuchet MS" pitchFamily="34" charset="-120"/>
               </a:rPr>
-              <a:t>Phonemes</a:t>
-            </a:r>
-            <a:endParaRPr lang="en-US" sz="1100" dirty="0"/>
-          </a:p>
-        </p:txBody>
-      </p:sp>
-      <p:sp>
-        <p:nvSpPr>
-          <p:cNvPr id="38" name="Shape 36"/>
-          <p:cNvSpPr/>
-          <p:nvPr/>
-        </p:nvSpPr>
-        <p:spPr>
-          <a:xfrm>
-            <a:off x="1874520" y="4096512"/>
-            <a:ext cx="6903720" cy="804672"/>
+              <a:t>s</a:t>
+            </a:r>
+            <a:endParaRPr lang="en-US" sz="900" dirty="0"/>
+          </a:p>
+        </p:txBody>
+      </p:sp>
+      <p:sp>
+        <p:nvSpPr>
+          <p:cNvPr id="40" name="Shape 38"/>
+          <p:cNvSpPr/>
+          <p:nvPr/>
+        </p:nvSpPr>
+        <p:spPr>
+          <a:xfrm>
+            <a:off x="3942207" y="4169664"/>
+            <a:ext cx="685800" cy="475488"/>
           </a:xfrm>
           <a:prstGeom prst="rect">
             <a:avLst>
-              <a:gd name="adj" fmla="val 6818"/>
+              <a:gd name="adj" fmla="val 7692"/>
             </a:avLst>
           </a:prstGeom>
           <a:solidFill>
-            <a:srgbClr val="FCE7F3"/>
+            <a:srgbClr val="FFFFFF"/>
           </a:solidFill>
           <a:ln w="12700">
             <a:solidFill>
@@ -22747,41 +22750,14 @@
       </p:sp>
       <p:sp>
         <p:nvSpPr>
-          <p:cNvPr id="39" name="Shape 37"/>
-          <p:cNvSpPr/>
-          <p:nvPr/>
-        </p:nvSpPr>
-        <p:spPr>
-          <a:xfrm>
-            <a:off x="2023872" y="4169664"/>
-            <a:ext cx="685800" cy="384048"/>
-          </a:xfrm>
-          <a:prstGeom prst="rect">
-            <a:avLst>
-              <a:gd name="adj" fmla="val 9524"/>
-            </a:avLst>
-          </a:prstGeom>
-          <a:solidFill>
-            <a:srgbClr val="FFFFFF"/>
-          </a:solidFill>
-          <a:ln w="12700">
-            <a:solidFill>
-              <a:srgbClr val="DB2777"/>
-            </a:solidFill>
-            <a:prstDash val="solid"/>
-          </a:ln>
-        </p:spPr>
-      </p:sp>
-      <p:sp>
-        <p:nvSpPr>
-          <p:cNvPr id="40" name="Text 38"/>
-          <p:cNvSpPr/>
-          <p:nvPr/>
-        </p:nvSpPr>
-        <p:spPr>
-          <a:xfrm>
-            <a:off x="2023872" y="4169664"/>
-            <a:ext cx="685800" cy="384048"/>
+          <p:cNvPr id="41" name="Text 39"/>
+          <p:cNvSpPr/>
+          <p:nvPr/>
+        </p:nvSpPr>
+        <p:spPr>
+          <a:xfrm>
+            <a:off x="3942207" y="4169664"/>
+            <a:ext cx="685800" cy="475488"/>
           </a:xfrm>
           <a:prstGeom prst="rect">
             <a:avLst/>
@@ -22805,7 +22781,7 @@
                 <a:ea typeface="Trebuchet MS" pitchFamily="34" charset="-122"/>
                 <a:cs typeface="Trebuchet MS" pitchFamily="34" charset="-120"/>
               </a:rPr>
-              <a:t>s</a:t>
+              <a:t>p</a:t>
             </a:r>
             <a:endParaRPr lang="en-US" sz="900" dirty="0"/>
           </a:p>
@@ -22813,18 +22789,18 @@
       </p:sp>
       <p:sp>
         <p:nvSpPr>
-          <p:cNvPr id="41" name="Shape 39"/>
-          <p:cNvSpPr/>
-          <p:nvPr/>
-        </p:nvSpPr>
-        <p:spPr>
-          <a:xfrm>
-            <a:off x="2831592" y="4169664"/>
-            <a:ext cx="685800" cy="384048"/>
+          <p:cNvPr id="42" name="Shape 40"/>
+          <p:cNvSpPr/>
+          <p:nvPr/>
+        </p:nvSpPr>
+        <p:spPr>
+          <a:xfrm>
+            <a:off x="4850892" y="4169664"/>
+            <a:ext cx="685800" cy="475488"/>
           </a:xfrm>
           <a:prstGeom prst="rect">
             <a:avLst>
-              <a:gd name="adj" fmla="val 9524"/>
+              <a:gd name="adj" fmla="val 7692"/>
             </a:avLst>
           </a:prstGeom>
           <a:solidFill>
@@ -22840,14 +22816,14 @@
       </p:sp>
       <p:sp>
         <p:nvSpPr>
-          <p:cNvPr id="42" name="Text 40"/>
-          <p:cNvSpPr/>
-          <p:nvPr/>
-        </p:nvSpPr>
-        <p:spPr>
-          <a:xfrm>
-            <a:off x="2831592" y="4169664"/>
-            <a:ext cx="685800" cy="384048"/>
+          <p:cNvPr id="43" name="Text 41"/>
+          <p:cNvSpPr/>
+          <p:nvPr/>
+        </p:nvSpPr>
+        <p:spPr>
+          <a:xfrm>
+            <a:off x="4850892" y="4169664"/>
+            <a:ext cx="685800" cy="475488"/>
           </a:xfrm>
           <a:prstGeom prst="rect">
             <a:avLst/>
@@ -22871,7 +22847,7 @@
                 <a:ea typeface="Trebuchet MS" pitchFamily="34" charset="-122"/>
                 <a:cs typeface="Trebuchet MS" pitchFamily="34" charset="-120"/>
               </a:rPr>
-              <a:t>p</a:t>
+              <a:t>e</a:t>
             </a:r>
             <a:endParaRPr lang="en-US" sz="900" dirty="0"/>
           </a:p>
@@ -22879,18 +22855,18 @@
       </p:sp>
       <p:sp>
         <p:nvSpPr>
-          <p:cNvPr id="43" name="Shape 41"/>
-          <p:cNvSpPr/>
-          <p:nvPr/>
-        </p:nvSpPr>
-        <p:spPr>
-          <a:xfrm>
-            <a:off x="3639312" y="4169664"/>
-            <a:ext cx="685800" cy="384048"/>
+          <p:cNvPr id="44" name="Shape 42"/>
+          <p:cNvSpPr/>
+          <p:nvPr/>
+        </p:nvSpPr>
+        <p:spPr>
+          <a:xfrm>
+            <a:off x="5759577" y="4169664"/>
+            <a:ext cx="685800" cy="475488"/>
           </a:xfrm>
           <a:prstGeom prst="rect">
             <a:avLst>
-              <a:gd name="adj" fmla="val 9524"/>
+              <a:gd name="adj" fmla="val 7692"/>
             </a:avLst>
           </a:prstGeom>
           <a:solidFill>
@@ -22906,14 +22882,14 @@
       </p:sp>
       <p:sp>
         <p:nvSpPr>
-          <p:cNvPr id="44" name="Text 42"/>
-          <p:cNvSpPr/>
-          <p:nvPr/>
-        </p:nvSpPr>
-        <p:spPr>
-          <a:xfrm>
-            <a:off x="3639312" y="4169664"/>
-            <a:ext cx="685800" cy="384048"/>
+          <p:cNvPr id="45" name="Text 43"/>
+          <p:cNvSpPr/>
+          <p:nvPr/>
+        </p:nvSpPr>
+        <p:spPr>
+          <a:xfrm>
+            <a:off x="5759577" y="4169664"/>
+            <a:ext cx="685800" cy="475488"/>
           </a:xfrm>
           <a:prstGeom prst="rect">
             <a:avLst/>
@@ -22937,7 +22913,7 @@
                 <a:ea typeface="Trebuchet MS" pitchFamily="34" charset="-122"/>
                 <a:cs typeface="Trebuchet MS" pitchFamily="34" charset="-120"/>
               </a:rPr>
-              <a:t>e</a:t>
+              <a:t>c</a:t>
             </a:r>
             <a:endParaRPr lang="en-US" sz="900" dirty="0"/>
           </a:p>
@@ -22945,18 +22921,18 @@
       </p:sp>
       <p:sp>
         <p:nvSpPr>
-          <p:cNvPr id="45" name="Shape 43"/>
-          <p:cNvSpPr/>
-          <p:nvPr/>
-        </p:nvSpPr>
-        <p:spPr>
-          <a:xfrm>
-            <a:off x="4447032" y="4169664"/>
-            <a:ext cx="685800" cy="384048"/>
+          <p:cNvPr id="46" name="Shape 44"/>
+          <p:cNvSpPr/>
+          <p:nvPr/>
+        </p:nvSpPr>
+        <p:spPr>
+          <a:xfrm>
+            <a:off x="6668262" y="4169664"/>
+            <a:ext cx="685800" cy="475488"/>
           </a:xfrm>
           <a:prstGeom prst="rect">
             <a:avLst>
-              <a:gd name="adj" fmla="val 9524"/>
+              <a:gd name="adj" fmla="val 7692"/>
             </a:avLst>
           </a:prstGeom>
           <a:solidFill>
@@ -22972,14 +22948,14 @@
       </p:sp>
       <p:sp>
         <p:nvSpPr>
-          <p:cNvPr id="46" name="Text 44"/>
-          <p:cNvSpPr/>
-          <p:nvPr/>
-        </p:nvSpPr>
-        <p:spPr>
-          <a:xfrm>
-            <a:off x="4447032" y="4169664"/>
-            <a:ext cx="685800" cy="384048"/>
+          <p:cNvPr id="47" name="Text 45"/>
+          <p:cNvSpPr/>
+          <p:nvPr/>
+        </p:nvSpPr>
+        <p:spPr>
+          <a:xfrm>
+            <a:off x="6668262" y="4169664"/>
+            <a:ext cx="685800" cy="475488"/>
           </a:xfrm>
           <a:prstGeom prst="rect">
             <a:avLst/>
@@ -23003,7 +22979,7 @@
                 <a:ea typeface="Trebuchet MS" pitchFamily="34" charset="-122"/>
                 <a:cs typeface="Trebuchet MS" pitchFamily="34" charset="-120"/>
               </a:rPr>
-              <a:t>c</a:t>
+              <a:t>t</a:t>
             </a:r>
             <a:endParaRPr lang="en-US" sz="900" dirty="0"/>
           </a:p>
@@ -23011,57 +22987,18 @@
       </p:sp>
       <p:sp>
         <p:nvSpPr>
-          <p:cNvPr id="47" name="Text 45"/>
-          <p:cNvSpPr/>
-          <p:nvPr/>
-        </p:nvSpPr>
-        <p:spPr>
-          <a:xfrm>
-            <a:off x="4447032" y="4572000"/>
-            <a:ext cx="685800" cy="219456"/>
-          </a:xfrm>
-          <a:prstGeom prst="rect">
-            <a:avLst/>
-          </a:prstGeom>
-          <a:noFill/>
-          <a:ln/>
-        </p:spPr>
-        <p:txBody>
-          <a:bodyPr wrap="square" lIns="0" tIns="0" rIns="0" bIns="0" rtlCol="0" anchor="t"/>
-          <a:lstStyle/>
-          <a:p>
-            <a:pPr algn="ctr" indent="0" marL="0">
-              <a:buNone/>
-            </a:pPr>
-            <a:r>
-              <a:rPr lang="en-US" sz="750" i="1" dirty="0">
-                <a:solidFill>
-                  <a:srgbClr val="94A3B8"/>
-                </a:solidFill>
-                <a:latin typeface="Calibri" pitchFamily="34" charset="0"/>
-                <a:ea typeface="Calibri" pitchFamily="34" charset="-122"/>
-                <a:cs typeface="Calibri" pitchFamily="34" charset="-120"/>
-              </a:rPr>
-              <a:t>/k/</a:t>
-            </a:r>
-            <a:endParaRPr lang="en-US" sz="750" dirty="0"/>
-          </a:p>
-        </p:txBody>
-      </p:sp>
-      <p:sp>
-        <p:nvSpPr>
           <p:cNvPr id="48" name="Shape 46"/>
           <p:cNvSpPr/>
           <p:nvPr/>
         </p:nvSpPr>
         <p:spPr>
           <a:xfrm>
-            <a:off x="5254752" y="4169664"/>
-            <a:ext cx="685800" cy="384048"/>
+            <a:off x="7576947" y="4169664"/>
+            <a:ext cx="685800" cy="475488"/>
           </a:xfrm>
           <a:prstGeom prst="rect">
             <a:avLst>
-              <a:gd name="adj" fmla="val 9524"/>
+              <a:gd name="adj" fmla="val 7692"/>
             </a:avLst>
           </a:prstGeom>
           <a:solidFill>
@@ -23083,8 +23020,8 @@
         </p:nvSpPr>
         <p:spPr>
           <a:xfrm>
-            <a:off x="5254752" y="4169664"/>
-            <a:ext cx="685800" cy="384048"/>
+            <a:off x="7576947" y="4169664"/>
+            <a:ext cx="685800" cy="475488"/>
           </a:xfrm>
           <a:prstGeom prst="rect">
             <a:avLst/>
@@ -23108,205 +23045,7 @@
                 <a:ea typeface="Trebuchet MS" pitchFamily="34" charset="-122"/>
                 <a:cs typeface="Trebuchet MS" pitchFamily="34" charset="-120"/>
               </a:rPr>
-              <a:t>t</a:t>
-            </a:r>
-            <a:endParaRPr lang="en-US" sz="900" dirty="0"/>
-          </a:p>
-        </p:txBody>
-      </p:sp>
-      <p:sp>
-        <p:nvSpPr>
-          <p:cNvPr id="50" name="Shape 48"/>
-          <p:cNvSpPr/>
-          <p:nvPr/>
-        </p:nvSpPr>
-        <p:spPr>
-          <a:xfrm>
-            <a:off x="6062472" y="4169664"/>
-            <a:ext cx="685800" cy="384048"/>
-          </a:xfrm>
-          <a:prstGeom prst="rect">
-            <a:avLst>
-              <a:gd name="adj" fmla="val 9524"/>
-            </a:avLst>
-          </a:prstGeom>
-          <a:solidFill>
-            <a:srgbClr val="FFFFFF"/>
-          </a:solidFill>
-          <a:ln w="12700">
-            <a:solidFill>
-              <a:srgbClr val="DB2777"/>
-            </a:solidFill>
-            <a:prstDash val="solid"/>
-          </a:ln>
-        </p:spPr>
-      </p:sp>
-      <p:sp>
-        <p:nvSpPr>
-          <p:cNvPr id="51" name="Text 49"/>
-          <p:cNvSpPr/>
-          <p:nvPr/>
-        </p:nvSpPr>
-        <p:spPr>
-          <a:xfrm>
-            <a:off x="6062472" y="4169664"/>
-            <a:ext cx="685800" cy="384048"/>
-          </a:xfrm>
-          <a:prstGeom prst="rect">
-            <a:avLst/>
-          </a:prstGeom>
-          <a:noFill/>
-          <a:ln/>
-        </p:spPr>
-        <p:txBody>
-          <a:bodyPr wrap="square" lIns="0" tIns="0" rIns="0" bIns="0" rtlCol="0" anchor="ctr"/>
-          <a:lstStyle/>
-          <a:p>
-            <a:pPr algn="ctr" indent="0" marL="0">
-              <a:buNone/>
-            </a:pPr>
-            <a:r>
-              <a:rPr lang="en-US" sz="900" b="1" dirty="0">
-                <a:solidFill>
-                  <a:srgbClr val="9D174D"/>
-                </a:solidFill>
-                <a:latin typeface="Trebuchet MS" pitchFamily="34" charset="0"/>
-                <a:ea typeface="Trebuchet MS" pitchFamily="34" charset="-122"/>
-                <a:cs typeface="Trebuchet MS" pitchFamily="34" charset="-120"/>
-              </a:rPr>
-              <a:t>a</a:t>
-            </a:r>
-            <a:endParaRPr lang="en-US" sz="900" dirty="0"/>
-          </a:p>
-        </p:txBody>
-      </p:sp>
-      <p:sp>
-        <p:nvSpPr>
-          <p:cNvPr id="52" name="Shape 50"/>
-          <p:cNvSpPr/>
-          <p:nvPr/>
-        </p:nvSpPr>
-        <p:spPr>
-          <a:xfrm>
-            <a:off x="6870192" y="4169664"/>
-            <a:ext cx="685800" cy="384048"/>
-          </a:xfrm>
-          <a:prstGeom prst="rect">
-            <a:avLst>
-              <a:gd name="adj" fmla="val 9524"/>
-            </a:avLst>
-          </a:prstGeom>
-          <a:solidFill>
-            <a:srgbClr val="FFFFFF"/>
-          </a:solidFill>
-          <a:ln w="12700">
-            <a:solidFill>
-              <a:srgbClr val="DB2777"/>
-            </a:solidFill>
-            <a:prstDash val="solid"/>
-          </a:ln>
-        </p:spPr>
-      </p:sp>
-      <p:sp>
-        <p:nvSpPr>
-          <p:cNvPr id="53" name="Text 51"/>
-          <p:cNvSpPr/>
-          <p:nvPr/>
-        </p:nvSpPr>
-        <p:spPr>
-          <a:xfrm>
-            <a:off x="6870192" y="4169664"/>
-            <a:ext cx="685800" cy="384048"/>
-          </a:xfrm>
-          <a:prstGeom prst="rect">
-            <a:avLst/>
-          </a:prstGeom>
-          <a:noFill/>
-          <a:ln/>
-        </p:spPr>
-        <p:txBody>
-          <a:bodyPr wrap="square" lIns="0" tIns="0" rIns="0" bIns="0" rtlCol="0" anchor="ctr"/>
-          <a:lstStyle/>
-          <a:p>
-            <a:pPr algn="ctr" indent="0" marL="0">
-              <a:buNone/>
-            </a:pPr>
-            <a:r>
-              <a:rPr lang="en-US" sz="900" b="1" dirty="0">
-                <a:solidFill>
-                  <a:srgbClr val="9D174D"/>
-                </a:solidFill>
-                <a:latin typeface="Trebuchet MS" pitchFamily="34" charset="0"/>
-                <a:ea typeface="Trebuchet MS" pitchFamily="34" charset="-122"/>
-                <a:cs typeface="Trebuchet MS" pitchFamily="34" charset="-120"/>
-              </a:rPr>
-              <a:t>t</a:t>
-            </a:r>
-            <a:endParaRPr lang="en-US" sz="900" dirty="0"/>
-          </a:p>
-        </p:txBody>
-      </p:sp>
-      <p:sp>
-        <p:nvSpPr>
-          <p:cNvPr id="54" name="Shape 52"/>
-          <p:cNvSpPr/>
-          <p:nvPr/>
-        </p:nvSpPr>
-        <p:spPr>
-          <a:xfrm>
-            <a:off x="7677912" y="4169664"/>
-            <a:ext cx="685800" cy="384048"/>
-          </a:xfrm>
-          <a:prstGeom prst="rect">
-            <a:avLst>
-              <a:gd name="adj" fmla="val 9524"/>
-            </a:avLst>
-          </a:prstGeom>
-          <a:solidFill>
-            <a:srgbClr val="FFFFFF"/>
-          </a:solidFill>
-          <a:ln w="12700">
-            <a:solidFill>
-              <a:srgbClr val="DB2777"/>
-            </a:solidFill>
-            <a:prstDash val="solid"/>
-          </a:ln>
-        </p:spPr>
-      </p:sp>
-      <p:sp>
-        <p:nvSpPr>
-          <p:cNvPr id="55" name="Text 53"/>
-          <p:cNvSpPr/>
-          <p:nvPr/>
-        </p:nvSpPr>
-        <p:spPr>
-          <a:xfrm>
-            <a:off x="7677912" y="4169664"/>
-            <a:ext cx="685800" cy="384048"/>
-          </a:xfrm>
-          <a:prstGeom prst="rect">
-            <a:avLst/>
-          </a:prstGeom>
-          <a:noFill/>
-          <a:ln/>
-        </p:spPr>
-        <p:txBody>
-          <a:bodyPr wrap="square" lIns="0" tIns="0" rIns="0" bIns="0" rtlCol="0" anchor="ctr"/>
-          <a:lstStyle/>
-          <a:p>
-            <a:pPr algn="ctr" indent="0" marL="0">
-              <a:buNone/>
-            </a:pPr>
-            <a:r>
-              <a:rPr lang="en-US" sz="900" b="1" dirty="0">
-                <a:solidFill>
-                  <a:srgbClr val="9D174D"/>
-                </a:solidFill>
-                <a:latin typeface="Trebuchet MS" pitchFamily="34" charset="0"/>
-                <a:ea typeface="Trebuchet MS" pitchFamily="34" charset="-122"/>
-                <a:cs typeface="Trebuchet MS" pitchFamily="34" charset="-120"/>
-              </a:rPr>
-              <a:t>or</a:t>
+              <a:t>s</a:t>
             </a:r>
             <a:endParaRPr lang="en-US" sz="900" dirty="0"/>
           </a:p>
@@ -23598,7 +23337,7 @@
                 <a:ea typeface="Calibri" pitchFamily="34" charset="-122"/>
                 <a:cs typeface="Calibri" pitchFamily="34" charset="-120"/>
               </a:rPr>
-              <a:t>Word Labs  •  wordlabs.app  •  Root: 'spect' = to look, watch, see</a:t>
+              <a:t>Word Labs  •  wordlabs.app  •  Root: 'spect' = look; watch</a:t>
             </a:r>
             <a:endParaRPr lang="en-US" sz="800" dirty="0"/>
           </a:p>
@@ -23737,7 +23476,7 @@
                 <a:ea typeface="Trebuchet MS" pitchFamily="34" charset="-122"/>
                 <a:cs typeface="Trebuchet MS" pitchFamily="34" charset="-120"/>
               </a:rPr>
-              <a:t>respect</a:t>
+              <a:t>retrospect</a:t>
             </a:r>
             <a:endParaRPr lang="en-US" sz="2800" dirty="0"/>
           </a:p>
@@ -24425,7 +24164,7 @@
                 <a:ea typeface="Calibri" pitchFamily="34" charset="-122"/>
                 <a:cs typeface="Calibri" pitchFamily="34" charset="-120"/>
               </a:rPr>
-              <a:t>Word Labs  •  wordlabs.app  •  Root: 'spect' = to look, watch, see</a:t>
+              <a:t>Word Labs  •  wordlabs.app  •  Root: 'spect' = look; watch</a:t>
             </a:r>
             <a:endParaRPr lang="en-US" sz="800" dirty="0"/>
           </a:p>
@@ -24564,7 +24303,7 @@
                 <a:ea typeface="Trebuchet MS" pitchFamily="34" charset="-122"/>
                 <a:cs typeface="Trebuchet MS" pitchFamily="34" charset="-120"/>
               </a:rPr>
-              <a:t>respect</a:t>
+              <a:t>retrospect</a:t>
             </a:r>
             <a:endParaRPr lang="en-US" sz="2800" dirty="0"/>
           </a:p>
@@ -24703,7 +24442,7 @@
                 <a:ea typeface="Trebuchet MS" pitchFamily="34" charset="-122"/>
                 <a:cs typeface="Trebuchet MS" pitchFamily="34" charset="-120"/>
               </a:rPr>
-              <a:t>re</a:t>
+              <a:t>retro</a:t>
             </a:r>
             <a:endParaRPr lang="en-US" sz="1300" dirty="0"/>
           </a:p>
@@ -24742,7 +24481,7 @@
                 <a:ea typeface="Calibri" pitchFamily="34" charset="-122"/>
                 <a:cs typeface="Calibri" pitchFamily="34" charset="-120"/>
               </a:rPr>
-              <a:t>again, back</a:t>
+              <a:t>backwards; behind</a:t>
             </a:r>
             <a:endParaRPr lang="en-US" sz="850" dirty="0"/>
           </a:p>
@@ -24854,7 +24593,7 @@
                 <a:ea typeface="Calibri" pitchFamily="34" charset="-122"/>
                 <a:cs typeface="Calibri" pitchFamily="34" charset="-120"/>
               </a:rPr>
-              <a:t>to look</a:t>
+              <a:t>look; watch</a:t>
             </a:r>
             <a:endParaRPr lang="en-US" sz="850" dirty="0"/>
           </a:p>
@@ -25410,7 +25149,7 @@
                 <a:ea typeface="Calibri" pitchFamily="34" charset="-122"/>
                 <a:cs typeface="Calibri" pitchFamily="34" charset="-120"/>
               </a:rPr>
-              <a:t>Word Labs  •  wordlabs.app  •  Root: 'spect' = to look, watch, see</a:t>
+              <a:t>Word Labs  •  wordlabs.app  •  Root: 'spect' = look; watch</a:t>
             </a:r>
             <a:endParaRPr lang="en-US" sz="800" dirty="0"/>
           </a:p>
@@ -25483,7 +25222,7 @@
                 <a:ea typeface="Trebuchet MS" pitchFamily="34" charset="-122"/>
                 <a:cs typeface="Trebuchet MS" pitchFamily="34" charset="-120"/>
               </a:rPr>
-              <a:t>We are learning that the root 'spect' means 'to look, watch, see'.</a:t>
+              <a:t>We are learning that the root 'spect' means 'look; watch'.</a:t>
             </a:r>
             <a:endParaRPr lang="en-US" sz="2000" dirty="0"/>
           </a:p>
@@ -26129,7 +25868,7 @@
                 <a:ea typeface="Calibri" pitchFamily="34" charset="-122"/>
                 <a:cs typeface="Calibri" pitchFamily="34" charset="-120"/>
               </a:rPr>
-              <a:t>Word Labs  •  wordlabs.app  •  Root: 'spect' = to look, watch, see</a:t>
+              <a:t>Word Labs  •  wordlabs.app  •  Root: 'spect' = look; watch</a:t>
             </a:r>
             <a:endParaRPr lang="en-US" sz="800" dirty="0"/>
           </a:p>
@@ -26268,7 +26007,7 @@
                 <a:ea typeface="Trebuchet MS" pitchFamily="34" charset="-122"/>
                 <a:cs typeface="Trebuchet MS" pitchFamily="34" charset="-120"/>
               </a:rPr>
-              <a:t>respect</a:t>
+              <a:t>retrospect</a:t>
             </a:r>
             <a:endParaRPr lang="en-US" sz="2800" dirty="0"/>
           </a:p>
@@ -26407,7 +26146,7 @@
                 <a:ea typeface="Trebuchet MS" pitchFamily="34" charset="-122"/>
                 <a:cs typeface="Trebuchet MS" pitchFamily="34" charset="-120"/>
               </a:rPr>
-              <a:t>re</a:t>
+              <a:t>retro</a:t>
             </a:r>
             <a:endParaRPr lang="en-US" sz="1300" dirty="0"/>
           </a:p>
@@ -26446,7 +26185,7 @@
                 <a:ea typeface="Calibri" pitchFamily="34" charset="-122"/>
                 <a:cs typeface="Calibri" pitchFamily="34" charset="-120"/>
               </a:rPr>
-              <a:t>again, back</a:t>
+              <a:t>backwards; behind</a:t>
             </a:r>
             <a:endParaRPr lang="en-US" sz="850" dirty="0"/>
           </a:p>
@@ -26558,7 +26297,7 @@
                 <a:ea typeface="Calibri" pitchFamily="34" charset="-122"/>
                 <a:cs typeface="Calibri" pitchFamily="34" charset="-120"/>
               </a:rPr>
-              <a:t>to look</a:t>
+              <a:t>look; watch</a:t>
             </a:r>
             <a:endParaRPr lang="en-US" sz="850" dirty="0"/>
           </a:p>
@@ -26665,7 +26404,7 @@
         </p:nvSpPr>
         <p:spPr>
           <a:xfrm>
-            <a:off x="2999232" y="3364992"/>
+            <a:off x="2313432" y="3364992"/>
             <a:ext cx="1645920" cy="475488"/>
           </a:xfrm>
           <a:prstGeom prst="rect">
@@ -26692,7 +26431,7 @@
         </p:nvSpPr>
         <p:spPr>
           <a:xfrm>
-            <a:off x="2999232" y="3364992"/>
+            <a:off x="2313432" y="3364992"/>
             <a:ext cx="1645920" cy="475488"/>
           </a:xfrm>
           <a:prstGeom prst="rect">
@@ -26717,7 +26456,7 @@
                 <a:ea typeface="Trebuchet MS" pitchFamily="34" charset="-122"/>
                 <a:cs typeface="Trebuchet MS" pitchFamily="34" charset="-120"/>
               </a:rPr>
-              <a:t>re</a:t>
+              <a:t>ret</a:t>
             </a:r>
             <a:endParaRPr lang="en-US" sz="1400" dirty="0"/>
           </a:p>
@@ -26731,8 +26470,8 @@
         </p:nvSpPr>
         <p:spPr>
           <a:xfrm>
-            <a:off x="4645152" y="3364992"/>
-            <a:ext cx="1097280" cy="475488"/>
+            <a:off x="3959352" y="3364992"/>
+            <a:ext cx="411480" cy="475488"/>
           </a:xfrm>
           <a:prstGeom prst="rect">
             <a:avLst/>
@@ -26770,7 +26509,7 @@
         </p:nvSpPr>
         <p:spPr>
           <a:xfrm>
-            <a:off x="5742432" y="3364992"/>
+            <a:off x="4370832" y="3364992"/>
             <a:ext cx="1645920" cy="475488"/>
           </a:xfrm>
           <a:prstGeom prst="rect">
@@ -26797,7 +26536,7 @@
         </p:nvSpPr>
         <p:spPr>
           <a:xfrm>
-            <a:off x="5742432" y="3364992"/>
+            <a:off x="4370832" y="3364992"/>
             <a:ext cx="1645920" cy="475488"/>
           </a:xfrm>
           <a:prstGeom prst="rect">
@@ -26822,6 +26561,111 @@
                 <a:ea typeface="Trebuchet MS" pitchFamily="34" charset="-122"/>
                 <a:cs typeface="Trebuchet MS" pitchFamily="34" charset="-120"/>
               </a:rPr>
+              <a:t>ro</a:t>
+            </a:r>
+            <a:endParaRPr lang="en-US" sz="1400" dirty="0"/>
+          </a:p>
+        </p:txBody>
+      </p:sp>
+      <p:sp>
+        <p:nvSpPr>
+          <p:cNvPr id="30" name="Text 28"/>
+          <p:cNvSpPr/>
+          <p:nvPr/>
+        </p:nvSpPr>
+        <p:spPr>
+          <a:xfrm>
+            <a:off x="6016752" y="3364992"/>
+            <a:ext cx="411480" cy="475488"/>
+          </a:xfrm>
+          <a:prstGeom prst="rect">
+            <a:avLst/>
+          </a:prstGeom>
+          <a:noFill/>
+          <a:ln/>
+        </p:spPr>
+        <p:txBody>
+          <a:bodyPr wrap="square" lIns="0" tIns="0" rIns="0" bIns="0" rtlCol="0" anchor="ctr"/>
+          <a:lstStyle/>
+          <a:p>
+            <a:pPr algn="ctr" indent="0" marL="0">
+              <a:buNone/>
+            </a:pPr>
+            <a:r>
+              <a:rPr lang="en-US" sz="1600" b="1" dirty="0">
+                <a:solidFill>
+                  <a:srgbClr val="0D9488"/>
+                </a:solidFill>
+                <a:latin typeface="Trebuchet MS" pitchFamily="34" charset="0"/>
+                <a:ea typeface="Trebuchet MS" pitchFamily="34" charset="-122"/>
+                <a:cs typeface="Trebuchet MS" pitchFamily="34" charset="-120"/>
+              </a:rPr>
+              <a:t>·</a:t>
+            </a:r>
+            <a:endParaRPr lang="en-US" sz="1600" dirty="0"/>
+          </a:p>
+        </p:txBody>
+      </p:sp>
+      <p:sp>
+        <p:nvSpPr>
+          <p:cNvPr id="31" name="Shape 29"/>
+          <p:cNvSpPr/>
+          <p:nvPr/>
+        </p:nvSpPr>
+        <p:spPr>
+          <a:xfrm>
+            <a:off x="6428232" y="3364992"/>
+            <a:ext cx="1645920" cy="475488"/>
+          </a:xfrm>
+          <a:prstGeom prst="rect">
+            <a:avLst>
+              <a:gd name="adj" fmla="val 9615"/>
+            </a:avLst>
+          </a:prstGeom>
+          <a:solidFill>
+            <a:srgbClr val="FFFFFF"/>
+          </a:solidFill>
+          <a:ln w="12700">
+            <a:solidFill>
+              <a:srgbClr val="0D9488"/>
+            </a:solidFill>
+            <a:prstDash val="solid"/>
+          </a:ln>
+        </p:spPr>
+      </p:sp>
+      <p:sp>
+        <p:nvSpPr>
+          <p:cNvPr id="32" name="Text 30"/>
+          <p:cNvSpPr/>
+          <p:nvPr/>
+        </p:nvSpPr>
+        <p:spPr>
+          <a:xfrm>
+            <a:off x="6428232" y="3364992"/>
+            <a:ext cx="1645920" cy="475488"/>
+          </a:xfrm>
+          <a:prstGeom prst="rect">
+            <a:avLst/>
+          </a:prstGeom>
+          <a:noFill/>
+          <a:ln/>
+        </p:spPr>
+        <p:txBody>
+          <a:bodyPr wrap="square" lIns="0" tIns="0" rIns="0" bIns="0" rtlCol="0" anchor="ctr"/>
+          <a:lstStyle/>
+          <a:p>
+            <a:pPr algn="ctr" indent="0" marL="0">
+              <a:buNone/>
+            </a:pPr>
+            <a:r>
+              <a:rPr lang="en-US" sz="1400" b="1" dirty="0">
+                <a:solidFill>
+                  <a:srgbClr val="0D9488"/>
+                </a:solidFill>
+                <a:latin typeface="Trebuchet MS" pitchFamily="34" charset="0"/>
+                <a:ea typeface="Trebuchet MS" pitchFamily="34" charset="-122"/>
+                <a:cs typeface="Trebuchet MS" pitchFamily="34" charset="-120"/>
+              </a:rPr>
               <a:t>spect</a:t>
             </a:r>
             <a:endParaRPr lang="en-US" sz="1400" dirty="0"/>
@@ -26830,7 +26674,7 @@
       </p:sp>
       <p:sp>
         <p:nvSpPr>
-          <p:cNvPr id="30" name="Shape 28"/>
+          <p:cNvPr id="33" name="Shape 31"/>
           <p:cNvSpPr/>
           <p:nvPr/>
         </p:nvSpPr>
@@ -26857,7 +26701,7 @@
       </p:sp>
       <p:sp>
         <p:nvSpPr>
-          <p:cNvPr id="31" name="Text 29"/>
+          <p:cNvPr id="34" name="Text 32"/>
           <p:cNvSpPr/>
           <p:nvPr/>
         </p:nvSpPr>
@@ -26896,7 +26740,7 @@
       </p:sp>
       <p:sp>
         <p:nvSpPr>
-          <p:cNvPr id="32" name="Shape 30"/>
+          <p:cNvPr id="35" name="Shape 33"/>
           <p:cNvSpPr/>
           <p:nvPr/>
         </p:nvSpPr>
@@ -26923,7 +26767,7 @@
       </p:sp>
       <p:sp>
         <p:nvSpPr>
-          <p:cNvPr id="33" name="Text 31"/>
+          <p:cNvPr id="36" name="Text 34"/>
           <p:cNvSpPr/>
           <p:nvPr/>
         </p:nvSpPr>
@@ -27246,7 +27090,7 @@
                 <a:ea typeface="Calibri" pitchFamily="34" charset="-122"/>
                 <a:cs typeface="Calibri" pitchFamily="34" charset="-120"/>
               </a:rPr>
-              <a:t>Word Labs  •  wordlabs.app  •  Root: 'spect' = to look, watch, see</a:t>
+              <a:t>Word Labs  •  wordlabs.app  •  Root: 'spect' = look; watch</a:t>
             </a:r>
             <a:endParaRPr lang="en-US" sz="800" dirty="0"/>
           </a:p>
@@ -27385,7 +27229,7 @@
                 <a:ea typeface="Trebuchet MS" pitchFamily="34" charset="-122"/>
                 <a:cs typeface="Trebuchet MS" pitchFamily="34" charset="-120"/>
               </a:rPr>
-              <a:t>respect</a:t>
+              <a:t>retrospect</a:t>
             </a:r>
             <a:endParaRPr lang="en-US" sz="2800" dirty="0"/>
           </a:p>
@@ -27524,7 +27368,7 @@
                 <a:ea typeface="Trebuchet MS" pitchFamily="34" charset="-122"/>
                 <a:cs typeface="Trebuchet MS" pitchFamily="34" charset="-120"/>
               </a:rPr>
-              <a:t>re</a:t>
+              <a:t>retro</a:t>
             </a:r>
             <a:endParaRPr lang="en-US" sz="1300" dirty="0"/>
           </a:p>
@@ -27563,7 +27407,7 @@
                 <a:ea typeface="Calibri" pitchFamily="34" charset="-122"/>
                 <a:cs typeface="Calibri" pitchFamily="34" charset="-120"/>
               </a:rPr>
-              <a:t>again, back</a:t>
+              <a:t>backwards; behind</a:t>
             </a:r>
             <a:endParaRPr lang="en-US" sz="850" dirty="0"/>
           </a:p>
@@ -27675,7 +27519,7 @@
                 <a:ea typeface="Calibri" pitchFamily="34" charset="-122"/>
                 <a:cs typeface="Calibri" pitchFamily="34" charset="-120"/>
               </a:rPr>
-              <a:t>to look</a:t>
+              <a:t>look; watch</a:t>
             </a:r>
             <a:endParaRPr lang="en-US" sz="850" dirty="0"/>
           </a:p>
@@ -27782,7 +27626,7 @@
         </p:nvSpPr>
         <p:spPr>
           <a:xfrm>
-            <a:off x="2999232" y="3364992"/>
+            <a:off x="2313432" y="3364992"/>
             <a:ext cx="1645920" cy="475488"/>
           </a:xfrm>
           <a:prstGeom prst="rect">
@@ -27809,7 +27653,7 @@
         </p:nvSpPr>
         <p:spPr>
           <a:xfrm>
-            <a:off x="2999232" y="3364992"/>
+            <a:off x="2313432" y="3364992"/>
             <a:ext cx="1645920" cy="475488"/>
           </a:xfrm>
           <a:prstGeom prst="rect">
@@ -27834,7 +27678,7 @@
                 <a:ea typeface="Trebuchet MS" pitchFamily="34" charset="-122"/>
                 <a:cs typeface="Trebuchet MS" pitchFamily="34" charset="-120"/>
               </a:rPr>
-              <a:t>re</a:t>
+              <a:t>ret</a:t>
             </a:r>
             <a:endParaRPr lang="en-US" sz="1400" dirty="0"/>
           </a:p>
@@ -27848,8 +27692,8 @@
         </p:nvSpPr>
         <p:spPr>
           <a:xfrm>
-            <a:off x="4645152" y="3364992"/>
-            <a:ext cx="1097280" cy="475488"/>
+            <a:off x="3959352" y="3364992"/>
+            <a:ext cx="411480" cy="475488"/>
           </a:xfrm>
           <a:prstGeom prst="rect">
             <a:avLst/>
@@ -27887,7 +27731,7 @@
         </p:nvSpPr>
         <p:spPr>
           <a:xfrm>
-            <a:off x="5742432" y="3364992"/>
+            <a:off x="4370832" y="3364992"/>
             <a:ext cx="1645920" cy="475488"/>
           </a:xfrm>
           <a:prstGeom prst="rect">
@@ -27914,7 +27758,7 @@
         </p:nvSpPr>
         <p:spPr>
           <a:xfrm>
-            <a:off x="5742432" y="3364992"/>
+            <a:off x="4370832" y="3364992"/>
             <a:ext cx="1645920" cy="475488"/>
           </a:xfrm>
           <a:prstGeom prst="rect">
@@ -27939,6 +27783,111 @@
                 <a:ea typeface="Trebuchet MS" pitchFamily="34" charset="-122"/>
                 <a:cs typeface="Trebuchet MS" pitchFamily="34" charset="-120"/>
               </a:rPr>
+              <a:t>ro</a:t>
+            </a:r>
+            <a:endParaRPr lang="en-US" sz="1400" dirty="0"/>
+          </a:p>
+        </p:txBody>
+      </p:sp>
+      <p:sp>
+        <p:nvSpPr>
+          <p:cNvPr id="30" name="Text 28"/>
+          <p:cNvSpPr/>
+          <p:nvPr/>
+        </p:nvSpPr>
+        <p:spPr>
+          <a:xfrm>
+            <a:off x="6016752" y="3364992"/>
+            <a:ext cx="411480" cy="475488"/>
+          </a:xfrm>
+          <a:prstGeom prst="rect">
+            <a:avLst/>
+          </a:prstGeom>
+          <a:noFill/>
+          <a:ln/>
+        </p:spPr>
+        <p:txBody>
+          <a:bodyPr wrap="square" lIns="0" tIns="0" rIns="0" bIns="0" rtlCol="0" anchor="ctr"/>
+          <a:lstStyle/>
+          <a:p>
+            <a:pPr algn="ctr" indent="0" marL="0">
+              <a:buNone/>
+            </a:pPr>
+            <a:r>
+              <a:rPr lang="en-US" sz="1600" b="1" dirty="0">
+                <a:solidFill>
+                  <a:srgbClr val="0D9488"/>
+                </a:solidFill>
+                <a:latin typeface="Trebuchet MS" pitchFamily="34" charset="0"/>
+                <a:ea typeface="Trebuchet MS" pitchFamily="34" charset="-122"/>
+                <a:cs typeface="Trebuchet MS" pitchFamily="34" charset="-120"/>
+              </a:rPr>
+              <a:t>·</a:t>
+            </a:r>
+            <a:endParaRPr lang="en-US" sz="1600" dirty="0"/>
+          </a:p>
+        </p:txBody>
+      </p:sp>
+      <p:sp>
+        <p:nvSpPr>
+          <p:cNvPr id="31" name="Shape 29"/>
+          <p:cNvSpPr/>
+          <p:nvPr/>
+        </p:nvSpPr>
+        <p:spPr>
+          <a:xfrm>
+            <a:off x="6428232" y="3364992"/>
+            <a:ext cx="1645920" cy="475488"/>
+          </a:xfrm>
+          <a:prstGeom prst="rect">
+            <a:avLst>
+              <a:gd name="adj" fmla="val 9615"/>
+            </a:avLst>
+          </a:prstGeom>
+          <a:solidFill>
+            <a:srgbClr val="FFFFFF"/>
+          </a:solidFill>
+          <a:ln w="12700">
+            <a:solidFill>
+              <a:srgbClr val="0D9488"/>
+            </a:solidFill>
+            <a:prstDash val="solid"/>
+          </a:ln>
+        </p:spPr>
+      </p:sp>
+      <p:sp>
+        <p:nvSpPr>
+          <p:cNvPr id="32" name="Text 30"/>
+          <p:cNvSpPr/>
+          <p:nvPr/>
+        </p:nvSpPr>
+        <p:spPr>
+          <a:xfrm>
+            <a:off x="6428232" y="3364992"/>
+            <a:ext cx="1645920" cy="475488"/>
+          </a:xfrm>
+          <a:prstGeom prst="rect">
+            <a:avLst/>
+          </a:prstGeom>
+          <a:noFill/>
+          <a:ln/>
+        </p:spPr>
+        <p:txBody>
+          <a:bodyPr wrap="square" lIns="0" tIns="0" rIns="0" bIns="0" rtlCol="0" anchor="ctr"/>
+          <a:lstStyle/>
+          <a:p>
+            <a:pPr algn="ctr" indent="0" marL="0">
+              <a:buNone/>
+            </a:pPr>
+            <a:r>
+              <a:rPr lang="en-US" sz="1400" b="1" dirty="0">
+                <a:solidFill>
+                  <a:srgbClr val="0D9488"/>
+                </a:solidFill>
+                <a:latin typeface="Trebuchet MS" pitchFamily="34" charset="0"/>
+                <a:ea typeface="Trebuchet MS" pitchFamily="34" charset="-122"/>
+                <a:cs typeface="Trebuchet MS" pitchFamily="34" charset="-120"/>
+              </a:rPr>
               <a:t>spect</a:t>
             </a:r>
             <a:endParaRPr lang="en-US" sz="1400" dirty="0"/>
@@ -27947,7 +27896,7 @@
       </p:sp>
       <p:sp>
         <p:nvSpPr>
-          <p:cNvPr id="30" name="Shape 28"/>
+          <p:cNvPr id="33" name="Shape 31"/>
           <p:cNvSpPr/>
           <p:nvPr/>
         </p:nvSpPr>
@@ -27974,7 +27923,7 @@
       </p:sp>
       <p:sp>
         <p:nvSpPr>
-          <p:cNvPr id="31" name="Text 29"/>
+          <p:cNvPr id="34" name="Text 32"/>
           <p:cNvSpPr/>
           <p:nvPr/>
         </p:nvSpPr>
@@ -28013,18 +27962,18 @@
       </p:sp>
       <p:sp>
         <p:nvSpPr>
-          <p:cNvPr id="32" name="Shape 30"/>
+          <p:cNvPr id="35" name="Shape 33"/>
           <p:cNvSpPr/>
           <p:nvPr/>
         </p:nvSpPr>
         <p:spPr>
           <a:xfrm>
             <a:off x="1874520" y="4096512"/>
-            <a:ext cx="6903720" cy="804672"/>
+            <a:ext cx="6903720" cy="658368"/>
           </a:xfrm>
           <a:prstGeom prst="rect">
             <a:avLst>
-              <a:gd name="adj" fmla="val 6818"/>
+              <a:gd name="adj" fmla="val 8333"/>
             </a:avLst>
           </a:prstGeom>
           <a:solidFill>
@@ -28040,18 +27989,18 @@
       </p:sp>
       <p:sp>
         <p:nvSpPr>
-          <p:cNvPr id="33" name="Shape 31"/>
-          <p:cNvSpPr/>
-          <p:nvPr/>
-        </p:nvSpPr>
-        <p:spPr>
-          <a:xfrm>
-            <a:off x="2124837" y="4169664"/>
-            <a:ext cx="685800" cy="384048"/>
+          <p:cNvPr id="36" name="Shape 34"/>
+          <p:cNvSpPr/>
+          <p:nvPr/>
+        </p:nvSpPr>
+        <p:spPr>
+          <a:xfrm>
+            <a:off x="1951828" y="4169664"/>
+            <a:ext cx="603504" cy="475488"/>
           </a:xfrm>
           <a:prstGeom prst="rect">
             <a:avLst>
-              <a:gd name="adj" fmla="val 9524"/>
+              <a:gd name="adj" fmla="val 7692"/>
             </a:avLst>
           </a:prstGeom>
           <a:solidFill>
@@ -28067,14 +28016,14 @@
       </p:sp>
       <p:sp>
         <p:nvSpPr>
-          <p:cNvPr id="34" name="Text 32"/>
-          <p:cNvSpPr/>
-          <p:nvPr/>
-        </p:nvSpPr>
-        <p:spPr>
-          <a:xfrm>
-            <a:off x="2124837" y="4169664"/>
-            <a:ext cx="685800" cy="384048"/>
+          <p:cNvPr id="37" name="Text 35"/>
+          <p:cNvSpPr/>
+          <p:nvPr/>
+        </p:nvSpPr>
+        <p:spPr>
+          <a:xfrm>
+            <a:off x="1951828" y="4169664"/>
+            <a:ext cx="603504" cy="475488"/>
           </a:xfrm>
           <a:prstGeom prst="rect">
             <a:avLst/>
@@ -28106,18 +28055,18 @@
       </p:sp>
       <p:sp>
         <p:nvSpPr>
-          <p:cNvPr id="35" name="Shape 33"/>
-          <p:cNvSpPr/>
-          <p:nvPr/>
-        </p:nvSpPr>
-        <p:spPr>
-          <a:xfrm>
-            <a:off x="3033522" y="4169664"/>
-            <a:ext cx="685800" cy="384048"/>
+          <p:cNvPr id="38" name="Shape 36"/>
+          <p:cNvSpPr/>
+          <p:nvPr/>
+        </p:nvSpPr>
+        <p:spPr>
+          <a:xfrm>
+            <a:off x="2605209" y="4169664"/>
+            <a:ext cx="603504" cy="475488"/>
           </a:xfrm>
           <a:prstGeom prst="rect">
             <a:avLst>
-              <a:gd name="adj" fmla="val 9524"/>
+              <a:gd name="adj" fmla="val 7692"/>
             </a:avLst>
           </a:prstGeom>
           <a:solidFill>
@@ -28133,14 +28082,14 @@
       </p:sp>
       <p:sp>
         <p:nvSpPr>
-          <p:cNvPr id="36" name="Text 34"/>
-          <p:cNvSpPr/>
-          <p:nvPr/>
-        </p:nvSpPr>
-        <p:spPr>
-          <a:xfrm>
-            <a:off x="3033522" y="4169664"/>
-            <a:ext cx="685800" cy="384048"/>
+          <p:cNvPr id="39" name="Text 37"/>
+          <p:cNvSpPr/>
+          <p:nvPr/>
+        </p:nvSpPr>
+        <p:spPr>
+          <a:xfrm>
+            <a:off x="2605209" y="4169664"/>
+            <a:ext cx="603504" cy="475488"/>
           </a:xfrm>
           <a:prstGeom prst="rect">
             <a:avLst/>
@@ -28172,18 +28121,18 @@
       </p:sp>
       <p:sp>
         <p:nvSpPr>
-          <p:cNvPr id="37" name="Shape 35"/>
-          <p:cNvSpPr/>
-          <p:nvPr/>
-        </p:nvSpPr>
-        <p:spPr>
-          <a:xfrm>
-            <a:off x="3942207" y="4169664"/>
-            <a:ext cx="685800" cy="384048"/>
+          <p:cNvPr id="40" name="Shape 38"/>
+          <p:cNvSpPr/>
+          <p:nvPr/>
+        </p:nvSpPr>
+        <p:spPr>
+          <a:xfrm>
+            <a:off x="3258589" y="4169664"/>
+            <a:ext cx="603504" cy="475488"/>
           </a:xfrm>
           <a:prstGeom prst="rect">
             <a:avLst>
-              <a:gd name="adj" fmla="val 9524"/>
+              <a:gd name="adj" fmla="val 7692"/>
             </a:avLst>
           </a:prstGeom>
           <a:solidFill>
@@ -28199,14 +28148,14 @@
       </p:sp>
       <p:sp>
         <p:nvSpPr>
-          <p:cNvPr id="38" name="Text 36"/>
-          <p:cNvSpPr/>
-          <p:nvPr/>
-        </p:nvSpPr>
-        <p:spPr>
-          <a:xfrm>
-            <a:off x="3942207" y="4169664"/>
-            <a:ext cx="685800" cy="384048"/>
+          <p:cNvPr id="41" name="Text 39"/>
+          <p:cNvSpPr/>
+          <p:nvPr/>
+        </p:nvSpPr>
+        <p:spPr>
+          <a:xfrm>
+            <a:off x="3258589" y="4169664"/>
+            <a:ext cx="603504" cy="475488"/>
           </a:xfrm>
           <a:prstGeom prst="rect">
             <a:avLst/>
@@ -28230,7 +28179,7 @@
                 <a:ea typeface="Trebuchet MS" pitchFamily="34" charset="-122"/>
                 <a:cs typeface="Trebuchet MS" pitchFamily="34" charset="-120"/>
               </a:rPr>
-              <a:t>s</a:t>
+              <a:t>t</a:t>
             </a:r>
             <a:endParaRPr lang="en-US" sz="900" dirty="0"/>
           </a:p>
@@ -28238,18 +28187,18 @@
       </p:sp>
       <p:sp>
         <p:nvSpPr>
-          <p:cNvPr id="39" name="Shape 37"/>
-          <p:cNvSpPr/>
-          <p:nvPr/>
-        </p:nvSpPr>
-        <p:spPr>
-          <a:xfrm>
-            <a:off x="4850892" y="4169664"/>
-            <a:ext cx="685800" cy="384048"/>
+          <p:cNvPr id="42" name="Shape 40"/>
+          <p:cNvSpPr/>
+          <p:nvPr/>
+        </p:nvSpPr>
+        <p:spPr>
+          <a:xfrm>
+            <a:off x="3911969" y="4169664"/>
+            <a:ext cx="603504" cy="475488"/>
           </a:xfrm>
           <a:prstGeom prst="rect">
             <a:avLst>
-              <a:gd name="adj" fmla="val 9524"/>
+              <a:gd name="adj" fmla="val 7692"/>
             </a:avLst>
           </a:prstGeom>
           <a:solidFill>
@@ -28265,14 +28214,14 @@
       </p:sp>
       <p:sp>
         <p:nvSpPr>
-          <p:cNvPr id="40" name="Text 38"/>
-          <p:cNvSpPr/>
-          <p:nvPr/>
-        </p:nvSpPr>
-        <p:spPr>
-          <a:xfrm>
-            <a:off x="4850892" y="4169664"/>
-            <a:ext cx="685800" cy="384048"/>
+          <p:cNvPr id="43" name="Text 41"/>
+          <p:cNvSpPr/>
+          <p:nvPr/>
+        </p:nvSpPr>
+        <p:spPr>
+          <a:xfrm>
+            <a:off x="3911969" y="4169664"/>
+            <a:ext cx="603504" cy="475488"/>
           </a:xfrm>
           <a:prstGeom prst="rect">
             <a:avLst/>
@@ -28296,7 +28245,7 @@
                 <a:ea typeface="Trebuchet MS" pitchFamily="34" charset="-122"/>
                 <a:cs typeface="Trebuchet MS" pitchFamily="34" charset="-120"/>
               </a:rPr>
-              <a:t>p</a:t>
+              <a:t>r</a:t>
             </a:r>
             <a:endParaRPr lang="en-US" sz="900" dirty="0"/>
           </a:p>
@@ -28304,18 +28253,18 @@
       </p:sp>
       <p:sp>
         <p:nvSpPr>
-          <p:cNvPr id="41" name="Shape 39"/>
-          <p:cNvSpPr/>
-          <p:nvPr/>
-        </p:nvSpPr>
-        <p:spPr>
-          <a:xfrm>
-            <a:off x="5759577" y="4169664"/>
-            <a:ext cx="685800" cy="384048"/>
+          <p:cNvPr id="44" name="Shape 42"/>
+          <p:cNvSpPr/>
+          <p:nvPr/>
+        </p:nvSpPr>
+        <p:spPr>
+          <a:xfrm>
+            <a:off x="4565350" y="4169664"/>
+            <a:ext cx="603504" cy="475488"/>
           </a:xfrm>
           <a:prstGeom prst="rect">
             <a:avLst>
-              <a:gd name="adj" fmla="val 9524"/>
+              <a:gd name="adj" fmla="val 7692"/>
             </a:avLst>
           </a:prstGeom>
           <a:solidFill>
@@ -28331,14 +28280,14 @@
       </p:sp>
       <p:sp>
         <p:nvSpPr>
-          <p:cNvPr id="42" name="Text 40"/>
-          <p:cNvSpPr/>
-          <p:nvPr/>
-        </p:nvSpPr>
-        <p:spPr>
-          <a:xfrm>
-            <a:off x="5759577" y="4169664"/>
-            <a:ext cx="685800" cy="384048"/>
+          <p:cNvPr id="45" name="Text 43"/>
+          <p:cNvSpPr/>
+          <p:nvPr/>
+        </p:nvSpPr>
+        <p:spPr>
+          <a:xfrm>
+            <a:off x="4565350" y="4169664"/>
+            <a:ext cx="603504" cy="475488"/>
           </a:xfrm>
           <a:prstGeom prst="rect">
             <a:avLst/>
@@ -28362,7 +28311,7 @@
                 <a:ea typeface="Trebuchet MS" pitchFamily="34" charset="-122"/>
                 <a:cs typeface="Trebuchet MS" pitchFamily="34" charset="-120"/>
               </a:rPr>
-              <a:t>e</a:t>
+              <a:t>o</a:t>
             </a:r>
             <a:endParaRPr lang="en-US" sz="900" dirty="0"/>
           </a:p>
@@ -28370,18 +28319,18 @@
       </p:sp>
       <p:sp>
         <p:nvSpPr>
-          <p:cNvPr id="43" name="Shape 41"/>
-          <p:cNvSpPr/>
-          <p:nvPr/>
-        </p:nvSpPr>
-        <p:spPr>
-          <a:xfrm>
-            <a:off x="6668262" y="4169664"/>
-            <a:ext cx="685800" cy="384048"/>
+          <p:cNvPr id="46" name="Shape 44"/>
+          <p:cNvSpPr/>
+          <p:nvPr/>
+        </p:nvSpPr>
+        <p:spPr>
+          <a:xfrm>
+            <a:off x="5218730" y="4169664"/>
+            <a:ext cx="603504" cy="475488"/>
           </a:xfrm>
           <a:prstGeom prst="rect">
             <a:avLst>
-              <a:gd name="adj" fmla="val 9524"/>
+              <a:gd name="adj" fmla="val 7692"/>
             </a:avLst>
           </a:prstGeom>
           <a:solidFill>
@@ -28397,14 +28346,14 @@
       </p:sp>
       <p:sp>
         <p:nvSpPr>
-          <p:cNvPr id="44" name="Text 42"/>
-          <p:cNvSpPr/>
-          <p:nvPr/>
-        </p:nvSpPr>
-        <p:spPr>
-          <a:xfrm>
-            <a:off x="6668262" y="4169664"/>
-            <a:ext cx="685800" cy="384048"/>
+          <p:cNvPr id="47" name="Text 45"/>
+          <p:cNvSpPr/>
+          <p:nvPr/>
+        </p:nvSpPr>
+        <p:spPr>
+          <a:xfrm>
+            <a:off x="5218730" y="4169664"/>
+            <a:ext cx="603504" cy="475488"/>
           </a:xfrm>
           <a:prstGeom prst="rect">
             <a:avLst/>
@@ -28428,6 +28377,204 @@
                 <a:ea typeface="Trebuchet MS" pitchFamily="34" charset="-122"/>
                 <a:cs typeface="Trebuchet MS" pitchFamily="34" charset="-120"/>
               </a:rPr>
+              <a:t>s</a:t>
+            </a:r>
+            <a:endParaRPr lang="en-US" sz="900" dirty="0"/>
+          </a:p>
+        </p:txBody>
+      </p:sp>
+      <p:sp>
+        <p:nvSpPr>
+          <p:cNvPr id="48" name="Shape 46"/>
+          <p:cNvSpPr/>
+          <p:nvPr/>
+        </p:nvSpPr>
+        <p:spPr>
+          <a:xfrm>
+            <a:off x="5872111" y="4169664"/>
+            <a:ext cx="603504" cy="475488"/>
+          </a:xfrm>
+          <a:prstGeom prst="rect">
+            <a:avLst>
+              <a:gd name="adj" fmla="val 7692"/>
+            </a:avLst>
+          </a:prstGeom>
+          <a:solidFill>
+            <a:srgbClr val="FFFFFF"/>
+          </a:solidFill>
+          <a:ln w="12700">
+            <a:solidFill>
+              <a:srgbClr val="DB2777"/>
+            </a:solidFill>
+            <a:prstDash val="solid"/>
+          </a:ln>
+        </p:spPr>
+      </p:sp>
+      <p:sp>
+        <p:nvSpPr>
+          <p:cNvPr id="49" name="Text 47"/>
+          <p:cNvSpPr/>
+          <p:nvPr/>
+        </p:nvSpPr>
+        <p:spPr>
+          <a:xfrm>
+            <a:off x="5872111" y="4169664"/>
+            <a:ext cx="603504" cy="475488"/>
+          </a:xfrm>
+          <a:prstGeom prst="rect">
+            <a:avLst/>
+          </a:prstGeom>
+          <a:noFill/>
+          <a:ln/>
+        </p:spPr>
+        <p:txBody>
+          <a:bodyPr wrap="square" lIns="0" tIns="0" rIns="0" bIns="0" rtlCol="0" anchor="ctr"/>
+          <a:lstStyle/>
+          <a:p>
+            <a:pPr algn="ctr" indent="0" marL="0">
+              <a:buNone/>
+            </a:pPr>
+            <a:r>
+              <a:rPr lang="en-US" sz="900" b="1" dirty="0">
+                <a:solidFill>
+                  <a:srgbClr val="9D174D"/>
+                </a:solidFill>
+                <a:latin typeface="Trebuchet MS" pitchFamily="34" charset="0"/>
+                <a:ea typeface="Trebuchet MS" pitchFamily="34" charset="-122"/>
+                <a:cs typeface="Trebuchet MS" pitchFamily="34" charset="-120"/>
+              </a:rPr>
+              <a:t>p</a:t>
+            </a:r>
+            <a:endParaRPr lang="en-US" sz="900" dirty="0"/>
+          </a:p>
+        </p:txBody>
+      </p:sp>
+      <p:sp>
+        <p:nvSpPr>
+          <p:cNvPr id="50" name="Shape 48"/>
+          <p:cNvSpPr/>
+          <p:nvPr/>
+        </p:nvSpPr>
+        <p:spPr>
+          <a:xfrm>
+            <a:off x="6525491" y="4169664"/>
+            <a:ext cx="603504" cy="475488"/>
+          </a:xfrm>
+          <a:prstGeom prst="rect">
+            <a:avLst>
+              <a:gd name="adj" fmla="val 7692"/>
+            </a:avLst>
+          </a:prstGeom>
+          <a:solidFill>
+            <a:srgbClr val="FFFFFF"/>
+          </a:solidFill>
+          <a:ln w="12700">
+            <a:solidFill>
+              <a:srgbClr val="DB2777"/>
+            </a:solidFill>
+            <a:prstDash val="solid"/>
+          </a:ln>
+        </p:spPr>
+      </p:sp>
+      <p:sp>
+        <p:nvSpPr>
+          <p:cNvPr id="51" name="Text 49"/>
+          <p:cNvSpPr/>
+          <p:nvPr/>
+        </p:nvSpPr>
+        <p:spPr>
+          <a:xfrm>
+            <a:off x="6525491" y="4169664"/>
+            <a:ext cx="603504" cy="475488"/>
+          </a:xfrm>
+          <a:prstGeom prst="rect">
+            <a:avLst/>
+          </a:prstGeom>
+          <a:noFill/>
+          <a:ln/>
+        </p:spPr>
+        <p:txBody>
+          <a:bodyPr wrap="square" lIns="0" tIns="0" rIns="0" bIns="0" rtlCol="0" anchor="ctr"/>
+          <a:lstStyle/>
+          <a:p>
+            <a:pPr algn="ctr" indent="0" marL="0">
+              <a:buNone/>
+            </a:pPr>
+            <a:r>
+              <a:rPr lang="en-US" sz="900" b="1" dirty="0">
+                <a:solidFill>
+                  <a:srgbClr val="9D174D"/>
+                </a:solidFill>
+                <a:latin typeface="Trebuchet MS" pitchFamily="34" charset="0"/>
+                <a:ea typeface="Trebuchet MS" pitchFamily="34" charset="-122"/>
+                <a:cs typeface="Trebuchet MS" pitchFamily="34" charset="-120"/>
+              </a:rPr>
+              <a:t>e</a:t>
+            </a:r>
+            <a:endParaRPr lang="en-US" sz="900" dirty="0"/>
+          </a:p>
+        </p:txBody>
+      </p:sp>
+      <p:sp>
+        <p:nvSpPr>
+          <p:cNvPr id="52" name="Shape 50"/>
+          <p:cNvSpPr/>
+          <p:nvPr/>
+        </p:nvSpPr>
+        <p:spPr>
+          <a:xfrm>
+            <a:off x="7178871" y="4169664"/>
+            <a:ext cx="603504" cy="475488"/>
+          </a:xfrm>
+          <a:prstGeom prst="rect">
+            <a:avLst>
+              <a:gd name="adj" fmla="val 7692"/>
+            </a:avLst>
+          </a:prstGeom>
+          <a:solidFill>
+            <a:srgbClr val="FFFFFF"/>
+          </a:solidFill>
+          <a:ln w="12700">
+            <a:solidFill>
+              <a:srgbClr val="DB2777"/>
+            </a:solidFill>
+            <a:prstDash val="solid"/>
+          </a:ln>
+        </p:spPr>
+      </p:sp>
+      <p:sp>
+        <p:nvSpPr>
+          <p:cNvPr id="53" name="Text 51"/>
+          <p:cNvSpPr/>
+          <p:nvPr/>
+        </p:nvSpPr>
+        <p:spPr>
+          <a:xfrm>
+            <a:off x="7178871" y="4169664"/>
+            <a:ext cx="603504" cy="475488"/>
+          </a:xfrm>
+          <a:prstGeom prst="rect">
+            <a:avLst/>
+          </a:prstGeom>
+          <a:noFill/>
+          <a:ln/>
+        </p:spPr>
+        <p:txBody>
+          <a:bodyPr wrap="square" lIns="0" tIns="0" rIns="0" bIns="0" rtlCol="0" anchor="ctr"/>
+          <a:lstStyle/>
+          <a:p>
+            <a:pPr algn="ctr" indent="0" marL="0">
+              <a:buNone/>
+            </a:pPr>
+            <a:r>
+              <a:rPr lang="en-US" sz="900" b="1" dirty="0">
+                <a:solidFill>
+                  <a:srgbClr val="9D174D"/>
+                </a:solidFill>
+                <a:latin typeface="Trebuchet MS" pitchFamily="34" charset="0"/>
+                <a:ea typeface="Trebuchet MS" pitchFamily="34" charset="-122"/>
+                <a:cs typeface="Trebuchet MS" pitchFamily="34" charset="-120"/>
+              </a:rPr>
               <a:t>c</a:t>
             </a:r>
             <a:endParaRPr lang="en-US" sz="900" dirty="0"/>
@@ -28436,57 +28583,18 @@
       </p:sp>
       <p:sp>
         <p:nvSpPr>
-          <p:cNvPr id="45" name="Text 43"/>
-          <p:cNvSpPr/>
-          <p:nvPr/>
-        </p:nvSpPr>
-        <p:spPr>
-          <a:xfrm>
-            <a:off x="6668262" y="4572000"/>
-            <a:ext cx="685800" cy="219456"/>
-          </a:xfrm>
-          <a:prstGeom prst="rect">
-            <a:avLst/>
-          </a:prstGeom>
-          <a:noFill/>
-          <a:ln/>
-        </p:spPr>
-        <p:txBody>
-          <a:bodyPr wrap="square" lIns="0" tIns="0" rIns="0" bIns="0" rtlCol="0" anchor="t"/>
-          <a:lstStyle/>
-          <a:p>
-            <a:pPr algn="ctr" indent="0" marL="0">
-              <a:buNone/>
-            </a:pPr>
-            <a:r>
-              <a:rPr lang="en-US" sz="750" i="1" dirty="0">
-                <a:solidFill>
-                  <a:srgbClr val="94A3B8"/>
-                </a:solidFill>
-                <a:latin typeface="Calibri" pitchFamily="34" charset="0"/>
-                <a:ea typeface="Calibri" pitchFamily="34" charset="-122"/>
-                <a:cs typeface="Calibri" pitchFamily="34" charset="-120"/>
-              </a:rPr>
-              <a:t>/k/</a:t>
-            </a:r>
-            <a:endParaRPr lang="en-US" sz="750" dirty="0"/>
-          </a:p>
-        </p:txBody>
-      </p:sp>
-      <p:sp>
-        <p:nvSpPr>
-          <p:cNvPr id="46" name="Shape 44"/>
-          <p:cNvSpPr/>
-          <p:nvPr/>
-        </p:nvSpPr>
-        <p:spPr>
-          <a:xfrm>
-            <a:off x="7576947" y="4169664"/>
-            <a:ext cx="685800" cy="384048"/>
+          <p:cNvPr id="54" name="Shape 52"/>
+          <p:cNvSpPr/>
+          <p:nvPr/>
+        </p:nvSpPr>
+        <p:spPr>
+          <a:xfrm>
+            <a:off x="7832252" y="4169664"/>
+            <a:ext cx="603504" cy="475488"/>
           </a:xfrm>
           <a:prstGeom prst="rect">
             <a:avLst>
-              <a:gd name="adj" fmla="val 9524"/>
+              <a:gd name="adj" fmla="val 7692"/>
             </a:avLst>
           </a:prstGeom>
           <a:solidFill>
@@ -28502,14 +28610,14 @@
       </p:sp>
       <p:sp>
         <p:nvSpPr>
-          <p:cNvPr id="47" name="Text 45"/>
-          <p:cNvSpPr/>
-          <p:nvPr/>
-        </p:nvSpPr>
-        <p:spPr>
-          <a:xfrm>
-            <a:off x="7576947" y="4169664"/>
-            <a:ext cx="685800" cy="384048"/>
+          <p:cNvPr id="55" name="Text 53"/>
+          <p:cNvSpPr/>
+          <p:nvPr/>
+        </p:nvSpPr>
+        <p:spPr>
+          <a:xfrm>
+            <a:off x="7832252" y="4169664"/>
+            <a:ext cx="603504" cy="475488"/>
           </a:xfrm>
           <a:prstGeom prst="rect">
             <a:avLst/>
@@ -28825,7 +28933,7 @@
                 <a:ea typeface="Calibri" pitchFamily="34" charset="-122"/>
                 <a:cs typeface="Calibri" pitchFamily="34" charset="-120"/>
               </a:rPr>
-              <a:t>Word Labs  •  wordlabs.app  •  Root: 'spect' = to look, watch, see</a:t>
+              <a:t>Word Labs  •  wordlabs.app  •  Root: 'spect' = look; watch</a:t>
             </a:r>
             <a:endParaRPr lang="en-US" sz="800" dirty="0"/>
           </a:p>
@@ -28964,7 +29072,7 @@
                 <a:ea typeface="Trebuchet MS" pitchFamily="34" charset="-122"/>
                 <a:cs typeface="Trebuchet MS" pitchFamily="34" charset="-120"/>
               </a:rPr>
-              <a:t>spectacular</a:t>
+              <a:t>retrospective</a:t>
             </a:r>
             <a:endParaRPr lang="en-US" sz="2800" dirty="0"/>
           </a:p>
@@ -29652,7 +29760,7 @@
                 <a:ea typeface="Calibri" pitchFamily="34" charset="-122"/>
                 <a:cs typeface="Calibri" pitchFamily="34" charset="-120"/>
               </a:rPr>
-              <a:t>Word Labs  •  wordlabs.app  •  Root: 'spect' = to look, watch, see</a:t>
+              <a:t>Word Labs  •  wordlabs.app  •  Root: 'spect' = look; watch</a:t>
             </a:r>
             <a:endParaRPr lang="en-US" sz="800" dirty="0"/>
           </a:p>
@@ -29791,7 +29899,7 @@
                 <a:ea typeface="Trebuchet MS" pitchFamily="34" charset="-122"/>
                 <a:cs typeface="Trebuchet MS" pitchFamily="34" charset="-120"/>
               </a:rPr>
-              <a:t>spectacular</a:t>
+              <a:t>retrospective</a:t>
             </a:r>
             <a:endParaRPr lang="en-US" sz="2800" dirty="0"/>
           </a:p>
@@ -29871,8 +29979,8 @@
         </p:nvSpPr>
         <p:spPr>
           <a:xfrm>
-            <a:off x="1989734" y="2258568"/>
-            <a:ext cx="1581912" cy="292608"/>
+            <a:off x="2221992" y="2258568"/>
+            <a:ext cx="1828800" cy="292608"/>
           </a:xfrm>
           <a:prstGeom prst="rect">
             <a:avLst>
@@ -29880,11 +29988,11 @@
             </a:avLst>
           </a:prstGeom>
           <a:solidFill>
-            <a:srgbClr val="CCFBF1"/>
+            <a:srgbClr val="DDD6FE"/>
           </a:solidFill>
           <a:ln w="19050">
             <a:solidFill>
-              <a:srgbClr val="0D9488"/>
+              <a:srgbClr val="7C3AED"/>
             </a:solidFill>
             <a:prstDash val="solid"/>
           </a:ln>
@@ -29905,8 +30013,8 @@
         </p:nvSpPr>
         <p:spPr>
           <a:xfrm>
-            <a:off x="1989734" y="2258568"/>
-            <a:ext cx="1581912" cy="292608"/>
+            <a:off x="2221992" y="2258568"/>
+            <a:ext cx="1828800" cy="292608"/>
           </a:xfrm>
           <a:prstGeom prst="rect">
             <a:avLst/>
@@ -29924,13 +30032,13 @@
             <a:r>
               <a:rPr lang="en-US" sz="1300" b="1" dirty="0">
                 <a:solidFill>
-                  <a:srgbClr val="0F766E"/>
+                  <a:srgbClr val="4C1D95"/>
                 </a:solidFill>
                 <a:latin typeface="Trebuchet MS" pitchFamily="34" charset="0"/>
                 <a:ea typeface="Trebuchet MS" pitchFamily="34" charset="-122"/>
                 <a:cs typeface="Trebuchet MS" pitchFamily="34" charset="-120"/>
               </a:rPr>
-              <a:t>spect</a:t>
+              <a:t>retro</a:t>
             </a:r>
             <a:endParaRPr lang="en-US" sz="1300" dirty="0"/>
           </a:p>
@@ -29944,8 +30052,8 @@
         </p:nvSpPr>
         <p:spPr>
           <a:xfrm>
-            <a:off x="1989734" y="2569464"/>
-            <a:ext cx="1581912" cy="201168"/>
+            <a:off x="2221992" y="2569464"/>
+            <a:ext cx="1828800" cy="201168"/>
           </a:xfrm>
           <a:prstGeom prst="rect">
             <a:avLst/>
@@ -29969,7 +30077,7 @@
                 <a:ea typeface="Calibri" pitchFamily="34" charset="-122"/>
                 <a:cs typeface="Calibri" pitchFamily="34" charset="-120"/>
               </a:rPr>
-              <a:t>to look</a:t>
+              <a:t>backwards; behind</a:t>
             </a:r>
             <a:endParaRPr lang="en-US" sz="850" dirty="0"/>
           </a:p>
@@ -29983,8 +30091,8 @@
         </p:nvSpPr>
         <p:spPr>
           <a:xfrm>
-            <a:off x="3659429" y="2258568"/>
-            <a:ext cx="1581912" cy="292608"/>
+            <a:off x="4370832" y="2258568"/>
+            <a:ext cx="1828800" cy="292608"/>
           </a:xfrm>
           <a:prstGeom prst="rect">
             <a:avLst>
@@ -29992,11 +30100,11 @@
             </a:avLst>
           </a:prstGeom>
           <a:solidFill>
-            <a:srgbClr val="FCE7F3"/>
+            <a:srgbClr val="CCFBF1"/>
           </a:solidFill>
           <a:ln w="19050">
             <a:solidFill>
-              <a:srgbClr val="DB2777"/>
+              <a:srgbClr val="0D9488"/>
             </a:solidFill>
             <a:prstDash val="solid"/>
           </a:ln>
@@ -30017,8 +30125,8 @@
         </p:nvSpPr>
         <p:spPr>
           <a:xfrm>
-            <a:off x="3659429" y="2258568"/>
-            <a:ext cx="1581912" cy="292608"/>
+            <a:off x="4370832" y="2258568"/>
+            <a:ext cx="1828800" cy="292608"/>
           </a:xfrm>
           <a:prstGeom prst="rect">
             <a:avLst/>
@@ -30036,13 +30144,13 @@
             <a:r>
               <a:rPr lang="en-US" sz="1300" b="1" dirty="0">
                 <a:solidFill>
-                  <a:srgbClr val="9D174D"/>
+                  <a:srgbClr val="0F766E"/>
                 </a:solidFill>
                 <a:latin typeface="Trebuchet MS" pitchFamily="34" charset="0"/>
                 <a:ea typeface="Trebuchet MS" pitchFamily="34" charset="-122"/>
                 <a:cs typeface="Trebuchet MS" pitchFamily="34" charset="-120"/>
               </a:rPr>
-              <a:t>ac</a:t>
+              <a:t>spect</a:t>
             </a:r>
             <a:endParaRPr lang="en-US" sz="1300" dirty="0"/>
           </a:p>
@@ -30056,8 +30164,8 @@
         </p:nvSpPr>
         <p:spPr>
           <a:xfrm>
-            <a:off x="3659429" y="2569464"/>
-            <a:ext cx="1581912" cy="201168"/>
+            <a:off x="4370832" y="2569464"/>
+            <a:ext cx="1828800" cy="201168"/>
           </a:xfrm>
           <a:prstGeom prst="rect">
             <a:avLst/>
@@ -30081,7 +30189,7 @@
                 <a:ea typeface="Calibri" pitchFamily="34" charset="-122"/>
                 <a:cs typeface="Calibri" pitchFamily="34" charset="-120"/>
               </a:rPr>
-              <a:t>relating to</a:t>
+              <a:t>look; watch</a:t>
             </a:r>
             <a:endParaRPr lang="en-US" sz="850" dirty="0"/>
           </a:p>
@@ -30095,8 +30203,8 @@
         </p:nvSpPr>
         <p:spPr>
           <a:xfrm>
-            <a:off x="5329123" y="2258568"/>
-            <a:ext cx="1581912" cy="292608"/>
+            <a:off x="6519672" y="2258568"/>
+            <a:ext cx="1828800" cy="292608"/>
           </a:xfrm>
           <a:prstGeom prst="rect">
             <a:avLst>
@@ -30104,11 +30212,11 @@
             </a:avLst>
           </a:prstGeom>
           <a:solidFill>
-            <a:srgbClr val="DDD6FE"/>
+            <a:srgbClr val="FCE7F3"/>
           </a:solidFill>
           <a:ln w="19050">
             <a:solidFill>
-              <a:srgbClr val="7C3AED"/>
+              <a:srgbClr val="DB2777"/>
             </a:solidFill>
             <a:prstDash val="solid"/>
           </a:ln>
@@ -30129,8 +30237,8 @@
         </p:nvSpPr>
         <p:spPr>
           <a:xfrm>
-            <a:off x="5329123" y="2258568"/>
-            <a:ext cx="1581912" cy="292608"/>
+            <a:off x="6519672" y="2258568"/>
+            <a:ext cx="1828800" cy="292608"/>
           </a:xfrm>
           <a:prstGeom prst="rect">
             <a:avLst/>
@@ -30148,13 +30256,13 @@
             <a:r>
               <a:rPr lang="en-US" sz="1300" b="1" dirty="0">
                 <a:solidFill>
-                  <a:srgbClr val="4C1D95"/>
+                  <a:srgbClr val="9D174D"/>
                 </a:solidFill>
                 <a:latin typeface="Trebuchet MS" pitchFamily="34" charset="0"/>
                 <a:ea typeface="Trebuchet MS" pitchFamily="34" charset="-122"/>
                 <a:cs typeface="Trebuchet MS" pitchFamily="34" charset="-120"/>
               </a:rPr>
-              <a:t>ul</a:t>
+              <a:t>ive</a:t>
             </a:r>
             <a:endParaRPr lang="en-US" sz="1300" dirty="0"/>
           </a:p>
@@ -30168,8 +30276,8 @@
         </p:nvSpPr>
         <p:spPr>
           <a:xfrm>
-            <a:off x="5329123" y="2569464"/>
-            <a:ext cx="1581912" cy="201168"/>
+            <a:off x="6519672" y="2569464"/>
+            <a:ext cx="1828800" cy="201168"/>
           </a:xfrm>
           <a:prstGeom prst="rect">
             <a:avLst/>
@@ -30193,7 +30301,7 @@
                 <a:ea typeface="Calibri" pitchFamily="34" charset="-122"/>
                 <a:cs typeface="Calibri" pitchFamily="34" charset="-120"/>
               </a:rPr>
-              <a:t>small, diminutive</a:t>
+              <a:t>having quality of</a:t>
             </a:r>
             <a:endParaRPr lang="en-US" sz="850" dirty="0"/>
           </a:p>
@@ -30207,30 +30315,23 @@
         </p:nvSpPr>
         <p:spPr>
           <a:xfrm>
-            <a:off x="6998818" y="2258568"/>
-            <a:ext cx="1581912" cy="292608"/>
+            <a:off x="365760" y="3273552"/>
+            <a:ext cx="1371600" cy="658368"/>
           </a:xfrm>
           <a:prstGeom prst="rect">
             <a:avLst>
-              <a:gd name="adj" fmla="val 25000"/>
+              <a:gd name="adj" fmla="val 8333"/>
             </a:avLst>
           </a:prstGeom>
           <a:solidFill>
-            <a:srgbClr val="FCE7F3"/>
-          </a:solidFill>
-          <a:ln w="19050">
-            <a:solidFill>
-              <a:srgbClr val="DB2777"/>
-            </a:solidFill>
-            <a:prstDash val="solid"/>
-          </a:ln>
-          <a:effectLst>
-            <a:outerShdw sx="100000" sy="100000" kx="0" ky="0" algn="bl" rotWithShape="0" blurRad="101600" dist="38100" dir="8100000">
-              <a:srgbClr val="000000">
-                <a:alpha val="12000"/>
-              </a:srgbClr>
-            </a:outerShdw>
-          </a:effectLst>
+            <a:srgbClr val="E2E8F0"/>
+          </a:solidFill>
+          <a:ln w="12700">
+            <a:solidFill>
+              <a:srgbClr val="E2E8F0"/>
+            </a:solidFill>
+            <a:prstDash val="solid"/>
+          </a:ln>
         </p:spPr>
       </p:sp>
       <p:sp>
@@ -30241,90 +30342,117 @@
         </p:nvSpPr>
         <p:spPr>
           <a:xfrm>
-            <a:off x="6998818" y="2258568"/>
-            <a:ext cx="1581912" cy="292608"/>
-          </a:xfrm>
-          <a:prstGeom prst="rect">
-            <a:avLst/>
-          </a:prstGeom>
-          <a:noFill/>
-          <a:ln/>
-        </p:spPr>
-        <p:txBody>
-          <a:bodyPr wrap="square" lIns="0" tIns="0" rIns="0" bIns="0" rtlCol="0" anchor="ctr"/>
-          <a:lstStyle/>
-          <a:p>
-            <a:pPr algn="ctr" indent="0" marL="0">
-              <a:buNone/>
-            </a:pPr>
-            <a:r>
-              <a:rPr lang="en-US" sz="1300" b="1" dirty="0">
-                <a:solidFill>
-                  <a:srgbClr val="9D174D"/>
+            <a:off x="365760" y="3273552"/>
+            <a:ext cx="1371600" cy="658368"/>
+          </a:xfrm>
+          <a:prstGeom prst="rect">
+            <a:avLst/>
+          </a:prstGeom>
+          <a:noFill/>
+          <a:ln/>
+        </p:spPr>
+        <p:txBody>
+          <a:bodyPr wrap="square" lIns="0" tIns="0" rIns="0" bIns="0" rtlCol="0" anchor="ctr"/>
+          <a:lstStyle/>
+          <a:p>
+            <a:pPr algn="ctr" indent="0" marL="0">
+              <a:buNone/>
+            </a:pPr>
+            <a:r>
+              <a:rPr lang="en-US" sz="1100" b="1" dirty="0">
+                <a:solidFill>
+                  <a:srgbClr val="475569"/>
                 </a:solidFill>
                 <a:latin typeface="Trebuchet MS" pitchFamily="34" charset="0"/>
                 <a:ea typeface="Trebuchet MS" pitchFamily="34" charset="-122"/>
                 <a:cs typeface="Trebuchet MS" pitchFamily="34" charset="-120"/>
               </a:rPr>
-              <a:t>ar</a:t>
-            </a:r>
-            <a:endParaRPr lang="en-US" sz="1300" dirty="0"/>
-          </a:p>
-        </p:txBody>
-      </p:sp>
-      <p:sp>
-        <p:nvSpPr>
-          <p:cNvPr id="27" name="Text 25"/>
-          <p:cNvSpPr/>
-          <p:nvPr/>
-        </p:nvSpPr>
-        <p:spPr>
-          <a:xfrm>
-            <a:off x="6998818" y="2569464"/>
-            <a:ext cx="1581912" cy="201168"/>
-          </a:xfrm>
-          <a:prstGeom prst="rect">
-            <a:avLst/>
-          </a:prstGeom>
-          <a:noFill/>
-          <a:ln/>
-        </p:spPr>
-        <p:txBody>
-          <a:bodyPr wrap="square" lIns="0" tIns="0" rIns="0" bIns="0" rtlCol="0" anchor="t"/>
-          <a:lstStyle/>
-          <a:p>
-            <a:pPr algn="ctr" indent="0" marL="0">
-              <a:buNone/>
-            </a:pPr>
-            <a:r>
-              <a:rPr lang="en-US" sz="850" dirty="0">
-                <a:solidFill>
-                  <a:srgbClr val="475569"/>
+              <a:t>Syllables</a:t>
+            </a:r>
+            <a:endParaRPr lang="en-US" sz="1100" dirty="0"/>
+          </a:p>
+        </p:txBody>
+      </p:sp>
+      <p:sp>
+        <p:nvSpPr>
+          <p:cNvPr id="27" name="Shape 25"/>
+          <p:cNvSpPr/>
+          <p:nvPr/>
+        </p:nvSpPr>
+        <p:spPr>
+          <a:xfrm>
+            <a:off x="1874520" y="3273552"/>
+            <a:ext cx="6903720" cy="658368"/>
+          </a:xfrm>
+          <a:prstGeom prst="rect">
+            <a:avLst>
+              <a:gd name="adj" fmla="val 8333"/>
+            </a:avLst>
+          </a:prstGeom>
+          <a:solidFill>
+            <a:srgbClr val="F8FAFC"/>
+          </a:solidFill>
+          <a:ln w="12700">
+            <a:solidFill>
+              <a:srgbClr val="E2E8F0"/>
+            </a:solidFill>
+            <a:prstDash val="dash"/>
+          </a:ln>
+        </p:spPr>
+      </p:sp>
+      <p:sp>
+        <p:nvSpPr>
+          <p:cNvPr id="28" name="Text 26"/>
+          <p:cNvSpPr/>
+          <p:nvPr/>
+        </p:nvSpPr>
+        <p:spPr>
+          <a:xfrm>
+            <a:off x="1874520" y="3273552"/>
+            <a:ext cx="6903720" cy="658368"/>
+          </a:xfrm>
+          <a:prstGeom prst="rect">
+            <a:avLst/>
+          </a:prstGeom>
+          <a:noFill/>
+          <a:ln/>
+        </p:spPr>
+        <p:txBody>
+          <a:bodyPr wrap="square" rtlCol="0" anchor="ctr"/>
+          <a:lstStyle/>
+          <a:p>
+            <a:pPr algn="ctr" indent="0" marL="0">
+              <a:buNone/>
+            </a:pPr>
+            <a:r>
+              <a:rPr lang="en-US" sz="1100" i="1" dirty="0">
+                <a:solidFill>
+                  <a:srgbClr val="CBD5E1"/>
                 </a:solidFill>
                 <a:latin typeface="Calibri" pitchFamily="34" charset="0"/>
                 <a:ea typeface="Calibri" pitchFamily="34" charset="-122"/>
                 <a:cs typeface="Calibri" pitchFamily="34" charset="-120"/>
               </a:rPr>
-              <a:t>relating to, like</a:t>
-            </a:r>
-            <a:endParaRPr lang="en-US" sz="850" dirty="0"/>
-          </a:p>
-        </p:txBody>
-      </p:sp>
-      <p:sp>
-        <p:nvSpPr>
-          <p:cNvPr id="28" name="Shape 26"/>
-          <p:cNvSpPr/>
-          <p:nvPr/>
-        </p:nvSpPr>
-        <p:spPr>
-          <a:xfrm>
-            <a:off x="365760" y="3273552"/>
-            <a:ext cx="1371600" cy="658368"/>
+              <a:t>Write here...</a:t>
+            </a:r>
+            <a:endParaRPr lang="en-US" sz="1100" dirty="0"/>
+          </a:p>
+        </p:txBody>
+      </p:sp>
+      <p:sp>
+        <p:nvSpPr>
+          <p:cNvPr id="29" name="Shape 27"/>
+          <p:cNvSpPr/>
+          <p:nvPr/>
+        </p:nvSpPr>
+        <p:spPr>
+          <a:xfrm>
+            <a:off x="365760" y="4096512"/>
+            <a:ext cx="1371600" cy="804672"/>
           </a:xfrm>
           <a:prstGeom prst="rect">
             <a:avLst>
-              <a:gd name="adj" fmla="val 8333"/>
+              <a:gd name="adj" fmla="val 6818"/>
             </a:avLst>
           </a:prstGeom>
           <a:solidFill>
@@ -30340,14 +30468,14 @@
       </p:sp>
       <p:sp>
         <p:nvSpPr>
-          <p:cNvPr id="29" name="Text 27"/>
-          <p:cNvSpPr/>
-          <p:nvPr/>
-        </p:nvSpPr>
-        <p:spPr>
-          <a:xfrm>
-            <a:off x="365760" y="3273552"/>
-            <a:ext cx="1371600" cy="658368"/>
+          <p:cNvPr id="30" name="Text 28"/>
+          <p:cNvSpPr/>
+          <p:nvPr/>
+        </p:nvSpPr>
+        <p:spPr>
+          <a:xfrm>
+            <a:off x="365760" y="4096512"/>
+            <a:ext cx="1371600" cy="804672"/>
           </a:xfrm>
           <a:prstGeom prst="rect">
             <a:avLst/>
@@ -30371,7 +30499,7 @@
                 <a:ea typeface="Trebuchet MS" pitchFamily="34" charset="-122"/>
                 <a:cs typeface="Trebuchet MS" pitchFamily="34" charset="-120"/>
               </a:rPr>
-              <a:t>Syllables</a:t>
+              <a:t>Phonemes</a:t>
             </a:r>
             <a:endParaRPr lang="en-US" sz="1100" dirty="0"/>
           </a:p>
@@ -30379,80 +30507,14 @@
       </p:sp>
       <p:sp>
         <p:nvSpPr>
-          <p:cNvPr id="30" name="Shape 28"/>
-          <p:cNvSpPr/>
-          <p:nvPr/>
-        </p:nvSpPr>
-        <p:spPr>
-          <a:xfrm>
-            <a:off x="1874520" y="3273552"/>
-            <a:ext cx="6903720" cy="658368"/>
-          </a:xfrm>
-          <a:prstGeom prst="rect">
-            <a:avLst>
-              <a:gd name="adj" fmla="val 8333"/>
-            </a:avLst>
-          </a:prstGeom>
-          <a:solidFill>
-            <a:srgbClr val="F8FAFC"/>
-          </a:solidFill>
-          <a:ln w="12700">
-            <a:solidFill>
-              <a:srgbClr val="E2E8F0"/>
-            </a:solidFill>
-            <a:prstDash val="dash"/>
-          </a:ln>
-        </p:spPr>
-      </p:sp>
-      <p:sp>
-        <p:nvSpPr>
-          <p:cNvPr id="31" name="Text 29"/>
-          <p:cNvSpPr/>
-          <p:nvPr/>
-        </p:nvSpPr>
-        <p:spPr>
-          <a:xfrm>
-            <a:off x="1874520" y="3273552"/>
-            <a:ext cx="6903720" cy="658368"/>
-          </a:xfrm>
-          <a:prstGeom prst="rect">
-            <a:avLst/>
-          </a:prstGeom>
-          <a:noFill/>
-          <a:ln/>
-        </p:spPr>
-        <p:txBody>
-          <a:bodyPr wrap="square" rtlCol="0" anchor="ctr"/>
-          <a:lstStyle/>
-          <a:p>
-            <a:pPr algn="ctr" indent="0" marL="0">
-              <a:buNone/>
-            </a:pPr>
-            <a:r>
-              <a:rPr lang="en-US" sz="1100" i="1" dirty="0">
-                <a:solidFill>
-                  <a:srgbClr val="CBD5E1"/>
-                </a:solidFill>
-                <a:latin typeface="Calibri" pitchFamily="34" charset="0"/>
-                <a:ea typeface="Calibri" pitchFamily="34" charset="-122"/>
-                <a:cs typeface="Calibri" pitchFamily="34" charset="-120"/>
-              </a:rPr>
-              <a:t>Write here...</a:t>
-            </a:r>
-            <a:endParaRPr lang="en-US" sz="1100" dirty="0"/>
-          </a:p>
-        </p:txBody>
-      </p:sp>
-      <p:sp>
-        <p:nvSpPr>
-          <p:cNvPr id="32" name="Shape 30"/>
-          <p:cNvSpPr/>
-          <p:nvPr/>
-        </p:nvSpPr>
-        <p:spPr>
-          <a:xfrm>
-            <a:off x="365760" y="4096512"/>
-            <a:ext cx="1371600" cy="804672"/>
+          <p:cNvPr id="31" name="Shape 29"/>
+          <p:cNvSpPr/>
+          <p:nvPr/>
+        </p:nvSpPr>
+        <p:spPr>
+          <a:xfrm>
+            <a:off x="1874520" y="4096512"/>
+            <a:ext cx="6903720" cy="804672"/>
           </a:xfrm>
           <a:prstGeom prst="rect">
             <a:avLst>
@@ -30460,85 +30522,19 @@
             </a:avLst>
           </a:prstGeom>
           <a:solidFill>
-            <a:srgbClr val="E2E8F0"/>
+            <a:srgbClr val="F8FAFC"/>
           </a:solidFill>
           <a:ln w="12700">
             <a:solidFill>
               <a:srgbClr val="E2E8F0"/>
             </a:solidFill>
-            <a:prstDash val="solid"/>
-          </a:ln>
-        </p:spPr>
-      </p:sp>
-      <p:sp>
-        <p:nvSpPr>
-          <p:cNvPr id="33" name="Text 31"/>
-          <p:cNvSpPr/>
-          <p:nvPr/>
-        </p:nvSpPr>
-        <p:spPr>
-          <a:xfrm>
-            <a:off x="365760" y="4096512"/>
-            <a:ext cx="1371600" cy="804672"/>
-          </a:xfrm>
-          <a:prstGeom prst="rect">
-            <a:avLst/>
-          </a:prstGeom>
-          <a:noFill/>
-          <a:ln/>
-        </p:spPr>
-        <p:txBody>
-          <a:bodyPr wrap="square" lIns="0" tIns="0" rIns="0" bIns="0" rtlCol="0" anchor="ctr"/>
-          <a:lstStyle/>
-          <a:p>
-            <a:pPr algn="ctr" indent="0" marL="0">
-              <a:buNone/>
-            </a:pPr>
-            <a:r>
-              <a:rPr lang="en-US" sz="1100" b="1" dirty="0">
-                <a:solidFill>
-                  <a:srgbClr val="475569"/>
-                </a:solidFill>
-                <a:latin typeface="Trebuchet MS" pitchFamily="34" charset="0"/>
-                <a:ea typeface="Trebuchet MS" pitchFamily="34" charset="-122"/>
-                <a:cs typeface="Trebuchet MS" pitchFamily="34" charset="-120"/>
-              </a:rPr>
-              <a:t>Phonemes</a:t>
-            </a:r>
-            <a:endParaRPr lang="en-US" sz="1100" dirty="0"/>
-          </a:p>
-        </p:txBody>
-      </p:sp>
-      <p:sp>
-        <p:nvSpPr>
-          <p:cNvPr id="34" name="Shape 32"/>
-          <p:cNvSpPr/>
-          <p:nvPr/>
-        </p:nvSpPr>
-        <p:spPr>
-          <a:xfrm>
-            <a:off x="1874520" y="4096512"/>
-            <a:ext cx="6903720" cy="804672"/>
-          </a:xfrm>
-          <a:prstGeom prst="rect">
-            <a:avLst>
-              <a:gd name="adj" fmla="val 6818"/>
-            </a:avLst>
-          </a:prstGeom>
-          <a:solidFill>
-            <a:srgbClr val="F8FAFC"/>
-          </a:solidFill>
-          <a:ln w="12700">
-            <a:solidFill>
-              <a:srgbClr val="E2E8F0"/>
-            </a:solidFill>
             <a:prstDash val="dash"/>
           </a:ln>
         </p:spPr>
       </p:sp>
       <p:sp>
         <p:nvSpPr>
-          <p:cNvPr id="35" name="Text 33"/>
+          <p:cNvPr id="32" name="Text 30"/>
           <p:cNvSpPr/>
           <p:nvPr/>
         </p:nvSpPr>
@@ -30861,7 +30857,7 @@
                 <a:ea typeface="Calibri" pitchFamily="34" charset="-122"/>
                 <a:cs typeface="Calibri" pitchFamily="34" charset="-120"/>
               </a:rPr>
-              <a:t>Word Labs  •  wordlabs.app  •  Root: 'spect' = to look, watch, see</a:t>
+              <a:t>Word Labs  •  wordlabs.app  •  Root: 'spect' = look; watch</a:t>
             </a:r>
             <a:endParaRPr lang="en-US" sz="800" dirty="0"/>
           </a:p>
@@ -31000,7 +30996,7 @@
                 <a:ea typeface="Trebuchet MS" pitchFamily="34" charset="-122"/>
                 <a:cs typeface="Trebuchet MS" pitchFamily="34" charset="-120"/>
               </a:rPr>
-              <a:t>spectacular</a:t>
+              <a:t>retrospective</a:t>
             </a:r>
             <a:endParaRPr lang="en-US" sz="2800" dirty="0"/>
           </a:p>
@@ -31080,8 +31076,8 @@
         </p:nvSpPr>
         <p:spPr>
           <a:xfrm>
-            <a:off x="1989734" y="2258568"/>
-            <a:ext cx="1581912" cy="292608"/>
+            <a:off x="2221992" y="2258568"/>
+            <a:ext cx="1828800" cy="292608"/>
           </a:xfrm>
           <a:prstGeom prst="rect">
             <a:avLst>
@@ -31089,11 +31085,11 @@
             </a:avLst>
           </a:prstGeom>
           <a:solidFill>
-            <a:srgbClr val="CCFBF1"/>
+            <a:srgbClr val="DDD6FE"/>
           </a:solidFill>
           <a:ln w="19050">
             <a:solidFill>
-              <a:srgbClr val="0D9488"/>
+              <a:srgbClr val="7C3AED"/>
             </a:solidFill>
             <a:prstDash val="solid"/>
           </a:ln>
@@ -31114,8 +31110,8 @@
         </p:nvSpPr>
         <p:spPr>
           <a:xfrm>
-            <a:off x="1989734" y="2258568"/>
-            <a:ext cx="1581912" cy="292608"/>
+            <a:off x="2221992" y="2258568"/>
+            <a:ext cx="1828800" cy="292608"/>
           </a:xfrm>
           <a:prstGeom prst="rect">
             <a:avLst/>
@@ -31133,13 +31129,13 @@
             <a:r>
               <a:rPr lang="en-US" sz="1300" b="1" dirty="0">
                 <a:solidFill>
-                  <a:srgbClr val="0F766E"/>
+                  <a:srgbClr val="4C1D95"/>
                 </a:solidFill>
                 <a:latin typeface="Trebuchet MS" pitchFamily="34" charset="0"/>
                 <a:ea typeface="Trebuchet MS" pitchFamily="34" charset="-122"/>
                 <a:cs typeface="Trebuchet MS" pitchFamily="34" charset="-120"/>
               </a:rPr>
-              <a:t>spect</a:t>
+              <a:t>retro</a:t>
             </a:r>
             <a:endParaRPr lang="en-US" sz="1300" dirty="0"/>
           </a:p>
@@ -31153,8 +31149,8 @@
         </p:nvSpPr>
         <p:spPr>
           <a:xfrm>
-            <a:off x="1989734" y="2569464"/>
-            <a:ext cx="1581912" cy="201168"/>
+            <a:off x="2221992" y="2569464"/>
+            <a:ext cx="1828800" cy="201168"/>
           </a:xfrm>
           <a:prstGeom prst="rect">
             <a:avLst/>
@@ -31178,7 +31174,7 @@
                 <a:ea typeface="Calibri" pitchFamily="34" charset="-122"/>
                 <a:cs typeface="Calibri" pitchFamily="34" charset="-120"/>
               </a:rPr>
-              <a:t>to look</a:t>
+              <a:t>backwards; behind</a:t>
             </a:r>
             <a:endParaRPr lang="en-US" sz="850" dirty="0"/>
           </a:p>
@@ -31192,8 +31188,8 @@
         </p:nvSpPr>
         <p:spPr>
           <a:xfrm>
-            <a:off x="3659429" y="2258568"/>
-            <a:ext cx="1581912" cy="292608"/>
+            <a:off x="4370832" y="2258568"/>
+            <a:ext cx="1828800" cy="292608"/>
           </a:xfrm>
           <a:prstGeom prst="rect">
             <a:avLst>
@@ -31201,11 +31197,11 @@
             </a:avLst>
           </a:prstGeom>
           <a:solidFill>
-            <a:srgbClr val="FCE7F3"/>
+            <a:srgbClr val="CCFBF1"/>
           </a:solidFill>
           <a:ln w="19050">
             <a:solidFill>
-              <a:srgbClr val="DB2777"/>
+              <a:srgbClr val="0D9488"/>
             </a:solidFill>
             <a:prstDash val="solid"/>
           </a:ln>
@@ -31226,8 +31222,8 @@
         </p:nvSpPr>
         <p:spPr>
           <a:xfrm>
-            <a:off x="3659429" y="2258568"/>
-            <a:ext cx="1581912" cy="292608"/>
+            <a:off x="4370832" y="2258568"/>
+            <a:ext cx="1828800" cy="292608"/>
           </a:xfrm>
           <a:prstGeom prst="rect">
             <a:avLst/>
@@ -31245,13 +31241,13 @@
             <a:r>
               <a:rPr lang="en-US" sz="1300" b="1" dirty="0">
                 <a:solidFill>
-                  <a:srgbClr val="9D174D"/>
+                  <a:srgbClr val="0F766E"/>
                 </a:solidFill>
                 <a:latin typeface="Trebuchet MS" pitchFamily="34" charset="0"/>
                 <a:ea typeface="Trebuchet MS" pitchFamily="34" charset="-122"/>
                 <a:cs typeface="Trebuchet MS" pitchFamily="34" charset="-120"/>
               </a:rPr>
-              <a:t>ac</a:t>
+              <a:t>spect</a:t>
             </a:r>
             <a:endParaRPr lang="en-US" sz="1300" dirty="0"/>
           </a:p>
@@ -31265,8 +31261,8 @@
         </p:nvSpPr>
         <p:spPr>
           <a:xfrm>
-            <a:off x="3659429" y="2569464"/>
-            <a:ext cx="1581912" cy="201168"/>
+            <a:off x="4370832" y="2569464"/>
+            <a:ext cx="1828800" cy="201168"/>
           </a:xfrm>
           <a:prstGeom prst="rect">
             <a:avLst/>
@@ -31290,7 +31286,7 @@
                 <a:ea typeface="Calibri" pitchFamily="34" charset="-122"/>
                 <a:cs typeface="Calibri" pitchFamily="34" charset="-120"/>
               </a:rPr>
-              <a:t>relating to</a:t>
+              <a:t>look; watch</a:t>
             </a:r>
             <a:endParaRPr lang="en-US" sz="850" dirty="0"/>
           </a:p>
@@ -31304,8 +31300,8 @@
         </p:nvSpPr>
         <p:spPr>
           <a:xfrm>
-            <a:off x="5329123" y="2258568"/>
-            <a:ext cx="1581912" cy="292608"/>
+            <a:off x="6519672" y="2258568"/>
+            <a:ext cx="1828800" cy="292608"/>
           </a:xfrm>
           <a:prstGeom prst="rect">
             <a:avLst>
@@ -31313,11 +31309,11 @@
             </a:avLst>
           </a:prstGeom>
           <a:solidFill>
-            <a:srgbClr val="DDD6FE"/>
+            <a:srgbClr val="FCE7F3"/>
           </a:solidFill>
           <a:ln w="19050">
             <a:solidFill>
-              <a:srgbClr val="7C3AED"/>
+              <a:srgbClr val="DB2777"/>
             </a:solidFill>
             <a:prstDash val="solid"/>
           </a:ln>
@@ -31338,8 +31334,8 @@
         </p:nvSpPr>
         <p:spPr>
           <a:xfrm>
-            <a:off x="5329123" y="2258568"/>
-            <a:ext cx="1581912" cy="292608"/>
+            <a:off x="6519672" y="2258568"/>
+            <a:ext cx="1828800" cy="292608"/>
           </a:xfrm>
           <a:prstGeom prst="rect">
             <a:avLst/>
@@ -31357,13 +31353,13 @@
             <a:r>
               <a:rPr lang="en-US" sz="1300" b="1" dirty="0">
                 <a:solidFill>
-                  <a:srgbClr val="4C1D95"/>
+                  <a:srgbClr val="9D174D"/>
                 </a:solidFill>
                 <a:latin typeface="Trebuchet MS" pitchFamily="34" charset="0"/>
                 <a:ea typeface="Trebuchet MS" pitchFamily="34" charset="-122"/>
                 <a:cs typeface="Trebuchet MS" pitchFamily="34" charset="-120"/>
               </a:rPr>
-              <a:t>ul</a:t>
+              <a:t>ive</a:t>
             </a:r>
             <a:endParaRPr lang="en-US" sz="1300" dirty="0"/>
           </a:p>
@@ -31377,8 +31373,8 @@
         </p:nvSpPr>
         <p:spPr>
           <a:xfrm>
-            <a:off x="5329123" y="2569464"/>
-            <a:ext cx="1581912" cy="201168"/>
+            <a:off x="6519672" y="2569464"/>
+            <a:ext cx="1828800" cy="201168"/>
           </a:xfrm>
           <a:prstGeom prst="rect">
             <a:avLst/>
@@ -31402,7 +31398,7 @@
                 <a:ea typeface="Calibri" pitchFamily="34" charset="-122"/>
                 <a:cs typeface="Calibri" pitchFamily="34" charset="-120"/>
               </a:rPr>
-              <a:t>small, diminutive</a:t>
+              <a:t>having quality of</a:t>
             </a:r>
             <a:endParaRPr lang="en-US" sz="850" dirty="0"/>
           </a:p>
@@ -31416,30 +31412,23 @@
         </p:nvSpPr>
         <p:spPr>
           <a:xfrm>
-            <a:off x="6998818" y="2258568"/>
-            <a:ext cx="1581912" cy="292608"/>
+            <a:off x="365760" y="3273552"/>
+            <a:ext cx="1371600" cy="658368"/>
           </a:xfrm>
           <a:prstGeom prst="rect">
             <a:avLst>
-              <a:gd name="adj" fmla="val 25000"/>
+              <a:gd name="adj" fmla="val 8333"/>
             </a:avLst>
           </a:prstGeom>
           <a:solidFill>
-            <a:srgbClr val="FCE7F3"/>
-          </a:solidFill>
-          <a:ln w="19050">
-            <a:solidFill>
-              <a:srgbClr val="DB2777"/>
-            </a:solidFill>
-            <a:prstDash val="solid"/>
-          </a:ln>
-          <a:effectLst>
-            <a:outerShdw sx="100000" sy="100000" kx="0" ky="0" algn="bl" rotWithShape="0" blurRad="101600" dist="38100" dir="8100000">
-              <a:srgbClr val="000000">
-                <a:alpha val="12000"/>
-              </a:srgbClr>
-            </a:outerShdw>
-          </a:effectLst>
+            <a:srgbClr val="E2E8F0"/>
+          </a:solidFill>
+          <a:ln w="12700">
+            <a:solidFill>
+              <a:srgbClr val="E2E8F0"/>
+            </a:solidFill>
+            <a:prstDash val="solid"/>
+          </a:ln>
         </p:spPr>
       </p:sp>
       <p:sp>
@@ -31450,86 +31439,47 @@
         </p:nvSpPr>
         <p:spPr>
           <a:xfrm>
-            <a:off x="6998818" y="2258568"/>
-            <a:ext cx="1581912" cy="292608"/>
-          </a:xfrm>
-          <a:prstGeom prst="rect">
-            <a:avLst/>
-          </a:prstGeom>
-          <a:noFill/>
-          <a:ln/>
-        </p:spPr>
-        <p:txBody>
-          <a:bodyPr wrap="square" lIns="0" tIns="0" rIns="0" bIns="0" rtlCol="0" anchor="ctr"/>
-          <a:lstStyle/>
-          <a:p>
-            <a:pPr algn="ctr" indent="0" marL="0">
-              <a:buNone/>
-            </a:pPr>
-            <a:r>
-              <a:rPr lang="en-US" sz="1300" b="1" dirty="0">
-                <a:solidFill>
-                  <a:srgbClr val="9D174D"/>
+            <a:off x="365760" y="3273552"/>
+            <a:ext cx="1371600" cy="658368"/>
+          </a:xfrm>
+          <a:prstGeom prst="rect">
+            <a:avLst/>
+          </a:prstGeom>
+          <a:noFill/>
+          <a:ln/>
+        </p:spPr>
+        <p:txBody>
+          <a:bodyPr wrap="square" lIns="0" tIns="0" rIns="0" bIns="0" rtlCol="0" anchor="ctr"/>
+          <a:lstStyle/>
+          <a:p>
+            <a:pPr algn="ctr" indent="0" marL="0">
+              <a:buNone/>
+            </a:pPr>
+            <a:r>
+              <a:rPr lang="en-US" sz="1100" b="1" dirty="0">
+                <a:solidFill>
+                  <a:srgbClr val="475569"/>
                 </a:solidFill>
                 <a:latin typeface="Trebuchet MS" pitchFamily="34" charset="0"/>
                 <a:ea typeface="Trebuchet MS" pitchFamily="34" charset="-122"/>
                 <a:cs typeface="Trebuchet MS" pitchFamily="34" charset="-120"/>
               </a:rPr>
-              <a:t>ar</a:t>
-            </a:r>
-            <a:endParaRPr lang="en-US" sz="1300" dirty="0"/>
-          </a:p>
-        </p:txBody>
-      </p:sp>
-      <p:sp>
-        <p:nvSpPr>
-          <p:cNvPr id="27" name="Text 25"/>
-          <p:cNvSpPr/>
-          <p:nvPr/>
-        </p:nvSpPr>
-        <p:spPr>
-          <a:xfrm>
-            <a:off x="6998818" y="2569464"/>
-            <a:ext cx="1581912" cy="201168"/>
-          </a:xfrm>
-          <a:prstGeom prst="rect">
-            <a:avLst/>
-          </a:prstGeom>
-          <a:noFill/>
-          <a:ln/>
-        </p:spPr>
-        <p:txBody>
-          <a:bodyPr wrap="square" lIns="0" tIns="0" rIns="0" bIns="0" rtlCol="0" anchor="t"/>
-          <a:lstStyle/>
-          <a:p>
-            <a:pPr algn="ctr" indent="0" marL="0">
-              <a:buNone/>
-            </a:pPr>
-            <a:r>
-              <a:rPr lang="en-US" sz="850" dirty="0">
-                <a:solidFill>
-                  <a:srgbClr val="475569"/>
-                </a:solidFill>
-                <a:latin typeface="Calibri" pitchFamily="34" charset="0"/>
-                <a:ea typeface="Calibri" pitchFamily="34" charset="-122"/>
-                <a:cs typeface="Calibri" pitchFamily="34" charset="-120"/>
-              </a:rPr>
-              <a:t>relating to, like</a:t>
-            </a:r>
-            <a:endParaRPr lang="en-US" sz="850" dirty="0"/>
-          </a:p>
-        </p:txBody>
-      </p:sp>
-      <p:sp>
-        <p:nvSpPr>
-          <p:cNvPr id="28" name="Shape 26"/>
-          <p:cNvSpPr/>
-          <p:nvPr/>
-        </p:nvSpPr>
-        <p:spPr>
-          <a:xfrm>
-            <a:off x="365760" y="3273552"/>
-            <a:ext cx="1371600" cy="658368"/>
+              <a:t>Syllables</a:t>
+            </a:r>
+            <a:endParaRPr lang="en-US" sz="1100" dirty="0"/>
+          </a:p>
+        </p:txBody>
+      </p:sp>
+      <p:sp>
+        <p:nvSpPr>
+          <p:cNvPr id="27" name="Shape 25"/>
+          <p:cNvSpPr/>
+          <p:nvPr/>
+        </p:nvSpPr>
+        <p:spPr>
+          <a:xfrm>
+            <a:off x="1874520" y="3273552"/>
+            <a:ext cx="6903720" cy="658368"/>
           </a:xfrm>
           <a:prstGeom prst="rect">
             <a:avLst>
@@ -31537,11 +31487,38 @@
             </a:avLst>
           </a:prstGeom>
           <a:solidFill>
-            <a:srgbClr val="E2E8F0"/>
-          </a:solidFill>
-          <a:ln w="12700">
-            <a:solidFill>
-              <a:srgbClr val="E2E8F0"/>
+            <a:srgbClr val="CCFBF1"/>
+          </a:solidFill>
+          <a:ln w="12700">
+            <a:solidFill>
+              <a:srgbClr val="0D9488"/>
+            </a:solidFill>
+            <a:prstDash val="solid"/>
+          </a:ln>
+        </p:spPr>
+      </p:sp>
+      <p:sp>
+        <p:nvSpPr>
+          <p:cNvPr id="28" name="Shape 26"/>
+          <p:cNvSpPr/>
+          <p:nvPr/>
+        </p:nvSpPr>
+        <p:spPr>
+          <a:xfrm>
+            <a:off x="1975104" y="3364992"/>
+            <a:ext cx="1554480" cy="475488"/>
+          </a:xfrm>
+          <a:prstGeom prst="rect">
+            <a:avLst>
+              <a:gd name="adj" fmla="val 9615"/>
+            </a:avLst>
+          </a:prstGeom>
+          <a:solidFill>
+            <a:srgbClr val="FFFFFF"/>
+          </a:solidFill>
+          <a:ln w="12700">
+            <a:solidFill>
+              <a:srgbClr val="0D9488"/>
             </a:solidFill>
             <a:prstDash val="solid"/>
           </a:ln>
@@ -31555,63 +31532,75 @@
         </p:nvSpPr>
         <p:spPr>
           <a:xfrm>
-            <a:off x="365760" y="3273552"/>
-            <a:ext cx="1371600" cy="658368"/>
-          </a:xfrm>
-          <a:prstGeom prst="rect">
-            <a:avLst/>
-          </a:prstGeom>
-          <a:noFill/>
-          <a:ln/>
-        </p:spPr>
-        <p:txBody>
-          <a:bodyPr wrap="square" lIns="0" tIns="0" rIns="0" bIns="0" rtlCol="0" anchor="ctr"/>
-          <a:lstStyle/>
-          <a:p>
-            <a:pPr algn="ctr" indent="0" marL="0">
-              <a:buNone/>
-            </a:pPr>
-            <a:r>
-              <a:rPr lang="en-US" sz="1100" b="1" dirty="0">
-                <a:solidFill>
-                  <a:srgbClr val="475569"/>
+            <a:off x="1975104" y="3364992"/>
+            <a:ext cx="1554480" cy="475488"/>
+          </a:xfrm>
+          <a:prstGeom prst="rect">
+            <a:avLst/>
+          </a:prstGeom>
+          <a:noFill/>
+          <a:ln/>
+        </p:spPr>
+        <p:txBody>
+          <a:bodyPr wrap="square" lIns="0" tIns="0" rIns="0" bIns="0" rtlCol="0" anchor="ctr"/>
+          <a:lstStyle/>
+          <a:p>
+            <a:pPr algn="ctr" indent="0" marL="0">
+              <a:buNone/>
+            </a:pPr>
+            <a:r>
+              <a:rPr lang="en-US" sz="1400" b="1" dirty="0">
+                <a:solidFill>
+                  <a:srgbClr val="0D9488"/>
                 </a:solidFill>
                 <a:latin typeface="Trebuchet MS" pitchFamily="34" charset="0"/>
                 <a:ea typeface="Trebuchet MS" pitchFamily="34" charset="-122"/>
                 <a:cs typeface="Trebuchet MS" pitchFamily="34" charset="-120"/>
               </a:rPr>
-              <a:t>Syllables</a:t>
-            </a:r>
-            <a:endParaRPr lang="en-US" sz="1100" dirty="0"/>
-          </a:p>
-        </p:txBody>
-      </p:sp>
-      <p:sp>
-        <p:nvSpPr>
-          <p:cNvPr id="30" name="Shape 28"/>
-          <p:cNvSpPr/>
-          <p:nvPr/>
-        </p:nvSpPr>
-        <p:spPr>
-          <a:xfrm>
-            <a:off x="1874520" y="3273552"/>
-            <a:ext cx="6903720" cy="658368"/>
-          </a:xfrm>
-          <a:prstGeom prst="rect">
-            <a:avLst>
-              <a:gd name="adj" fmla="val 8333"/>
-            </a:avLst>
-          </a:prstGeom>
-          <a:solidFill>
-            <a:srgbClr val="CCFBF1"/>
-          </a:solidFill>
-          <a:ln w="12700">
-            <a:solidFill>
-              <a:srgbClr val="0D9488"/>
-            </a:solidFill>
-            <a:prstDash val="solid"/>
-          </a:ln>
-        </p:spPr>
+              <a:t>ret</a:t>
+            </a:r>
+            <a:endParaRPr lang="en-US" sz="1400" dirty="0"/>
+          </a:p>
+        </p:txBody>
+      </p:sp>
+      <p:sp>
+        <p:nvSpPr>
+          <p:cNvPr id="30" name="Text 28"/>
+          <p:cNvSpPr/>
+          <p:nvPr/>
+        </p:nvSpPr>
+        <p:spPr>
+          <a:xfrm>
+            <a:off x="3529584" y="3364992"/>
+            <a:ext cx="73152" cy="475488"/>
+          </a:xfrm>
+          <a:prstGeom prst="rect">
+            <a:avLst/>
+          </a:prstGeom>
+          <a:noFill/>
+          <a:ln/>
+        </p:spPr>
+        <p:txBody>
+          <a:bodyPr wrap="square" lIns="0" tIns="0" rIns="0" bIns="0" rtlCol="0" anchor="ctr"/>
+          <a:lstStyle/>
+          <a:p>
+            <a:pPr algn="ctr" indent="0" marL="0">
+              <a:buNone/>
+            </a:pPr>
+            <a:r>
+              <a:rPr lang="en-US" sz="1600" b="1" dirty="0">
+                <a:solidFill>
+                  <a:srgbClr val="0D9488"/>
+                </a:solidFill>
+                <a:latin typeface="Trebuchet MS" pitchFamily="34" charset="0"/>
+                <a:ea typeface="Trebuchet MS" pitchFamily="34" charset="-122"/>
+                <a:cs typeface="Trebuchet MS" pitchFamily="34" charset="-120"/>
+              </a:rPr>
+              <a:t>·</a:t>
+            </a:r>
+            <a:endParaRPr lang="en-US" sz="1600" dirty="0"/>
+          </a:p>
+        </p:txBody>
       </p:sp>
       <p:sp>
         <p:nvSpPr>
@@ -31621,7 +31610,7 @@
         </p:nvSpPr>
         <p:spPr>
           <a:xfrm>
-            <a:off x="1975104" y="3364992"/>
+            <a:off x="3602736" y="3364992"/>
             <a:ext cx="1554480" cy="475488"/>
           </a:xfrm>
           <a:prstGeom prst="rect">
@@ -31648,7 +31637,7 @@
         </p:nvSpPr>
         <p:spPr>
           <a:xfrm>
-            <a:off x="1975104" y="3364992"/>
+            <a:off x="3602736" y="3364992"/>
             <a:ext cx="1554480" cy="475488"/>
           </a:xfrm>
           <a:prstGeom prst="rect">
@@ -31673,7 +31662,7 @@
                 <a:ea typeface="Trebuchet MS" pitchFamily="34" charset="-122"/>
                 <a:cs typeface="Trebuchet MS" pitchFamily="34" charset="-120"/>
               </a:rPr>
-              <a:t>spec</a:t>
+              <a:t>ro</a:t>
             </a:r>
             <a:endParaRPr lang="en-US" sz="1400" dirty="0"/>
           </a:p>
@@ -31687,7 +31676,7 @@
         </p:nvSpPr>
         <p:spPr>
           <a:xfrm>
-            <a:off x="3529584" y="3364992"/>
+            <a:off x="5157216" y="3364992"/>
             <a:ext cx="73152" cy="475488"/>
           </a:xfrm>
           <a:prstGeom prst="rect">
@@ -31726,7 +31715,7 @@
         </p:nvSpPr>
         <p:spPr>
           <a:xfrm>
-            <a:off x="3602736" y="3364992"/>
+            <a:off x="5230368" y="3364992"/>
             <a:ext cx="1554480" cy="475488"/>
           </a:xfrm>
           <a:prstGeom prst="rect">
@@ -31753,7 +31742,7 @@
         </p:nvSpPr>
         <p:spPr>
           <a:xfrm>
-            <a:off x="3602736" y="3364992"/>
+            <a:off x="5230368" y="3364992"/>
             <a:ext cx="1554480" cy="475488"/>
           </a:xfrm>
           <a:prstGeom prst="rect">
@@ -31778,7 +31767,7 @@
                 <a:ea typeface="Trebuchet MS" pitchFamily="34" charset="-122"/>
                 <a:cs typeface="Trebuchet MS" pitchFamily="34" charset="-120"/>
               </a:rPr>
-              <a:t>tac</a:t>
+              <a:t>spec</a:t>
             </a:r>
             <a:endParaRPr lang="en-US" sz="1400" dirty="0"/>
           </a:p>
@@ -31792,7 +31781,7 @@
         </p:nvSpPr>
         <p:spPr>
           <a:xfrm>
-            <a:off x="5157216" y="3364992"/>
+            <a:off x="6784848" y="3364992"/>
             <a:ext cx="73152" cy="475488"/>
           </a:xfrm>
           <a:prstGeom prst="rect">
@@ -31831,7 +31820,7 @@
         </p:nvSpPr>
         <p:spPr>
           <a:xfrm>
-            <a:off x="5230368" y="3364992"/>
+            <a:off x="6858000" y="3364992"/>
             <a:ext cx="1554480" cy="475488"/>
           </a:xfrm>
           <a:prstGeom prst="rect">
@@ -31858,7 +31847,7 @@
         </p:nvSpPr>
         <p:spPr>
           <a:xfrm>
-            <a:off x="5230368" y="3364992"/>
+            <a:off x="6858000" y="3364992"/>
             <a:ext cx="1554480" cy="475488"/>
           </a:xfrm>
           <a:prstGeom prst="rect">
@@ -31883,7 +31872,7 @@
                 <a:ea typeface="Trebuchet MS" pitchFamily="34" charset="-122"/>
                 <a:cs typeface="Trebuchet MS" pitchFamily="34" charset="-120"/>
               </a:rPr>
-              <a:t>u</a:t>
+              <a:t>tive</a:t>
             </a:r>
             <a:endParaRPr lang="en-US" sz="1400" dirty="0"/>
           </a:p>
@@ -31891,119 +31880,80 @@
       </p:sp>
       <p:sp>
         <p:nvSpPr>
-          <p:cNvPr id="39" name="Text 37"/>
-          <p:cNvSpPr/>
-          <p:nvPr/>
-        </p:nvSpPr>
-        <p:spPr>
-          <a:xfrm>
-            <a:off x="6784848" y="3364992"/>
-            <a:ext cx="73152" cy="475488"/>
-          </a:xfrm>
-          <a:prstGeom prst="rect">
-            <a:avLst/>
-          </a:prstGeom>
-          <a:noFill/>
-          <a:ln/>
-        </p:spPr>
-        <p:txBody>
-          <a:bodyPr wrap="square" lIns="0" tIns="0" rIns="0" bIns="0" rtlCol="0" anchor="ctr"/>
-          <a:lstStyle/>
-          <a:p>
-            <a:pPr algn="ctr" indent="0" marL="0">
-              <a:buNone/>
-            </a:pPr>
-            <a:r>
-              <a:rPr lang="en-US" sz="1600" b="1" dirty="0">
-                <a:solidFill>
-                  <a:srgbClr val="0D9488"/>
+          <p:cNvPr id="39" name="Shape 37"/>
+          <p:cNvSpPr/>
+          <p:nvPr/>
+        </p:nvSpPr>
+        <p:spPr>
+          <a:xfrm>
+            <a:off x="365760" y="4096512"/>
+            <a:ext cx="1371600" cy="804672"/>
+          </a:xfrm>
+          <a:prstGeom prst="rect">
+            <a:avLst>
+              <a:gd name="adj" fmla="val 6818"/>
+            </a:avLst>
+          </a:prstGeom>
+          <a:solidFill>
+            <a:srgbClr val="E2E8F0"/>
+          </a:solidFill>
+          <a:ln w="12700">
+            <a:solidFill>
+              <a:srgbClr val="E2E8F0"/>
+            </a:solidFill>
+            <a:prstDash val="solid"/>
+          </a:ln>
+        </p:spPr>
+      </p:sp>
+      <p:sp>
+        <p:nvSpPr>
+          <p:cNvPr id="40" name="Text 38"/>
+          <p:cNvSpPr/>
+          <p:nvPr/>
+        </p:nvSpPr>
+        <p:spPr>
+          <a:xfrm>
+            <a:off x="365760" y="4096512"/>
+            <a:ext cx="1371600" cy="804672"/>
+          </a:xfrm>
+          <a:prstGeom prst="rect">
+            <a:avLst/>
+          </a:prstGeom>
+          <a:noFill/>
+          <a:ln/>
+        </p:spPr>
+        <p:txBody>
+          <a:bodyPr wrap="square" lIns="0" tIns="0" rIns="0" bIns="0" rtlCol="0" anchor="ctr"/>
+          <a:lstStyle/>
+          <a:p>
+            <a:pPr algn="ctr" indent="0" marL="0">
+              <a:buNone/>
+            </a:pPr>
+            <a:r>
+              <a:rPr lang="en-US" sz="1100" b="1" dirty="0">
+                <a:solidFill>
+                  <a:srgbClr val="475569"/>
                 </a:solidFill>
                 <a:latin typeface="Trebuchet MS" pitchFamily="34" charset="0"/>
                 <a:ea typeface="Trebuchet MS" pitchFamily="34" charset="-122"/>
                 <a:cs typeface="Trebuchet MS" pitchFamily="34" charset="-120"/>
               </a:rPr>
-              <a:t>·</a:t>
-            </a:r>
-            <a:endParaRPr lang="en-US" sz="1600" dirty="0"/>
-          </a:p>
-        </p:txBody>
-      </p:sp>
-      <p:sp>
-        <p:nvSpPr>
-          <p:cNvPr id="40" name="Shape 38"/>
-          <p:cNvSpPr/>
-          <p:nvPr/>
-        </p:nvSpPr>
-        <p:spPr>
-          <a:xfrm>
-            <a:off x="6858000" y="3364992"/>
-            <a:ext cx="1554480" cy="475488"/>
-          </a:xfrm>
-          <a:prstGeom prst="rect">
-            <a:avLst>
-              <a:gd name="adj" fmla="val 9615"/>
-            </a:avLst>
-          </a:prstGeom>
-          <a:solidFill>
-            <a:srgbClr val="FFFFFF"/>
-          </a:solidFill>
-          <a:ln w="12700">
-            <a:solidFill>
-              <a:srgbClr val="0D9488"/>
-            </a:solidFill>
-            <a:prstDash val="solid"/>
-          </a:ln>
-        </p:spPr>
-      </p:sp>
-      <p:sp>
-        <p:nvSpPr>
-          <p:cNvPr id="41" name="Text 39"/>
-          <p:cNvSpPr/>
-          <p:nvPr/>
-        </p:nvSpPr>
-        <p:spPr>
-          <a:xfrm>
-            <a:off x="6858000" y="3364992"/>
-            <a:ext cx="1554480" cy="475488"/>
-          </a:xfrm>
-          <a:prstGeom prst="rect">
-            <a:avLst/>
-          </a:prstGeom>
-          <a:noFill/>
-          <a:ln/>
-        </p:spPr>
-        <p:txBody>
-          <a:bodyPr wrap="square" lIns="0" tIns="0" rIns="0" bIns="0" rtlCol="0" anchor="ctr"/>
-          <a:lstStyle/>
-          <a:p>
-            <a:pPr algn="ctr" indent="0" marL="0">
-              <a:buNone/>
-            </a:pPr>
-            <a:r>
-              <a:rPr lang="en-US" sz="1400" b="1" dirty="0">
-                <a:solidFill>
-                  <a:srgbClr val="0D9488"/>
-                </a:solidFill>
-                <a:latin typeface="Trebuchet MS" pitchFamily="34" charset="0"/>
-                <a:ea typeface="Trebuchet MS" pitchFamily="34" charset="-122"/>
-                <a:cs typeface="Trebuchet MS" pitchFamily="34" charset="-120"/>
-              </a:rPr>
-              <a:t>lar</a:t>
-            </a:r>
-            <a:endParaRPr lang="en-US" sz="1400" dirty="0"/>
-          </a:p>
-        </p:txBody>
-      </p:sp>
-      <p:sp>
-        <p:nvSpPr>
-          <p:cNvPr id="42" name="Shape 40"/>
-          <p:cNvSpPr/>
-          <p:nvPr/>
-        </p:nvSpPr>
-        <p:spPr>
-          <a:xfrm>
-            <a:off x="365760" y="4096512"/>
-            <a:ext cx="1371600" cy="804672"/>
+              <a:t>Phonemes</a:t>
+            </a:r>
+            <a:endParaRPr lang="en-US" sz="1100" dirty="0"/>
+          </a:p>
+        </p:txBody>
+      </p:sp>
+      <p:sp>
+        <p:nvSpPr>
+          <p:cNvPr id="41" name="Shape 39"/>
+          <p:cNvSpPr/>
+          <p:nvPr/>
+        </p:nvSpPr>
+        <p:spPr>
+          <a:xfrm>
+            <a:off x="1874520" y="4096512"/>
+            <a:ext cx="6903720" cy="804672"/>
           </a:xfrm>
           <a:prstGeom prst="rect">
             <a:avLst>
@@ -32011,85 +31961,19 @@
             </a:avLst>
           </a:prstGeom>
           <a:solidFill>
-            <a:srgbClr val="E2E8F0"/>
+            <a:srgbClr val="F8FAFC"/>
           </a:solidFill>
           <a:ln w="12700">
             <a:solidFill>
               <a:srgbClr val="E2E8F0"/>
             </a:solidFill>
-            <a:prstDash val="solid"/>
-          </a:ln>
-        </p:spPr>
-      </p:sp>
-      <p:sp>
-        <p:nvSpPr>
-          <p:cNvPr id="43" name="Text 41"/>
-          <p:cNvSpPr/>
-          <p:nvPr/>
-        </p:nvSpPr>
-        <p:spPr>
-          <a:xfrm>
-            <a:off x="365760" y="4096512"/>
-            <a:ext cx="1371600" cy="804672"/>
-          </a:xfrm>
-          <a:prstGeom prst="rect">
-            <a:avLst/>
-          </a:prstGeom>
-          <a:noFill/>
-          <a:ln/>
-        </p:spPr>
-        <p:txBody>
-          <a:bodyPr wrap="square" lIns="0" tIns="0" rIns="0" bIns="0" rtlCol="0" anchor="ctr"/>
-          <a:lstStyle/>
-          <a:p>
-            <a:pPr algn="ctr" indent="0" marL="0">
-              <a:buNone/>
-            </a:pPr>
-            <a:r>
-              <a:rPr lang="en-US" sz="1100" b="1" dirty="0">
-                <a:solidFill>
-                  <a:srgbClr val="475569"/>
-                </a:solidFill>
-                <a:latin typeface="Trebuchet MS" pitchFamily="34" charset="0"/>
-                <a:ea typeface="Trebuchet MS" pitchFamily="34" charset="-122"/>
-                <a:cs typeface="Trebuchet MS" pitchFamily="34" charset="-120"/>
-              </a:rPr>
-              <a:t>Phonemes</a:t>
-            </a:r>
-            <a:endParaRPr lang="en-US" sz="1100" dirty="0"/>
-          </a:p>
-        </p:txBody>
-      </p:sp>
-      <p:sp>
-        <p:nvSpPr>
-          <p:cNvPr id="44" name="Shape 42"/>
-          <p:cNvSpPr/>
-          <p:nvPr/>
-        </p:nvSpPr>
-        <p:spPr>
-          <a:xfrm>
-            <a:off x="1874520" y="4096512"/>
-            <a:ext cx="6903720" cy="804672"/>
-          </a:xfrm>
-          <a:prstGeom prst="rect">
-            <a:avLst>
-              <a:gd name="adj" fmla="val 6818"/>
-            </a:avLst>
-          </a:prstGeom>
-          <a:solidFill>
-            <a:srgbClr val="F8FAFC"/>
-          </a:solidFill>
-          <a:ln w="12700">
-            <a:solidFill>
-              <a:srgbClr val="E2E8F0"/>
-            </a:solidFill>
             <a:prstDash val="dash"/>
           </a:ln>
         </p:spPr>
       </p:sp>
       <p:sp>
         <p:nvSpPr>
-          <p:cNvPr id="45" name="Text 43"/>
+          <p:cNvPr id="42" name="Text 40"/>
           <p:cNvSpPr/>
           <p:nvPr/>
         </p:nvSpPr>
@@ -32412,7 +32296,7 @@
                 <a:ea typeface="Calibri" pitchFamily="34" charset="-122"/>
                 <a:cs typeface="Calibri" pitchFamily="34" charset="-120"/>
               </a:rPr>
-              <a:t>Word Labs  •  wordlabs.app  •  Root: 'spect' = to look, watch, see</a:t>
+              <a:t>Word Labs  •  wordlabs.app  •  Root: 'spect' = look; watch</a:t>
             </a:r>
             <a:endParaRPr lang="en-US" sz="800" dirty="0"/>
           </a:p>
@@ -32551,7 +32435,7 @@
                 <a:ea typeface="Trebuchet MS" pitchFamily="34" charset="-122"/>
                 <a:cs typeface="Trebuchet MS" pitchFamily="34" charset="-120"/>
               </a:rPr>
-              <a:t>spectacular</a:t>
+              <a:t>retrospective</a:t>
             </a:r>
             <a:endParaRPr lang="en-US" sz="2800" dirty="0"/>
           </a:p>
@@ -32631,8 +32515,8 @@
         </p:nvSpPr>
         <p:spPr>
           <a:xfrm>
-            <a:off x="1989734" y="2258568"/>
-            <a:ext cx="1581912" cy="292608"/>
+            <a:off x="2221992" y="2258568"/>
+            <a:ext cx="1828800" cy="292608"/>
           </a:xfrm>
           <a:prstGeom prst="rect">
             <a:avLst>
@@ -32640,11 +32524,11 @@
             </a:avLst>
           </a:prstGeom>
           <a:solidFill>
-            <a:srgbClr val="CCFBF1"/>
+            <a:srgbClr val="DDD6FE"/>
           </a:solidFill>
           <a:ln w="19050">
             <a:solidFill>
-              <a:srgbClr val="0D9488"/>
+              <a:srgbClr val="7C3AED"/>
             </a:solidFill>
             <a:prstDash val="solid"/>
           </a:ln>
@@ -32665,8 +32549,8 @@
         </p:nvSpPr>
         <p:spPr>
           <a:xfrm>
-            <a:off x="1989734" y="2258568"/>
-            <a:ext cx="1581912" cy="292608"/>
+            <a:off x="2221992" y="2258568"/>
+            <a:ext cx="1828800" cy="292608"/>
           </a:xfrm>
           <a:prstGeom prst="rect">
             <a:avLst/>
@@ -32684,13 +32568,13 @@
             <a:r>
               <a:rPr lang="en-US" sz="1300" b="1" dirty="0">
                 <a:solidFill>
-                  <a:srgbClr val="0F766E"/>
+                  <a:srgbClr val="4C1D95"/>
                 </a:solidFill>
                 <a:latin typeface="Trebuchet MS" pitchFamily="34" charset="0"/>
                 <a:ea typeface="Trebuchet MS" pitchFamily="34" charset="-122"/>
                 <a:cs typeface="Trebuchet MS" pitchFamily="34" charset="-120"/>
               </a:rPr>
-              <a:t>spect</a:t>
+              <a:t>retro</a:t>
             </a:r>
             <a:endParaRPr lang="en-US" sz="1300" dirty="0"/>
           </a:p>
@@ -32704,8 +32588,8 @@
         </p:nvSpPr>
         <p:spPr>
           <a:xfrm>
-            <a:off x="1989734" y="2569464"/>
-            <a:ext cx="1581912" cy="201168"/>
+            <a:off x="2221992" y="2569464"/>
+            <a:ext cx="1828800" cy="201168"/>
           </a:xfrm>
           <a:prstGeom prst="rect">
             <a:avLst/>
@@ -32729,7 +32613,7 @@
                 <a:ea typeface="Calibri" pitchFamily="34" charset="-122"/>
                 <a:cs typeface="Calibri" pitchFamily="34" charset="-120"/>
               </a:rPr>
-              <a:t>to look</a:t>
+              <a:t>backwards; behind</a:t>
             </a:r>
             <a:endParaRPr lang="en-US" sz="850" dirty="0"/>
           </a:p>
@@ -32743,8 +32627,8 @@
         </p:nvSpPr>
         <p:spPr>
           <a:xfrm>
-            <a:off x="3659429" y="2258568"/>
-            <a:ext cx="1581912" cy="292608"/>
+            <a:off x="4370832" y="2258568"/>
+            <a:ext cx="1828800" cy="292608"/>
           </a:xfrm>
           <a:prstGeom prst="rect">
             <a:avLst>
@@ -32752,11 +32636,11 @@
             </a:avLst>
           </a:prstGeom>
           <a:solidFill>
-            <a:srgbClr val="FCE7F3"/>
+            <a:srgbClr val="CCFBF1"/>
           </a:solidFill>
           <a:ln w="19050">
             <a:solidFill>
-              <a:srgbClr val="DB2777"/>
+              <a:srgbClr val="0D9488"/>
             </a:solidFill>
             <a:prstDash val="solid"/>
           </a:ln>
@@ -32777,8 +32661,8 @@
         </p:nvSpPr>
         <p:spPr>
           <a:xfrm>
-            <a:off x="3659429" y="2258568"/>
-            <a:ext cx="1581912" cy="292608"/>
+            <a:off x="4370832" y="2258568"/>
+            <a:ext cx="1828800" cy="292608"/>
           </a:xfrm>
           <a:prstGeom prst="rect">
             <a:avLst/>
@@ -32796,13 +32680,13 @@
             <a:r>
               <a:rPr lang="en-US" sz="1300" b="1" dirty="0">
                 <a:solidFill>
-                  <a:srgbClr val="9D174D"/>
+                  <a:srgbClr val="0F766E"/>
                 </a:solidFill>
                 <a:latin typeface="Trebuchet MS" pitchFamily="34" charset="0"/>
                 <a:ea typeface="Trebuchet MS" pitchFamily="34" charset="-122"/>
                 <a:cs typeface="Trebuchet MS" pitchFamily="34" charset="-120"/>
               </a:rPr>
-              <a:t>ac</a:t>
+              <a:t>spect</a:t>
             </a:r>
             <a:endParaRPr lang="en-US" sz="1300" dirty="0"/>
           </a:p>
@@ -32816,8 +32700,8 @@
         </p:nvSpPr>
         <p:spPr>
           <a:xfrm>
-            <a:off x="3659429" y="2569464"/>
-            <a:ext cx="1581912" cy="201168"/>
+            <a:off x="4370832" y="2569464"/>
+            <a:ext cx="1828800" cy="201168"/>
           </a:xfrm>
           <a:prstGeom prst="rect">
             <a:avLst/>
@@ -32841,7 +32725,7 @@
                 <a:ea typeface="Calibri" pitchFamily="34" charset="-122"/>
                 <a:cs typeface="Calibri" pitchFamily="34" charset="-120"/>
               </a:rPr>
-              <a:t>relating to</a:t>
+              <a:t>look; watch</a:t>
             </a:r>
             <a:endParaRPr lang="en-US" sz="850" dirty="0"/>
           </a:p>
@@ -32855,8 +32739,8 @@
         </p:nvSpPr>
         <p:spPr>
           <a:xfrm>
-            <a:off x="5329123" y="2258568"/>
-            <a:ext cx="1581912" cy="292608"/>
+            <a:off x="6519672" y="2258568"/>
+            <a:ext cx="1828800" cy="292608"/>
           </a:xfrm>
           <a:prstGeom prst="rect">
             <a:avLst>
@@ -32864,11 +32748,11 @@
             </a:avLst>
           </a:prstGeom>
           <a:solidFill>
-            <a:srgbClr val="DDD6FE"/>
+            <a:srgbClr val="FCE7F3"/>
           </a:solidFill>
           <a:ln w="19050">
             <a:solidFill>
-              <a:srgbClr val="7C3AED"/>
+              <a:srgbClr val="DB2777"/>
             </a:solidFill>
             <a:prstDash val="solid"/>
           </a:ln>
@@ -32889,8 +32773,8 @@
         </p:nvSpPr>
         <p:spPr>
           <a:xfrm>
-            <a:off x="5329123" y="2258568"/>
-            <a:ext cx="1581912" cy="292608"/>
+            <a:off x="6519672" y="2258568"/>
+            <a:ext cx="1828800" cy="292608"/>
           </a:xfrm>
           <a:prstGeom prst="rect">
             <a:avLst/>
@@ -32908,13 +32792,13 @@
             <a:r>
               <a:rPr lang="en-US" sz="1300" b="1" dirty="0">
                 <a:solidFill>
-                  <a:srgbClr val="4C1D95"/>
+                  <a:srgbClr val="9D174D"/>
                 </a:solidFill>
                 <a:latin typeface="Trebuchet MS" pitchFamily="34" charset="0"/>
                 <a:ea typeface="Trebuchet MS" pitchFamily="34" charset="-122"/>
                 <a:cs typeface="Trebuchet MS" pitchFamily="34" charset="-120"/>
               </a:rPr>
-              <a:t>ul</a:t>
+              <a:t>ive</a:t>
             </a:r>
             <a:endParaRPr lang="en-US" sz="1300" dirty="0"/>
           </a:p>
@@ -32928,8 +32812,8 @@
         </p:nvSpPr>
         <p:spPr>
           <a:xfrm>
-            <a:off x="5329123" y="2569464"/>
-            <a:ext cx="1581912" cy="201168"/>
+            <a:off x="6519672" y="2569464"/>
+            <a:ext cx="1828800" cy="201168"/>
           </a:xfrm>
           <a:prstGeom prst="rect">
             <a:avLst/>
@@ -32953,7 +32837,7 @@
                 <a:ea typeface="Calibri" pitchFamily="34" charset="-122"/>
                 <a:cs typeface="Calibri" pitchFamily="34" charset="-120"/>
               </a:rPr>
-              <a:t>small, diminutive</a:t>
+              <a:t>having quality of</a:t>
             </a:r>
             <a:endParaRPr lang="en-US" sz="850" dirty="0"/>
           </a:p>
@@ -32967,30 +32851,23 @@
         </p:nvSpPr>
         <p:spPr>
           <a:xfrm>
-            <a:off x="6998818" y="2258568"/>
-            <a:ext cx="1581912" cy="292608"/>
+            <a:off x="365760" y="3273552"/>
+            <a:ext cx="1371600" cy="658368"/>
           </a:xfrm>
           <a:prstGeom prst="rect">
             <a:avLst>
-              <a:gd name="adj" fmla="val 25000"/>
+              <a:gd name="adj" fmla="val 8333"/>
             </a:avLst>
           </a:prstGeom>
           <a:solidFill>
-            <a:srgbClr val="FCE7F3"/>
-          </a:solidFill>
-          <a:ln w="19050">
-            <a:solidFill>
-              <a:srgbClr val="DB2777"/>
-            </a:solidFill>
-            <a:prstDash val="solid"/>
-          </a:ln>
-          <a:effectLst>
-            <a:outerShdw sx="100000" sy="100000" kx="0" ky="0" algn="bl" rotWithShape="0" blurRad="101600" dist="38100" dir="8100000">
-              <a:srgbClr val="000000">
-                <a:alpha val="12000"/>
-              </a:srgbClr>
-            </a:outerShdw>
-          </a:effectLst>
+            <a:srgbClr val="E2E8F0"/>
+          </a:solidFill>
+          <a:ln w="12700">
+            <a:solidFill>
+              <a:srgbClr val="E2E8F0"/>
+            </a:solidFill>
+            <a:prstDash val="solid"/>
+          </a:ln>
         </p:spPr>
       </p:sp>
       <p:sp>
@@ -33001,86 +32878,47 @@
         </p:nvSpPr>
         <p:spPr>
           <a:xfrm>
-            <a:off x="6998818" y="2258568"/>
-            <a:ext cx="1581912" cy="292608"/>
-          </a:xfrm>
-          <a:prstGeom prst="rect">
-            <a:avLst/>
-          </a:prstGeom>
-          <a:noFill/>
-          <a:ln/>
-        </p:spPr>
-        <p:txBody>
-          <a:bodyPr wrap="square" lIns="0" tIns="0" rIns="0" bIns="0" rtlCol="0" anchor="ctr"/>
-          <a:lstStyle/>
-          <a:p>
-            <a:pPr algn="ctr" indent="0" marL="0">
-              <a:buNone/>
-            </a:pPr>
-            <a:r>
-              <a:rPr lang="en-US" sz="1300" b="1" dirty="0">
-                <a:solidFill>
-                  <a:srgbClr val="9D174D"/>
+            <a:off x="365760" y="3273552"/>
+            <a:ext cx="1371600" cy="658368"/>
+          </a:xfrm>
+          <a:prstGeom prst="rect">
+            <a:avLst/>
+          </a:prstGeom>
+          <a:noFill/>
+          <a:ln/>
+        </p:spPr>
+        <p:txBody>
+          <a:bodyPr wrap="square" lIns="0" tIns="0" rIns="0" bIns="0" rtlCol="0" anchor="ctr"/>
+          <a:lstStyle/>
+          <a:p>
+            <a:pPr algn="ctr" indent="0" marL="0">
+              <a:buNone/>
+            </a:pPr>
+            <a:r>
+              <a:rPr lang="en-US" sz="1100" b="1" dirty="0">
+                <a:solidFill>
+                  <a:srgbClr val="475569"/>
                 </a:solidFill>
                 <a:latin typeface="Trebuchet MS" pitchFamily="34" charset="0"/>
                 <a:ea typeface="Trebuchet MS" pitchFamily="34" charset="-122"/>
                 <a:cs typeface="Trebuchet MS" pitchFamily="34" charset="-120"/>
               </a:rPr>
-              <a:t>ar</a:t>
-            </a:r>
-            <a:endParaRPr lang="en-US" sz="1300" dirty="0"/>
-          </a:p>
-        </p:txBody>
-      </p:sp>
-      <p:sp>
-        <p:nvSpPr>
-          <p:cNvPr id="27" name="Text 25"/>
-          <p:cNvSpPr/>
-          <p:nvPr/>
-        </p:nvSpPr>
-        <p:spPr>
-          <a:xfrm>
-            <a:off x="6998818" y="2569464"/>
-            <a:ext cx="1581912" cy="201168"/>
-          </a:xfrm>
-          <a:prstGeom prst="rect">
-            <a:avLst/>
-          </a:prstGeom>
-          <a:noFill/>
-          <a:ln/>
-        </p:spPr>
-        <p:txBody>
-          <a:bodyPr wrap="square" lIns="0" tIns="0" rIns="0" bIns="0" rtlCol="0" anchor="t"/>
-          <a:lstStyle/>
-          <a:p>
-            <a:pPr algn="ctr" indent="0" marL="0">
-              <a:buNone/>
-            </a:pPr>
-            <a:r>
-              <a:rPr lang="en-US" sz="850" dirty="0">
-                <a:solidFill>
-                  <a:srgbClr val="475569"/>
-                </a:solidFill>
-                <a:latin typeface="Calibri" pitchFamily="34" charset="0"/>
-                <a:ea typeface="Calibri" pitchFamily="34" charset="-122"/>
-                <a:cs typeface="Calibri" pitchFamily="34" charset="-120"/>
-              </a:rPr>
-              <a:t>relating to, like</a:t>
-            </a:r>
-            <a:endParaRPr lang="en-US" sz="850" dirty="0"/>
-          </a:p>
-        </p:txBody>
-      </p:sp>
-      <p:sp>
-        <p:nvSpPr>
-          <p:cNvPr id="28" name="Shape 26"/>
-          <p:cNvSpPr/>
-          <p:nvPr/>
-        </p:nvSpPr>
-        <p:spPr>
-          <a:xfrm>
-            <a:off x="365760" y="3273552"/>
-            <a:ext cx="1371600" cy="658368"/>
+              <a:t>Syllables</a:t>
+            </a:r>
+            <a:endParaRPr lang="en-US" sz="1100" dirty="0"/>
+          </a:p>
+        </p:txBody>
+      </p:sp>
+      <p:sp>
+        <p:nvSpPr>
+          <p:cNvPr id="27" name="Shape 25"/>
+          <p:cNvSpPr/>
+          <p:nvPr/>
+        </p:nvSpPr>
+        <p:spPr>
+          <a:xfrm>
+            <a:off x="1874520" y="3273552"/>
+            <a:ext cx="6903720" cy="658368"/>
           </a:xfrm>
           <a:prstGeom prst="rect">
             <a:avLst>
@@ -33088,11 +32926,38 @@
             </a:avLst>
           </a:prstGeom>
           <a:solidFill>
-            <a:srgbClr val="E2E8F0"/>
-          </a:solidFill>
-          <a:ln w="12700">
-            <a:solidFill>
-              <a:srgbClr val="E2E8F0"/>
+            <a:srgbClr val="CCFBF1"/>
+          </a:solidFill>
+          <a:ln w="12700">
+            <a:solidFill>
+              <a:srgbClr val="0D9488"/>
+            </a:solidFill>
+            <a:prstDash val="solid"/>
+          </a:ln>
+        </p:spPr>
+      </p:sp>
+      <p:sp>
+        <p:nvSpPr>
+          <p:cNvPr id="28" name="Shape 26"/>
+          <p:cNvSpPr/>
+          <p:nvPr/>
+        </p:nvSpPr>
+        <p:spPr>
+          <a:xfrm>
+            <a:off x="1975104" y="3364992"/>
+            <a:ext cx="1554480" cy="475488"/>
+          </a:xfrm>
+          <a:prstGeom prst="rect">
+            <a:avLst>
+              <a:gd name="adj" fmla="val 9615"/>
+            </a:avLst>
+          </a:prstGeom>
+          <a:solidFill>
+            <a:srgbClr val="FFFFFF"/>
+          </a:solidFill>
+          <a:ln w="12700">
+            <a:solidFill>
+              <a:srgbClr val="0D9488"/>
             </a:solidFill>
             <a:prstDash val="solid"/>
           </a:ln>
@@ -33106,32 +32971,413 @@
         </p:nvSpPr>
         <p:spPr>
           <a:xfrm>
-            <a:off x="365760" y="3273552"/>
-            <a:ext cx="1371600" cy="658368"/>
-          </a:xfrm>
-          <a:prstGeom prst="rect">
-            <a:avLst/>
-          </a:prstGeom>
-          <a:noFill/>
-          <a:ln/>
-        </p:spPr>
-        <p:txBody>
-          <a:bodyPr wrap="square" lIns="0" tIns="0" rIns="0" bIns="0" rtlCol="0" anchor="ctr"/>
-          <a:lstStyle/>
-          <a:p>
-            <a:pPr algn="ctr" indent="0" marL="0">
-              <a:buNone/>
-            </a:pPr>
-            <a:r>
-              <a:rPr lang="en-US" sz="1100" b="1" dirty="0">
-                <a:solidFill>
-                  <a:srgbClr val="475569"/>
+            <a:off x="1975104" y="3364992"/>
+            <a:ext cx="1554480" cy="475488"/>
+          </a:xfrm>
+          <a:prstGeom prst="rect">
+            <a:avLst/>
+          </a:prstGeom>
+          <a:noFill/>
+          <a:ln/>
+        </p:spPr>
+        <p:txBody>
+          <a:bodyPr wrap="square" lIns="0" tIns="0" rIns="0" bIns="0" rtlCol="0" anchor="ctr"/>
+          <a:lstStyle/>
+          <a:p>
+            <a:pPr algn="ctr" indent="0" marL="0">
+              <a:buNone/>
+            </a:pPr>
+            <a:r>
+              <a:rPr lang="en-US" sz="1400" b="1" dirty="0">
+                <a:solidFill>
+                  <a:srgbClr val="0D9488"/>
                 </a:solidFill>
                 <a:latin typeface="Trebuchet MS" pitchFamily="34" charset="0"/>
                 <a:ea typeface="Trebuchet MS" pitchFamily="34" charset="-122"/>
                 <a:cs typeface="Trebuchet MS" pitchFamily="34" charset="-120"/>
               </a:rPr>
-              <a:t>Syllables</a:t>
+              <a:t>ret</a:t>
+            </a:r>
+            <a:endParaRPr lang="en-US" sz="1400" dirty="0"/>
+          </a:p>
+        </p:txBody>
+      </p:sp>
+      <p:sp>
+        <p:nvSpPr>
+          <p:cNvPr id="30" name="Text 28"/>
+          <p:cNvSpPr/>
+          <p:nvPr/>
+        </p:nvSpPr>
+        <p:spPr>
+          <a:xfrm>
+            <a:off x="3529584" y="3364992"/>
+            <a:ext cx="73152" cy="475488"/>
+          </a:xfrm>
+          <a:prstGeom prst="rect">
+            <a:avLst/>
+          </a:prstGeom>
+          <a:noFill/>
+          <a:ln/>
+        </p:spPr>
+        <p:txBody>
+          <a:bodyPr wrap="square" lIns="0" tIns="0" rIns="0" bIns="0" rtlCol="0" anchor="ctr"/>
+          <a:lstStyle/>
+          <a:p>
+            <a:pPr algn="ctr" indent="0" marL="0">
+              <a:buNone/>
+            </a:pPr>
+            <a:r>
+              <a:rPr lang="en-US" sz="1600" b="1" dirty="0">
+                <a:solidFill>
+                  <a:srgbClr val="0D9488"/>
+                </a:solidFill>
+                <a:latin typeface="Trebuchet MS" pitchFamily="34" charset="0"/>
+                <a:ea typeface="Trebuchet MS" pitchFamily="34" charset="-122"/>
+                <a:cs typeface="Trebuchet MS" pitchFamily="34" charset="-120"/>
+              </a:rPr>
+              <a:t>·</a:t>
+            </a:r>
+            <a:endParaRPr lang="en-US" sz="1600" dirty="0"/>
+          </a:p>
+        </p:txBody>
+      </p:sp>
+      <p:sp>
+        <p:nvSpPr>
+          <p:cNvPr id="31" name="Shape 29"/>
+          <p:cNvSpPr/>
+          <p:nvPr/>
+        </p:nvSpPr>
+        <p:spPr>
+          <a:xfrm>
+            <a:off x="3602736" y="3364992"/>
+            <a:ext cx="1554480" cy="475488"/>
+          </a:xfrm>
+          <a:prstGeom prst="rect">
+            <a:avLst>
+              <a:gd name="adj" fmla="val 9615"/>
+            </a:avLst>
+          </a:prstGeom>
+          <a:solidFill>
+            <a:srgbClr val="FFFFFF"/>
+          </a:solidFill>
+          <a:ln w="12700">
+            <a:solidFill>
+              <a:srgbClr val="0D9488"/>
+            </a:solidFill>
+            <a:prstDash val="solid"/>
+          </a:ln>
+        </p:spPr>
+      </p:sp>
+      <p:sp>
+        <p:nvSpPr>
+          <p:cNvPr id="32" name="Text 30"/>
+          <p:cNvSpPr/>
+          <p:nvPr/>
+        </p:nvSpPr>
+        <p:spPr>
+          <a:xfrm>
+            <a:off x="3602736" y="3364992"/>
+            <a:ext cx="1554480" cy="475488"/>
+          </a:xfrm>
+          <a:prstGeom prst="rect">
+            <a:avLst/>
+          </a:prstGeom>
+          <a:noFill/>
+          <a:ln/>
+        </p:spPr>
+        <p:txBody>
+          <a:bodyPr wrap="square" lIns="0" tIns="0" rIns="0" bIns="0" rtlCol="0" anchor="ctr"/>
+          <a:lstStyle/>
+          <a:p>
+            <a:pPr algn="ctr" indent="0" marL="0">
+              <a:buNone/>
+            </a:pPr>
+            <a:r>
+              <a:rPr lang="en-US" sz="1400" b="1" dirty="0">
+                <a:solidFill>
+                  <a:srgbClr val="0D9488"/>
+                </a:solidFill>
+                <a:latin typeface="Trebuchet MS" pitchFamily="34" charset="0"/>
+                <a:ea typeface="Trebuchet MS" pitchFamily="34" charset="-122"/>
+                <a:cs typeface="Trebuchet MS" pitchFamily="34" charset="-120"/>
+              </a:rPr>
+              <a:t>ro</a:t>
+            </a:r>
+            <a:endParaRPr lang="en-US" sz="1400" dirty="0"/>
+          </a:p>
+        </p:txBody>
+      </p:sp>
+      <p:sp>
+        <p:nvSpPr>
+          <p:cNvPr id="33" name="Text 31"/>
+          <p:cNvSpPr/>
+          <p:nvPr/>
+        </p:nvSpPr>
+        <p:spPr>
+          <a:xfrm>
+            <a:off x="5157216" y="3364992"/>
+            <a:ext cx="73152" cy="475488"/>
+          </a:xfrm>
+          <a:prstGeom prst="rect">
+            <a:avLst/>
+          </a:prstGeom>
+          <a:noFill/>
+          <a:ln/>
+        </p:spPr>
+        <p:txBody>
+          <a:bodyPr wrap="square" lIns="0" tIns="0" rIns="0" bIns="0" rtlCol="0" anchor="ctr"/>
+          <a:lstStyle/>
+          <a:p>
+            <a:pPr algn="ctr" indent="0" marL="0">
+              <a:buNone/>
+            </a:pPr>
+            <a:r>
+              <a:rPr lang="en-US" sz="1600" b="1" dirty="0">
+                <a:solidFill>
+                  <a:srgbClr val="0D9488"/>
+                </a:solidFill>
+                <a:latin typeface="Trebuchet MS" pitchFamily="34" charset="0"/>
+                <a:ea typeface="Trebuchet MS" pitchFamily="34" charset="-122"/>
+                <a:cs typeface="Trebuchet MS" pitchFamily="34" charset="-120"/>
+              </a:rPr>
+              <a:t>·</a:t>
+            </a:r>
+            <a:endParaRPr lang="en-US" sz="1600" dirty="0"/>
+          </a:p>
+        </p:txBody>
+      </p:sp>
+      <p:sp>
+        <p:nvSpPr>
+          <p:cNvPr id="34" name="Shape 32"/>
+          <p:cNvSpPr/>
+          <p:nvPr/>
+        </p:nvSpPr>
+        <p:spPr>
+          <a:xfrm>
+            <a:off x="5230368" y="3364992"/>
+            <a:ext cx="1554480" cy="475488"/>
+          </a:xfrm>
+          <a:prstGeom prst="rect">
+            <a:avLst>
+              <a:gd name="adj" fmla="val 9615"/>
+            </a:avLst>
+          </a:prstGeom>
+          <a:solidFill>
+            <a:srgbClr val="FFFFFF"/>
+          </a:solidFill>
+          <a:ln w="12700">
+            <a:solidFill>
+              <a:srgbClr val="0D9488"/>
+            </a:solidFill>
+            <a:prstDash val="solid"/>
+          </a:ln>
+        </p:spPr>
+      </p:sp>
+      <p:sp>
+        <p:nvSpPr>
+          <p:cNvPr id="35" name="Text 33"/>
+          <p:cNvSpPr/>
+          <p:nvPr/>
+        </p:nvSpPr>
+        <p:spPr>
+          <a:xfrm>
+            <a:off x="5230368" y="3364992"/>
+            <a:ext cx="1554480" cy="475488"/>
+          </a:xfrm>
+          <a:prstGeom prst="rect">
+            <a:avLst/>
+          </a:prstGeom>
+          <a:noFill/>
+          <a:ln/>
+        </p:spPr>
+        <p:txBody>
+          <a:bodyPr wrap="square" lIns="0" tIns="0" rIns="0" bIns="0" rtlCol="0" anchor="ctr"/>
+          <a:lstStyle/>
+          <a:p>
+            <a:pPr algn="ctr" indent="0" marL="0">
+              <a:buNone/>
+            </a:pPr>
+            <a:r>
+              <a:rPr lang="en-US" sz="1400" b="1" dirty="0">
+                <a:solidFill>
+                  <a:srgbClr val="0D9488"/>
+                </a:solidFill>
+                <a:latin typeface="Trebuchet MS" pitchFamily="34" charset="0"/>
+                <a:ea typeface="Trebuchet MS" pitchFamily="34" charset="-122"/>
+                <a:cs typeface="Trebuchet MS" pitchFamily="34" charset="-120"/>
+              </a:rPr>
+              <a:t>spec</a:t>
+            </a:r>
+            <a:endParaRPr lang="en-US" sz="1400" dirty="0"/>
+          </a:p>
+        </p:txBody>
+      </p:sp>
+      <p:sp>
+        <p:nvSpPr>
+          <p:cNvPr id="36" name="Text 34"/>
+          <p:cNvSpPr/>
+          <p:nvPr/>
+        </p:nvSpPr>
+        <p:spPr>
+          <a:xfrm>
+            <a:off x="6784848" y="3364992"/>
+            <a:ext cx="73152" cy="475488"/>
+          </a:xfrm>
+          <a:prstGeom prst="rect">
+            <a:avLst/>
+          </a:prstGeom>
+          <a:noFill/>
+          <a:ln/>
+        </p:spPr>
+        <p:txBody>
+          <a:bodyPr wrap="square" lIns="0" tIns="0" rIns="0" bIns="0" rtlCol="0" anchor="ctr"/>
+          <a:lstStyle/>
+          <a:p>
+            <a:pPr algn="ctr" indent="0" marL="0">
+              <a:buNone/>
+            </a:pPr>
+            <a:r>
+              <a:rPr lang="en-US" sz="1600" b="1" dirty="0">
+                <a:solidFill>
+                  <a:srgbClr val="0D9488"/>
+                </a:solidFill>
+                <a:latin typeface="Trebuchet MS" pitchFamily="34" charset="0"/>
+                <a:ea typeface="Trebuchet MS" pitchFamily="34" charset="-122"/>
+                <a:cs typeface="Trebuchet MS" pitchFamily="34" charset="-120"/>
+              </a:rPr>
+              <a:t>·</a:t>
+            </a:r>
+            <a:endParaRPr lang="en-US" sz="1600" dirty="0"/>
+          </a:p>
+        </p:txBody>
+      </p:sp>
+      <p:sp>
+        <p:nvSpPr>
+          <p:cNvPr id="37" name="Shape 35"/>
+          <p:cNvSpPr/>
+          <p:nvPr/>
+        </p:nvSpPr>
+        <p:spPr>
+          <a:xfrm>
+            <a:off x="6858000" y="3364992"/>
+            <a:ext cx="1554480" cy="475488"/>
+          </a:xfrm>
+          <a:prstGeom prst="rect">
+            <a:avLst>
+              <a:gd name="adj" fmla="val 9615"/>
+            </a:avLst>
+          </a:prstGeom>
+          <a:solidFill>
+            <a:srgbClr val="FFFFFF"/>
+          </a:solidFill>
+          <a:ln w="12700">
+            <a:solidFill>
+              <a:srgbClr val="0D9488"/>
+            </a:solidFill>
+            <a:prstDash val="solid"/>
+          </a:ln>
+        </p:spPr>
+      </p:sp>
+      <p:sp>
+        <p:nvSpPr>
+          <p:cNvPr id="38" name="Text 36"/>
+          <p:cNvSpPr/>
+          <p:nvPr/>
+        </p:nvSpPr>
+        <p:spPr>
+          <a:xfrm>
+            <a:off x="6858000" y="3364992"/>
+            <a:ext cx="1554480" cy="475488"/>
+          </a:xfrm>
+          <a:prstGeom prst="rect">
+            <a:avLst/>
+          </a:prstGeom>
+          <a:noFill/>
+          <a:ln/>
+        </p:spPr>
+        <p:txBody>
+          <a:bodyPr wrap="square" lIns="0" tIns="0" rIns="0" bIns="0" rtlCol="0" anchor="ctr"/>
+          <a:lstStyle/>
+          <a:p>
+            <a:pPr algn="ctr" indent="0" marL="0">
+              <a:buNone/>
+            </a:pPr>
+            <a:r>
+              <a:rPr lang="en-US" sz="1400" b="1" dirty="0">
+                <a:solidFill>
+                  <a:srgbClr val="0D9488"/>
+                </a:solidFill>
+                <a:latin typeface="Trebuchet MS" pitchFamily="34" charset="0"/>
+                <a:ea typeface="Trebuchet MS" pitchFamily="34" charset="-122"/>
+                <a:cs typeface="Trebuchet MS" pitchFamily="34" charset="-120"/>
+              </a:rPr>
+              <a:t>tive</a:t>
+            </a:r>
+            <a:endParaRPr lang="en-US" sz="1400" dirty="0"/>
+          </a:p>
+        </p:txBody>
+      </p:sp>
+      <p:sp>
+        <p:nvSpPr>
+          <p:cNvPr id="39" name="Shape 37"/>
+          <p:cNvSpPr/>
+          <p:nvPr/>
+        </p:nvSpPr>
+        <p:spPr>
+          <a:xfrm>
+            <a:off x="365760" y="4096512"/>
+            <a:ext cx="1371600" cy="804672"/>
+          </a:xfrm>
+          <a:prstGeom prst="rect">
+            <a:avLst>
+              <a:gd name="adj" fmla="val 6818"/>
+            </a:avLst>
+          </a:prstGeom>
+          <a:solidFill>
+            <a:srgbClr val="E2E8F0"/>
+          </a:solidFill>
+          <a:ln w="12700">
+            <a:solidFill>
+              <a:srgbClr val="E2E8F0"/>
+            </a:solidFill>
+            <a:prstDash val="solid"/>
+          </a:ln>
+        </p:spPr>
+      </p:sp>
+      <p:sp>
+        <p:nvSpPr>
+          <p:cNvPr id="40" name="Text 38"/>
+          <p:cNvSpPr/>
+          <p:nvPr/>
+        </p:nvSpPr>
+        <p:spPr>
+          <a:xfrm>
+            <a:off x="365760" y="4096512"/>
+            <a:ext cx="1371600" cy="804672"/>
+          </a:xfrm>
+          <a:prstGeom prst="rect">
+            <a:avLst/>
+          </a:prstGeom>
+          <a:noFill/>
+          <a:ln/>
+        </p:spPr>
+        <p:txBody>
+          <a:bodyPr wrap="square" lIns="0" tIns="0" rIns="0" bIns="0" rtlCol="0" anchor="ctr"/>
+          <a:lstStyle/>
+          <a:p>
+            <a:pPr algn="ctr" indent="0" marL="0">
+              <a:buNone/>
+            </a:pPr>
+            <a:r>
+              <a:rPr lang="en-US" sz="1100" b="1" dirty="0">
+                <a:solidFill>
+                  <a:srgbClr val="475569"/>
+                </a:solidFill>
+                <a:latin typeface="Trebuchet MS" pitchFamily="34" charset="0"/>
+                <a:ea typeface="Trebuchet MS" pitchFamily="34" charset="-122"/>
+                <a:cs typeface="Trebuchet MS" pitchFamily="34" charset="-120"/>
+              </a:rPr>
+              <a:t>Phonemes</a:t>
             </a:r>
             <a:endParaRPr lang="en-US" sz="1100" dirty="0"/>
           </a:p>
@@ -33139,13 +33385,13 @@
       </p:sp>
       <p:sp>
         <p:nvSpPr>
-          <p:cNvPr id="30" name="Shape 28"/>
-          <p:cNvSpPr/>
-          <p:nvPr/>
-        </p:nvSpPr>
-        <p:spPr>
-          <a:xfrm>
-            <a:off x="1874520" y="3273552"/>
+          <p:cNvPr id="41" name="Shape 39"/>
+          <p:cNvSpPr/>
+          <p:nvPr/>
+        </p:nvSpPr>
+        <p:spPr>
+          <a:xfrm>
+            <a:off x="1874520" y="4096512"/>
             <a:ext cx="6903720" cy="658368"/>
           </a:xfrm>
           <a:prstGeom prst="rect">
@@ -33154,30 +33400,30 @@
             </a:avLst>
           </a:prstGeom>
           <a:solidFill>
-            <a:srgbClr val="CCFBF1"/>
-          </a:solidFill>
-          <a:ln w="12700">
-            <a:solidFill>
-              <a:srgbClr val="0D9488"/>
-            </a:solidFill>
-            <a:prstDash val="solid"/>
-          </a:ln>
-        </p:spPr>
-      </p:sp>
-      <p:sp>
-        <p:nvSpPr>
-          <p:cNvPr id="31" name="Shape 29"/>
-          <p:cNvSpPr/>
-          <p:nvPr/>
-        </p:nvSpPr>
-        <p:spPr>
-          <a:xfrm>
-            <a:off x="1975104" y="3364992"/>
-            <a:ext cx="1554480" cy="475488"/>
+            <a:srgbClr val="FCE7F3"/>
+          </a:solidFill>
+          <a:ln w="12700">
+            <a:solidFill>
+              <a:srgbClr val="DB2777"/>
+            </a:solidFill>
+            <a:prstDash val="solid"/>
+          </a:ln>
+        </p:spPr>
+      </p:sp>
+      <p:sp>
+        <p:nvSpPr>
+          <p:cNvPr id="42" name="Shape 40"/>
+          <p:cNvSpPr/>
+          <p:nvPr/>
+        </p:nvSpPr>
+        <p:spPr>
+          <a:xfrm>
+            <a:off x="1952596" y="4169664"/>
+            <a:ext cx="493776" cy="475488"/>
           </a:xfrm>
           <a:prstGeom prst="rect">
             <a:avLst>
-              <a:gd name="adj" fmla="val 9615"/>
+              <a:gd name="adj" fmla="val 7692"/>
             </a:avLst>
           </a:prstGeom>
           <a:solidFill>
@@ -33185,104 +33431,131 @@
           </a:solidFill>
           <a:ln w="12700">
             <a:solidFill>
-              <a:srgbClr val="0D9488"/>
-            </a:solidFill>
-            <a:prstDash val="solid"/>
-          </a:ln>
-        </p:spPr>
-      </p:sp>
-      <p:sp>
-        <p:nvSpPr>
-          <p:cNvPr id="32" name="Text 30"/>
-          <p:cNvSpPr/>
-          <p:nvPr/>
-        </p:nvSpPr>
-        <p:spPr>
-          <a:xfrm>
-            <a:off x="1975104" y="3364992"/>
-            <a:ext cx="1554480" cy="475488"/>
-          </a:xfrm>
-          <a:prstGeom prst="rect">
-            <a:avLst/>
-          </a:prstGeom>
-          <a:noFill/>
-          <a:ln/>
-        </p:spPr>
-        <p:txBody>
-          <a:bodyPr wrap="square" lIns="0" tIns="0" rIns="0" bIns="0" rtlCol="0" anchor="ctr"/>
-          <a:lstStyle/>
-          <a:p>
-            <a:pPr algn="ctr" indent="0" marL="0">
-              <a:buNone/>
-            </a:pPr>
-            <a:r>
-              <a:rPr lang="en-US" sz="1400" b="1" dirty="0">
-                <a:solidFill>
-                  <a:srgbClr val="0D9488"/>
+              <a:srgbClr val="DB2777"/>
+            </a:solidFill>
+            <a:prstDash val="solid"/>
+          </a:ln>
+        </p:spPr>
+      </p:sp>
+      <p:sp>
+        <p:nvSpPr>
+          <p:cNvPr id="43" name="Text 41"/>
+          <p:cNvSpPr/>
+          <p:nvPr/>
+        </p:nvSpPr>
+        <p:spPr>
+          <a:xfrm>
+            <a:off x="1952596" y="4169664"/>
+            <a:ext cx="493776" cy="475488"/>
+          </a:xfrm>
+          <a:prstGeom prst="rect">
+            <a:avLst/>
+          </a:prstGeom>
+          <a:noFill/>
+          <a:ln/>
+        </p:spPr>
+        <p:txBody>
+          <a:bodyPr wrap="square" lIns="0" tIns="0" rIns="0" bIns="0" rtlCol="0" anchor="ctr"/>
+          <a:lstStyle/>
+          <a:p>
+            <a:pPr algn="ctr" indent="0" marL="0">
+              <a:buNone/>
+            </a:pPr>
+            <a:r>
+              <a:rPr lang="en-US" sz="900" b="1" dirty="0">
+                <a:solidFill>
+                  <a:srgbClr val="9D174D"/>
                 </a:solidFill>
                 <a:latin typeface="Trebuchet MS" pitchFamily="34" charset="0"/>
                 <a:ea typeface="Trebuchet MS" pitchFamily="34" charset="-122"/>
                 <a:cs typeface="Trebuchet MS" pitchFamily="34" charset="-120"/>
               </a:rPr>
-              <a:t>spec</a:t>
-            </a:r>
-            <a:endParaRPr lang="en-US" sz="1400" dirty="0"/>
-          </a:p>
-        </p:txBody>
-      </p:sp>
-      <p:sp>
-        <p:nvSpPr>
-          <p:cNvPr id="33" name="Text 31"/>
-          <p:cNvSpPr/>
-          <p:nvPr/>
-        </p:nvSpPr>
-        <p:spPr>
-          <a:xfrm>
-            <a:off x="3529584" y="3364992"/>
-            <a:ext cx="73152" cy="475488"/>
-          </a:xfrm>
-          <a:prstGeom prst="rect">
-            <a:avLst/>
-          </a:prstGeom>
-          <a:noFill/>
-          <a:ln/>
-        </p:spPr>
-        <p:txBody>
-          <a:bodyPr wrap="square" lIns="0" tIns="0" rIns="0" bIns="0" rtlCol="0" anchor="ctr"/>
-          <a:lstStyle/>
-          <a:p>
-            <a:pPr algn="ctr" indent="0" marL="0">
-              <a:buNone/>
-            </a:pPr>
-            <a:r>
-              <a:rPr lang="en-US" sz="1600" b="1" dirty="0">
-                <a:solidFill>
-                  <a:srgbClr val="0D9488"/>
+              <a:t>r</a:t>
+            </a:r>
+            <a:endParaRPr lang="en-US" sz="900" dirty="0"/>
+          </a:p>
+        </p:txBody>
+      </p:sp>
+      <p:sp>
+        <p:nvSpPr>
+          <p:cNvPr id="44" name="Shape 42"/>
+          <p:cNvSpPr/>
+          <p:nvPr/>
+        </p:nvSpPr>
+        <p:spPr>
+          <a:xfrm>
+            <a:off x="2497015" y="4169664"/>
+            <a:ext cx="493776" cy="475488"/>
+          </a:xfrm>
+          <a:prstGeom prst="rect">
+            <a:avLst>
+              <a:gd name="adj" fmla="val 7692"/>
+            </a:avLst>
+          </a:prstGeom>
+          <a:solidFill>
+            <a:srgbClr val="FFFFFF"/>
+          </a:solidFill>
+          <a:ln w="12700">
+            <a:solidFill>
+              <a:srgbClr val="DB2777"/>
+            </a:solidFill>
+            <a:prstDash val="solid"/>
+          </a:ln>
+        </p:spPr>
+      </p:sp>
+      <p:sp>
+        <p:nvSpPr>
+          <p:cNvPr id="45" name="Text 43"/>
+          <p:cNvSpPr/>
+          <p:nvPr/>
+        </p:nvSpPr>
+        <p:spPr>
+          <a:xfrm>
+            <a:off x="2497015" y="4169664"/>
+            <a:ext cx="493776" cy="475488"/>
+          </a:xfrm>
+          <a:prstGeom prst="rect">
+            <a:avLst/>
+          </a:prstGeom>
+          <a:noFill/>
+          <a:ln/>
+        </p:spPr>
+        <p:txBody>
+          <a:bodyPr wrap="square" lIns="0" tIns="0" rIns="0" bIns="0" rtlCol="0" anchor="ctr"/>
+          <a:lstStyle/>
+          <a:p>
+            <a:pPr algn="ctr" indent="0" marL="0">
+              <a:buNone/>
+            </a:pPr>
+            <a:r>
+              <a:rPr lang="en-US" sz="900" b="1" dirty="0">
+                <a:solidFill>
+                  <a:srgbClr val="9D174D"/>
                 </a:solidFill>
                 <a:latin typeface="Trebuchet MS" pitchFamily="34" charset="0"/>
                 <a:ea typeface="Trebuchet MS" pitchFamily="34" charset="-122"/>
                 <a:cs typeface="Trebuchet MS" pitchFamily="34" charset="-120"/>
               </a:rPr>
-              <a:t>·</a:t>
-            </a:r>
-            <a:endParaRPr lang="en-US" sz="1600" dirty="0"/>
-          </a:p>
-        </p:txBody>
-      </p:sp>
-      <p:sp>
-        <p:nvSpPr>
-          <p:cNvPr id="34" name="Shape 32"/>
-          <p:cNvSpPr/>
-          <p:nvPr/>
-        </p:nvSpPr>
-        <p:spPr>
-          <a:xfrm>
-            <a:off x="3602736" y="3364992"/>
-            <a:ext cx="1554480" cy="475488"/>
+              <a:t>e</a:t>
+            </a:r>
+            <a:endParaRPr lang="en-US" sz="900" dirty="0"/>
+          </a:p>
+        </p:txBody>
+      </p:sp>
+      <p:sp>
+        <p:nvSpPr>
+          <p:cNvPr id="46" name="Shape 44"/>
+          <p:cNvSpPr/>
+          <p:nvPr/>
+        </p:nvSpPr>
+        <p:spPr>
+          <a:xfrm>
+            <a:off x="3041435" y="4169664"/>
+            <a:ext cx="493776" cy="475488"/>
           </a:xfrm>
           <a:prstGeom prst="rect">
             <a:avLst>
-              <a:gd name="adj" fmla="val 9615"/>
+              <a:gd name="adj" fmla="val 7692"/>
             </a:avLst>
           </a:prstGeom>
           <a:solidFill>
@@ -33290,104 +33563,131 @@
           </a:solidFill>
           <a:ln w="12700">
             <a:solidFill>
-              <a:srgbClr val="0D9488"/>
-            </a:solidFill>
-            <a:prstDash val="solid"/>
-          </a:ln>
-        </p:spPr>
-      </p:sp>
-      <p:sp>
-        <p:nvSpPr>
-          <p:cNvPr id="35" name="Text 33"/>
-          <p:cNvSpPr/>
-          <p:nvPr/>
-        </p:nvSpPr>
-        <p:spPr>
-          <a:xfrm>
-            <a:off x="3602736" y="3364992"/>
-            <a:ext cx="1554480" cy="475488"/>
-          </a:xfrm>
-          <a:prstGeom prst="rect">
-            <a:avLst/>
-          </a:prstGeom>
-          <a:noFill/>
-          <a:ln/>
-        </p:spPr>
-        <p:txBody>
-          <a:bodyPr wrap="square" lIns="0" tIns="0" rIns="0" bIns="0" rtlCol="0" anchor="ctr"/>
-          <a:lstStyle/>
-          <a:p>
-            <a:pPr algn="ctr" indent="0" marL="0">
-              <a:buNone/>
-            </a:pPr>
-            <a:r>
-              <a:rPr lang="en-US" sz="1400" b="1" dirty="0">
-                <a:solidFill>
-                  <a:srgbClr val="0D9488"/>
+              <a:srgbClr val="DB2777"/>
+            </a:solidFill>
+            <a:prstDash val="solid"/>
+          </a:ln>
+        </p:spPr>
+      </p:sp>
+      <p:sp>
+        <p:nvSpPr>
+          <p:cNvPr id="47" name="Text 45"/>
+          <p:cNvSpPr/>
+          <p:nvPr/>
+        </p:nvSpPr>
+        <p:spPr>
+          <a:xfrm>
+            <a:off x="3041435" y="4169664"/>
+            <a:ext cx="493776" cy="475488"/>
+          </a:xfrm>
+          <a:prstGeom prst="rect">
+            <a:avLst/>
+          </a:prstGeom>
+          <a:noFill/>
+          <a:ln/>
+        </p:spPr>
+        <p:txBody>
+          <a:bodyPr wrap="square" lIns="0" tIns="0" rIns="0" bIns="0" rtlCol="0" anchor="ctr"/>
+          <a:lstStyle/>
+          <a:p>
+            <a:pPr algn="ctr" indent="0" marL="0">
+              <a:buNone/>
+            </a:pPr>
+            <a:r>
+              <a:rPr lang="en-US" sz="900" b="1" dirty="0">
+                <a:solidFill>
+                  <a:srgbClr val="9D174D"/>
                 </a:solidFill>
                 <a:latin typeface="Trebuchet MS" pitchFamily="34" charset="0"/>
                 <a:ea typeface="Trebuchet MS" pitchFamily="34" charset="-122"/>
                 <a:cs typeface="Trebuchet MS" pitchFamily="34" charset="-120"/>
               </a:rPr>
-              <a:t>tac</a:t>
-            </a:r>
-            <a:endParaRPr lang="en-US" sz="1400" dirty="0"/>
-          </a:p>
-        </p:txBody>
-      </p:sp>
-      <p:sp>
-        <p:nvSpPr>
-          <p:cNvPr id="36" name="Text 34"/>
-          <p:cNvSpPr/>
-          <p:nvPr/>
-        </p:nvSpPr>
-        <p:spPr>
-          <a:xfrm>
-            <a:off x="5157216" y="3364992"/>
-            <a:ext cx="73152" cy="475488"/>
-          </a:xfrm>
-          <a:prstGeom prst="rect">
-            <a:avLst/>
-          </a:prstGeom>
-          <a:noFill/>
-          <a:ln/>
-        </p:spPr>
-        <p:txBody>
-          <a:bodyPr wrap="square" lIns="0" tIns="0" rIns="0" bIns="0" rtlCol="0" anchor="ctr"/>
-          <a:lstStyle/>
-          <a:p>
-            <a:pPr algn="ctr" indent="0" marL="0">
-              <a:buNone/>
-            </a:pPr>
-            <a:r>
-              <a:rPr lang="en-US" sz="1600" b="1" dirty="0">
-                <a:solidFill>
-                  <a:srgbClr val="0D9488"/>
+              <a:t>t</a:t>
+            </a:r>
+            <a:endParaRPr lang="en-US" sz="900" dirty="0"/>
+          </a:p>
+        </p:txBody>
+      </p:sp>
+      <p:sp>
+        <p:nvSpPr>
+          <p:cNvPr id="48" name="Shape 46"/>
+          <p:cNvSpPr/>
+          <p:nvPr/>
+        </p:nvSpPr>
+        <p:spPr>
+          <a:xfrm>
+            <a:off x="3585855" y="4169664"/>
+            <a:ext cx="493776" cy="475488"/>
+          </a:xfrm>
+          <a:prstGeom prst="rect">
+            <a:avLst>
+              <a:gd name="adj" fmla="val 7692"/>
+            </a:avLst>
+          </a:prstGeom>
+          <a:solidFill>
+            <a:srgbClr val="FFFFFF"/>
+          </a:solidFill>
+          <a:ln w="12700">
+            <a:solidFill>
+              <a:srgbClr val="DB2777"/>
+            </a:solidFill>
+            <a:prstDash val="solid"/>
+          </a:ln>
+        </p:spPr>
+      </p:sp>
+      <p:sp>
+        <p:nvSpPr>
+          <p:cNvPr id="49" name="Text 47"/>
+          <p:cNvSpPr/>
+          <p:nvPr/>
+        </p:nvSpPr>
+        <p:spPr>
+          <a:xfrm>
+            <a:off x="3585855" y="4169664"/>
+            <a:ext cx="493776" cy="475488"/>
+          </a:xfrm>
+          <a:prstGeom prst="rect">
+            <a:avLst/>
+          </a:prstGeom>
+          <a:noFill/>
+          <a:ln/>
+        </p:spPr>
+        <p:txBody>
+          <a:bodyPr wrap="square" lIns="0" tIns="0" rIns="0" bIns="0" rtlCol="0" anchor="ctr"/>
+          <a:lstStyle/>
+          <a:p>
+            <a:pPr algn="ctr" indent="0" marL="0">
+              <a:buNone/>
+            </a:pPr>
+            <a:r>
+              <a:rPr lang="en-US" sz="900" b="1" dirty="0">
+                <a:solidFill>
+                  <a:srgbClr val="9D174D"/>
                 </a:solidFill>
                 <a:latin typeface="Trebuchet MS" pitchFamily="34" charset="0"/>
                 <a:ea typeface="Trebuchet MS" pitchFamily="34" charset="-122"/>
                 <a:cs typeface="Trebuchet MS" pitchFamily="34" charset="-120"/>
               </a:rPr>
-              <a:t>·</a:t>
-            </a:r>
-            <a:endParaRPr lang="en-US" sz="1600" dirty="0"/>
-          </a:p>
-        </p:txBody>
-      </p:sp>
-      <p:sp>
-        <p:nvSpPr>
-          <p:cNvPr id="37" name="Shape 35"/>
-          <p:cNvSpPr/>
-          <p:nvPr/>
-        </p:nvSpPr>
-        <p:spPr>
-          <a:xfrm>
-            <a:off x="5230368" y="3364992"/>
-            <a:ext cx="1554480" cy="475488"/>
+              <a:t>r</a:t>
+            </a:r>
+            <a:endParaRPr lang="en-US" sz="900" dirty="0"/>
+          </a:p>
+        </p:txBody>
+      </p:sp>
+      <p:sp>
+        <p:nvSpPr>
+          <p:cNvPr id="50" name="Shape 48"/>
+          <p:cNvSpPr/>
+          <p:nvPr/>
+        </p:nvSpPr>
+        <p:spPr>
+          <a:xfrm>
+            <a:off x="4130274" y="4169664"/>
+            <a:ext cx="493776" cy="475488"/>
           </a:xfrm>
           <a:prstGeom prst="rect">
             <a:avLst>
-              <a:gd name="adj" fmla="val 9615"/>
+              <a:gd name="adj" fmla="val 7692"/>
             </a:avLst>
           </a:prstGeom>
           <a:solidFill>
@@ -33395,104 +33695,131 @@
           </a:solidFill>
           <a:ln w="12700">
             <a:solidFill>
-              <a:srgbClr val="0D9488"/>
-            </a:solidFill>
-            <a:prstDash val="solid"/>
-          </a:ln>
-        </p:spPr>
-      </p:sp>
-      <p:sp>
-        <p:nvSpPr>
-          <p:cNvPr id="38" name="Text 36"/>
-          <p:cNvSpPr/>
-          <p:nvPr/>
-        </p:nvSpPr>
-        <p:spPr>
-          <a:xfrm>
-            <a:off x="5230368" y="3364992"/>
-            <a:ext cx="1554480" cy="475488"/>
-          </a:xfrm>
-          <a:prstGeom prst="rect">
-            <a:avLst/>
-          </a:prstGeom>
-          <a:noFill/>
-          <a:ln/>
-        </p:spPr>
-        <p:txBody>
-          <a:bodyPr wrap="square" lIns="0" tIns="0" rIns="0" bIns="0" rtlCol="0" anchor="ctr"/>
-          <a:lstStyle/>
-          <a:p>
-            <a:pPr algn="ctr" indent="0" marL="0">
-              <a:buNone/>
-            </a:pPr>
-            <a:r>
-              <a:rPr lang="en-US" sz="1400" b="1" dirty="0">
-                <a:solidFill>
-                  <a:srgbClr val="0D9488"/>
+              <a:srgbClr val="DB2777"/>
+            </a:solidFill>
+            <a:prstDash val="solid"/>
+          </a:ln>
+        </p:spPr>
+      </p:sp>
+      <p:sp>
+        <p:nvSpPr>
+          <p:cNvPr id="51" name="Text 49"/>
+          <p:cNvSpPr/>
+          <p:nvPr/>
+        </p:nvSpPr>
+        <p:spPr>
+          <a:xfrm>
+            <a:off x="4130274" y="4169664"/>
+            <a:ext cx="493776" cy="475488"/>
+          </a:xfrm>
+          <a:prstGeom prst="rect">
+            <a:avLst/>
+          </a:prstGeom>
+          <a:noFill/>
+          <a:ln/>
+        </p:spPr>
+        <p:txBody>
+          <a:bodyPr wrap="square" lIns="0" tIns="0" rIns="0" bIns="0" rtlCol="0" anchor="ctr"/>
+          <a:lstStyle/>
+          <a:p>
+            <a:pPr algn="ctr" indent="0" marL="0">
+              <a:buNone/>
+            </a:pPr>
+            <a:r>
+              <a:rPr lang="en-US" sz="900" b="1" dirty="0">
+                <a:solidFill>
+                  <a:srgbClr val="9D174D"/>
                 </a:solidFill>
                 <a:latin typeface="Trebuchet MS" pitchFamily="34" charset="0"/>
                 <a:ea typeface="Trebuchet MS" pitchFamily="34" charset="-122"/>
                 <a:cs typeface="Trebuchet MS" pitchFamily="34" charset="-120"/>
               </a:rPr>
-              <a:t>u</a:t>
-            </a:r>
-            <a:endParaRPr lang="en-US" sz="1400" dirty="0"/>
-          </a:p>
-        </p:txBody>
-      </p:sp>
-      <p:sp>
-        <p:nvSpPr>
-          <p:cNvPr id="39" name="Text 37"/>
-          <p:cNvSpPr/>
-          <p:nvPr/>
-        </p:nvSpPr>
-        <p:spPr>
-          <a:xfrm>
-            <a:off x="6784848" y="3364992"/>
-            <a:ext cx="73152" cy="475488"/>
-          </a:xfrm>
-          <a:prstGeom prst="rect">
-            <a:avLst/>
-          </a:prstGeom>
-          <a:noFill/>
-          <a:ln/>
-        </p:spPr>
-        <p:txBody>
-          <a:bodyPr wrap="square" lIns="0" tIns="0" rIns="0" bIns="0" rtlCol="0" anchor="ctr"/>
-          <a:lstStyle/>
-          <a:p>
-            <a:pPr algn="ctr" indent="0" marL="0">
-              <a:buNone/>
-            </a:pPr>
-            <a:r>
-              <a:rPr lang="en-US" sz="1600" b="1" dirty="0">
-                <a:solidFill>
-                  <a:srgbClr val="0D9488"/>
+              <a:t>o</a:t>
+            </a:r>
+            <a:endParaRPr lang="en-US" sz="900" dirty="0"/>
+          </a:p>
+        </p:txBody>
+      </p:sp>
+      <p:sp>
+        <p:nvSpPr>
+          <p:cNvPr id="52" name="Shape 50"/>
+          <p:cNvSpPr/>
+          <p:nvPr/>
+        </p:nvSpPr>
+        <p:spPr>
+          <a:xfrm>
+            <a:off x="4674694" y="4169664"/>
+            <a:ext cx="493776" cy="475488"/>
+          </a:xfrm>
+          <a:prstGeom prst="rect">
+            <a:avLst>
+              <a:gd name="adj" fmla="val 7692"/>
+            </a:avLst>
+          </a:prstGeom>
+          <a:solidFill>
+            <a:srgbClr val="FFFFFF"/>
+          </a:solidFill>
+          <a:ln w="12700">
+            <a:solidFill>
+              <a:srgbClr val="DB2777"/>
+            </a:solidFill>
+            <a:prstDash val="solid"/>
+          </a:ln>
+        </p:spPr>
+      </p:sp>
+      <p:sp>
+        <p:nvSpPr>
+          <p:cNvPr id="53" name="Text 51"/>
+          <p:cNvSpPr/>
+          <p:nvPr/>
+        </p:nvSpPr>
+        <p:spPr>
+          <a:xfrm>
+            <a:off x="4674694" y="4169664"/>
+            <a:ext cx="493776" cy="475488"/>
+          </a:xfrm>
+          <a:prstGeom prst="rect">
+            <a:avLst/>
+          </a:prstGeom>
+          <a:noFill/>
+          <a:ln/>
+        </p:spPr>
+        <p:txBody>
+          <a:bodyPr wrap="square" lIns="0" tIns="0" rIns="0" bIns="0" rtlCol="0" anchor="ctr"/>
+          <a:lstStyle/>
+          <a:p>
+            <a:pPr algn="ctr" indent="0" marL="0">
+              <a:buNone/>
+            </a:pPr>
+            <a:r>
+              <a:rPr lang="en-US" sz="900" b="1" dirty="0">
+                <a:solidFill>
+                  <a:srgbClr val="9D174D"/>
                 </a:solidFill>
                 <a:latin typeface="Trebuchet MS" pitchFamily="34" charset="0"/>
                 <a:ea typeface="Trebuchet MS" pitchFamily="34" charset="-122"/>
                 <a:cs typeface="Trebuchet MS" pitchFamily="34" charset="-120"/>
               </a:rPr>
-              <a:t>·</a:t>
-            </a:r>
-            <a:endParaRPr lang="en-US" sz="1600" dirty="0"/>
-          </a:p>
-        </p:txBody>
-      </p:sp>
-      <p:sp>
-        <p:nvSpPr>
-          <p:cNvPr id="40" name="Shape 38"/>
-          <p:cNvSpPr/>
-          <p:nvPr/>
-        </p:nvSpPr>
-        <p:spPr>
-          <a:xfrm>
-            <a:off x="6858000" y="3364992"/>
-            <a:ext cx="1554480" cy="475488"/>
+              <a:t>s</a:t>
+            </a:r>
+            <a:endParaRPr lang="en-US" sz="900" dirty="0"/>
+          </a:p>
+        </p:txBody>
+      </p:sp>
+      <p:sp>
+        <p:nvSpPr>
+          <p:cNvPr id="54" name="Shape 52"/>
+          <p:cNvSpPr/>
+          <p:nvPr/>
+        </p:nvSpPr>
+        <p:spPr>
+          <a:xfrm>
+            <a:off x="5219114" y="4169664"/>
+            <a:ext cx="493776" cy="475488"/>
           </a:xfrm>
           <a:prstGeom prst="rect">
             <a:avLst>
-              <a:gd name="adj" fmla="val 9615"/>
+              <a:gd name="adj" fmla="val 7692"/>
             </a:avLst>
           </a:prstGeom>
           <a:solidFill>
@@ -33500,135 +33827,135 @@
           </a:solidFill>
           <a:ln w="12700">
             <a:solidFill>
-              <a:srgbClr val="0D9488"/>
-            </a:solidFill>
-            <a:prstDash val="solid"/>
-          </a:ln>
-        </p:spPr>
-      </p:sp>
-      <p:sp>
-        <p:nvSpPr>
-          <p:cNvPr id="41" name="Text 39"/>
-          <p:cNvSpPr/>
-          <p:nvPr/>
-        </p:nvSpPr>
-        <p:spPr>
-          <a:xfrm>
-            <a:off x="6858000" y="3364992"/>
-            <a:ext cx="1554480" cy="475488"/>
-          </a:xfrm>
-          <a:prstGeom prst="rect">
-            <a:avLst/>
-          </a:prstGeom>
-          <a:noFill/>
-          <a:ln/>
-        </p:spPr>
-        <p:txBody>
-          <a:bodyPr wrap="square" lIns="0" tIns="0" rIns="0" bIns="0" rtlCol="0" anchor="ctr"/>
-          <a:lstStyle/>
-          <a:p>
-            <a:pPr algn="ctr" indent="0" marL="0">
-              <a:buNone/>
-            </a:pPr>
-            <a:r>
-              <a:rPr lang="en-US" sz="1400" b="1" dirty="0">
-                <a:solidFill>
-                  <a:srgbClr val="0D9488"/>
+              <a:srgbClr val="DB2777"/>
+            </a:solidFill>
+            <a:prstDash val="solid"/>
+          </a:ln>
+        </p:spPr>
+      </p:sp>
+      <p:sp>
+        <p:nvSpPr>
+          <p:cNvPr id="55" name="Text 53"/>
+          <p:cNvSpPr/>
+          <p:nvPr/>
+        </p:nvSpPr>
+        <p:spPr>
+          <a:xfrm>
+            <a:off x="5219114" y="4169664"/>
+            <a:ext cx="493776" cy="475488"/>
+          </a:xfrm>
+          <a:prstGeom prst="rect">
+            <a:avLst/>
+          </a:prstGeom>
+          <a:noFill/>
+          <a:ln/>
+        </p:spPr>
+        <p:txBody>
+          <a:bodyPr wrap="square" lIns="0" tIns="0" rIns="0" bIns="0" rtlCol="0" anchor="ctr"/>
+          <a:lstStyle/>
+          <a:p>
+            <a:pPr algn="ctr" indent="0" marL="0">
+              <a:buNone/>
+            </a:pPr>
+            <a:r>
+              <a:rPr lang="en-US" sz="900" b="1" dirty="0">
+                <a:solidFill>
+                  <a:srgbClr val="9D174D"/>
                 </a:solidFill>
                 <a:latin typeface="Trebuchet MS" pitchFamily="34" charset="0"/>
                 <a:ea typeface="Trebuchet MS" pitchFamily="34" charset="-122"/>
                 <a:cs typeface="Trebuchet MS" pitchFamily="34" charset="-120"/>
               </a:rPr>
-              <a:t>lar</a:t>
-            </a:r>
-            <a:endParaRPr lang="en-US" sz="1400" dirty="0"/>
-          </a:p>
-        </p:txBody>
-      </p:sp>
-      <p:sp>
-        <p:nvSpPr>
-          <p:cNvPr id="42" name="Shape 40"/>
-          <p:cNvSpPr/>
-          <p:nvPr/>
-        </p:nvSpPr>
-        <p:spPr>
-          <a:xfrm>
-            <a:off x="365760" y="4096512"/>
-            <a:ext cx="1371600" cy="804672"/>
+              <a:t>p</a:t>
+            </a:r>
+            <a:endParaRPr lang="en-US" sz="900" dirty="0"/>
+          </a:p>
+        </p:txBody>
+      </p:sp>
+      <p:sp>
+        <p:nvSpPr>
+          <p:cNvPr id="56" name="Shape 54"/>
+          <p:cNvSpPr/>
+          <p:nvPr/>
+        </p:nvSpPr>
+        <p:spPr>
+          <a:xfrm>
+            <a:off x="5763534" y="4169664"/>
+            <a:ext cx="493776" cy="475488"/>
           </a:xfrm>
           <a:prstGeom prst="rect">
             <a:avLst>
-              <a:gd name="adj" fmla="val 6818"/>
+              <a:gd name="adj" fmla="val 7692"/>
             </a:avLst>
           </a:prstGeom>
           <a:solidFill>
-            <a:srgbClr val="E2E8F0"/>
-          </a:solidFill>
-          <a:ln w="12700">
-            <a:solidFill>
-              <a:srgbClr val="E2E8F0"/>
-            </a:solidFill>
-            <a:prstDash val="solid"/>
-          </a:ln>
-        </p:spPr>
-      </p:sp>
-      <p:sp>
-        <p:nvSpPr>
-          <p:cNvPr id="43" name="Text 41"/>
-          <p:cNvSpPr/>
-          <p:nvPr/>
-        </p:nvSpPr>
-        <p:spPr>
-          <a:xfrm>
-            <a:off x="365760" y="4096512"/>
-            <a:ext cx="1371600" cy="804672"/>
-          </a:xfrm>
-          <a:prstGeom prst="rect">
-            <a:avLst/>
-          </a:prstGeom>
-          <a:noFill/>
-          <a:ln/>
-        </p:spPr>
-        <p:txBody>
-          <a:bodyPr wrap="square" lIns="0" tIns="0" rIns="0" bIns="0" rtlCol="0" anchor="ctr"/>
-          <a:lstStyle/>
-          <a:p>
-            <a:pPr algn="ctr" indent="0" marL="0">
-              <a:buNone/>
-            </a:pPr>
-            <a:r>
-              <a:rPr lang="en-US" sz="1100" b="1" dirty="0">
-                <a:solidFill>
-                  <a:srgbClr val="475569"/>
+            <a:srgbClr val="FFFFFF"/>
+          </a:solidFill>
+          <a:ln w="12700">
+            <a:solidFill>
+              <a:srgbClr val="DB2777"/>
+            </a:solidFill>
+            <a:prstDash val="solid"/>
+          </a:ln>
+        </p:spPr>
+      </p:sp>
+      <p:sp>
+        <p:nvSpPr>
+          <p:cNvPr id="57" name="Text 55"/>
+          <p:cNvSpPr/>
+          <p:nvPr/>
+        </p:nvSpPr>
+        <p:spPr>
+          <a:xfrm>
+            <a:off x="5763534" y="4169664"/>
+            <a:ext cx="493776" cy="475488"/>
+          </a:xfrm>
+          <a:prstGeom prst="rect">
+            <a:avLst/>
+          </a:prstGeom>
+          <a:noFill/>
+          <a:ln/>
+        </p:spPr>
+        <p:txBody>
+          <a:bodyPr wrap="square" lIns="0" tIns="0" rIns="0" bIns="0" rtlCol="0" anchor="ctr"/>
+          <a:lstStyle/>
+          <a:p>
+            <a:pPr algn="ctr" indent="0" marL="0">
+              <a:buNone/>
+            </a:pPr>
+            <a:r>
+              <a:rPr lang="en-US" sz="900" b="1" dirty="0">
+                <a:solidFill>
+                  <a:srgbClr val="9D174D"/>
                 </a:solidFill>
                 <a:latin typeface="Trebuchet MS" pitchFamily="34" charset="0"/>
                 <a:ea typeface="Trebuchet MS" pitchFamily="34" charset="-122"/>
                 <a:cs typeface="Trebuchet MS" pitchFamily="34" charset="-120"/>
               </a:rPr>
-              <a:t>Phonemes</a:t>
-            </a:r>
-            <a:endParaRPr lang="en-US" sz="1100" dirty="0"/>
-          </a:p>
-        </p:txBody>
-      </p:sp>
-      <p:sp>
-        <p:nvSpPr>
-          <p:cNvPr id="44" name="Shape 42"/>
-          <p:cNvSpPr/>
-          <p:nvPr/>
-        </p:nvSpPr>
-        <p:spPr>
-          <a:xfrm>
-            <a:off x="1874520" y="4096512"/>
-            <a:ext cx="6903720" cy="804672"/>
+              <a:t>e</a:t>
+            </a:r>
+            <a:endParaRPr lang="en-US" sz="900" dirty="0"/>
+          </a:p>
+        </p:txBody>
+      </p:sp>
+      <p:sp>
+        <p:nvSpPr>
+          <p:cNvPr id="58" name="Shape 56"/>
+          <p:cNvSpPr/>
+          <p:nvPr/>
+        </p:nvSpPr>
+        <p:spPr>
+          <a:xfrm>
+            <a:off x="6307953" y="4169664"/>
+            <a:ext cx="493776" cy="475488"/>
           </a:xfrm>
           <a:prstGeom prst="rect">
             <a:avLst>
-              <a:gd name="adj" fmla="val 6818"/>
+              <a:gd name="adj" fmla="val 7692"/>
             </a:avLst>
           </a:prstGeom>
           <a:solidFill>
-            <a:srgbClr val="FCE7F3"/>
+            <a:srgbClr val="FFFFFF"/>
           </a:solidFill>
           <a:ln w="12700">
             <a:solidFill>
@@ -33640,41 +33967,14 @@
       </p:sp>
       <p:sp>
         <p:nvSpPr>
-          <p:cNvPr id="45" name="Shape 43"/>
-          <p:cNvSpPr/>
-          <p:nvPr/>
-        </p:nvSpPr>
-        <p:spPr>
-          <a:xfrm>
-            <a:off x="1951828" y="4169664"/>
-            <a:ext cx="603504" cy="384048"/>
-          </a:xfrm>
-          <a:prstGeom prst="rect">
-            <a:avLst>
-              <a:gd name="adj" fmla="val 9524"/>
-            </a:avLst>
-          </a:prstGeom>
-          <a:solidFill>
-            <a:srgbClr val="FFFFFF"/>
-          </a:solidFill>
-          <a:ln w="12700">
-            <a:solidFill>
-              <a:srgbClr val="DB2777"/>
-            </a:solidFill>
-            <a:prstDash val="solid"/>
-          </a:ln>
-        </p:spPr>
-      </p:sp>
-      <p:sp>
-        <p:nvSpPr>
-          <p:cNvPr id="46" name="Text 44"/>
-          <p:cNvSpPr/>
-          <p:nvPr/>
-        </p:nvSpPr>
-        <p:spPr>
-          <a:xfrm>
-            <a:off x="1951828" y="4169664"/>
-            <a:ext cx="603504" cy="384048"/>
+          <p:cNvPr id="59" name="Text 57"/>
+          <p:cNvSpPr/>
+          <p:nvPr/>
+        </p:nvSpPr>
+        <p:spPr>
+          <a:xfrm>
+            <a:off x="6307953" y="4169664"/>
+            <a:ext cx="493776" cy="475488"/>
           </a:xfrm>
           <a:prstGeom prst="rect">
             <a:avLst/>
@@ -33698,7 +33998,7 @@
                 <a:ea typeface="Trebuchet MS" pitchFamily="34" charset="-122"/>
                 <a:cs typeface="Trebuchet MS" pitchFamily="34" charset="-120"/>
               </a:rPr>
-              <a:t>s</a:t>
+              <a:t>c</a:t>
             </a:r>
             <a:endParaRPr lang="en-US" sz="900" dirty="0"/>
           </a:p>
@@ -33706,18 +34006,18 @@
       </p:sp>
       <p:sp>
         <p:nvSpPr>
-          <p:cNvPr id="47" name="Shape 45"/>
-          <p:cNvSpPr/>
-          <p:nvPr/>
-        </p:nvSpPr>
-        <p:spPr>
-          <a:xfrm>
-            <a:off x="2605209" y="4169664"/>
-            <a:ext cx="603504" cy="384048"/>
+          <p:cNvPr id="60" name="Shape 58"/>
+          <p:cNvSpPr/>
+          <p:nvPr/>
+        </p:nvSpPr>
+        <p:spPr>
+          <a:xfrm>
+            <a:off x="6852373" y="4169664"/>
+            <a:ext cx="493776" cy="475488"/>
           </a:xfrm>
           <a:prstGeom prst="rect">
             <a:avLst>
-              <a:gd name="adj" fmla="val 9524"/>
+              <a:gd name="adj" fmla="val 7692"/>
             </a:avLst>
           </a:prstGeom>
           <a:solidFill>
@@ -33733,14 +34033,14 @@
       </p:sp>
       <p:sp>
         <p:nvSpPr>
-          <p:cNvPr id="48" name="Text 46"/>
-          <p:cNvSpPr/>
-          <p:nvPr/>
-        </p:nvSpPr>
-        <p:spPr>
-          <a:xfrm>
-            <a:off x="2605209" y="4169664"/>
-            <a:ext cx="603504" cy="384048"/>
+          <p:cNvPr id="61" name="Text 59"/>
+          <p:cNvSpPr/>
+          <p:nvPr/>
+        </p:nvSpPr>
+        <p:spPr>
+          <a:xfrm>
+            <a:off x="6852373" y="4169664"/>
+            <a:ext cx="493776" cy="475488"/>
           </a:xfrm>
           <a:prstGeom prst="rect">
             <a:avLst/>
@@ -33764,7 +34064,7 @@
                 <a:ea typeface="Trebuchet MS" pitchFamily="34" charset="-122"/>
                 <a:cs typeface="Trebuchet MS" pitchFamily="34" charset="-120"/>
               </a:rPr>
-              <a:t>p</a:t>
+              <a:t>t</a:t>
             </a:r>
             <a:endParaRPr lang="en-US" sz="900" dirty="0"/>
           </a:p>
@@ -33772,18 +34072,18 @@
       </p:sp>
       <p:sp>
         <p:nvSpPr>
-          <p:cNvPr id="49" name="Shape 47"/>
-          <p:cNvSpPr/>
-          <p:nvPr/>
-        </p:nvSpPr>
-        <p:spPr>
-          <a:xfrm>
-            <a:off x="3258589" y="4169664"/>
-            <a:ext cx="603504" cy="384048"/>
+          <p:cNvPr id="62" name="Shape 60"/>
+          <p:cNvSpPr/>
+          <p:nvPr/>
+        </p:nvSpPr>
+        <p:spPr>
+          <a:xfrm>
+            <a:off x="7396793" y="4169664"/>
+            <a:ext cx="493776" cy="475488"/>
           </a:xfrm>
           <a:prstGeom prst="rect">
             <a:avLst>
-              <a:gd name="adj" fmla="val 9524"/>
+              <a:gd name="adj" fmla="val 7692"/>
             </a:avLst>
           </a:prstGeom>
           <a:solidFill>
@@ -33799,14 +34099,14 @@
       </p:sp>
       <p:sp>
         <p:nvSpPr>
-          <p:cNvPr id="50" name="Text 48"/>
-          <p:cNvSpPr/>
-          <p:nvPr/>
-        </p:nvSpPr>
-        <p:spPr>
-          <a:xfrm>
-            <a:off x="3258589" y="4169664"/>
-            <a:ext cx="603504" cy="384048"/>
+          <p:cNvPr id="63" name="Text 61"/>
+          <p:cNvSpPr/>
+          <p:nvPr/>
+        </p:nvSpPr>
+        <p:spPr>
+          <a:xfrm>
+            <a:off x="7396793" y="4169664"/>
+            <a:ext cx="493776" cy="475488"/>
           </a:xfrm>
           <a:prstGeom prst="rect">
             <a:avLst/>
@@ -33830,7 +34130,7 @@
                 <a:ea typeface="Trebuchet MS" pitchFamily="34" charset="-122"/>
                 <a:cs typeface="Trebuchet MS" pitchFamily="34" charset="-120"/>
               </a:rPr>
-              <a:t>e</a:t>
+              <a:t>i_e</a:t>
             </a:r>
             <a:endParaRPr lang="en-US" sz="900" dirty="0"/>
           </a:p>
@@ -33838,18 +34138,18 @@
       </p:sp>
       <p:sp>
         <p:nvSpPr>
-          <p:cNvPr id="51" name="Shape 49"/>
-          <p:cNvSpPr/>
-          <p:nvPr/>
-        </p:nvSpPr>
-        <p:spPr>
-          <a:xfrm>
-            <a:off x="3911969" y="4169664"/>
-            <a:ext cx="603504" cy="384048"/>
+          <p:cNvPr id="64" name="Shape 62"/>
+          <p:cNvSpPr/>
+          <p:nvPr/>
+        </p:nvSpPr>
+        <p:spPr>
+          <a:xfrm>
+            <a:off x="7941212" y="4169664"/>
+            <a:ext cx="493776" cy="475488"/>
           </a:xfrm>
           <a:prstGeom prst="rect">
             <a:avLst>
-              <a:gd name="adj" fmla="val 9524"/>
+              <a:gd name="adj" fmla="val 7692"/>
             </a:avLst>
           </a:prstGeom>
           <a:solidFill>
@@ -33865,14 +34165,14 @@
       </p:sp>
       <p:sp>
         <p:nvSpPr>
-          <p:cNvPr id="52" name="Text 50"/>
-          <p:cNvSpPr/>
-          <p:nvPr/>
-        </p:nvSpPr>
-        <p:spPr>
-          <a:xfrm>
-            <a:off x="3911969" y="4169664"/>
-            <a:ext cx="603504" cy="384048"/>
+          <p:cNvPr id="65" name="Text 63"/>
+          <p:cNvSpPr/>
+          <p:nvPr/>
+        </p:nvSpPr>
+        <p:spPr>
+          <a:xfrm>
+            <a:off x="7941212" y="4169664"/>
+            <a:ext cx="493776" cy="475488"/>
           </a:xfrm>
           <a:prstGeom prst="rect">
             <a:avLst/>
@@ -33896,481 +34196,7 @@
                 <a:ea typeface="Trebuchet MS" pitchFamily="34" charset="-122"/>
                 <a:cs typeface="Trebuchet MS" pitchFamily="34" charset="-120"/>
               </a:rPr>
-              <a:t>c</a:t>
-            </a:r>
-            <a:endParaRPr lang="en-US" sz="900" dirty="0"/>
-          </a:p>
-        </p:txBody>
-      </p:sp>
-      <p:sp>
-        <p:nvSpPr>
-          <p:cNvPr id="53" name="Text 51"/>
-          <p:cNvSpPr/>
-          <p:nvPr/>
-        </p:nvSpPr>
-        <p:spPr>
-          <a:xfrm>
-            <a:off x="3911969" y="4572000"/>
-            <a:ext cx="603504" cy="219456"/>
-          </a:xfrm>
-          <a:prstGeom prst="rect">
-            <a:avLst/>
-          </a:prstGeom>
-          <a:noFill/>
-          <a:ln/>
-        </p:spPr>
-        <p:txBody>
-          <a:bodyPr wrap="square" lIns="0" tIns="0" rIns="0" bIns="0" rtlCol="0" anchor="t"/>
-          <a:lstStyle/>
-          <a:p>
-            <a:pPr algn="ctr" indent="0" marL="0">
-              <a:buNone/>
-            </a:pPr>
-            <a:r>
-              <a:rPr lang="en-US" sz="750" i="1" dirty="0">
-                <a:solidFill>
-                  <a:srgbClr val="94A3B8"/>
-                </a:solidFill>
-                <a:latin typeface="Calibri" pitchFamily="34" charset="0"/>
-                <a:ea typeface="Calibri" pitchFamily="34" charset="-122"/>
-                <a:cs typeface="Calibri" pitchFamily="34" charset="-120"/>
-              </a:rPr>
-              <a:t>/k/</a:t>
-            </a:r>
-            <a:endParaRPr lang="en-US" sz="750" dirty="0"/>
-          </a:p>
-        </p:txBody>
-      </p:sp>
-      <p:sp>
-        <p:nvSpPr>
-          <p:cNvPr id="54" name="Shape 52"/>
-          <p:cNvSpPr/>
-          <p:nvPr/>
-        </p:nvSpPr>
-        <p:spPr>
-          <a:xfrm>
-            <a:off x="4565350" y="4169664"/>
-            <a:ext cx="603504" cy="384048"/>
-          </a:xfrm>
-          <a:prstGeom prst="rect">
-            <a:avLst>
-              <a:gd name="adj" fmla="val 9524"/>
-            </a:avLst>
-          </a:prstGeom>
-          <a:solidFill>
-            <a:srgbClr val="FFFFFF"/>
-          </a:solidFill>
-          <a:ln w="12700">
-            <a:solidFill>
-              <a:srgbClr val="DB2777"/>
-            </a:solidFill>
-            <a:prstDash val="solid"/>
-          </a:ln>
-        </p:spPr>
-      </p:sp>
-      <p:sp>
-        <p:nvSpPr>
-          <p:cNvPr id="55" name="Text 53"/>
-          <p:cNvSpPr/>
-          <p:nvPr/>
-        </p:nvSpPr>
-        <p:spPr>
-          <a:xfrm>
-            <a:off x="4565350" y="4169664"/>
-            <a:ext cx="603504" cy="384048"/>
-          </a:xfrm>
-          <a:prstGeom prst="rect">
-            <a:avLst/>
-          </a:prstGeom>
-          <a:noFill/>
-          <a:ln/>
-        </p:spPr>
-        <p:txBody>
-          <a:bodyPr wrap="square" lIns="0" tIns="0" rIns="0" bIns="0" rtlCol="0" anchor="ctr"/>
-          <a:lstStyle/>
-          <a:p>
-            <a:pPr algn="ctr" indent="0" marL="0">
-              <a:buNone/>
-            </a:pPr>
-            <a:r>
-              <a:rPr lang="en-US" sz="900" b="1" dirty="0">
-                <a:solidFill>
-                  <a:srgbClr val="9D174D"/>
-                </a:solidFill>
-                <a:latin typeface="Trebuchet MS" pitchFamily="34" charset="0"/>
-                <a:ea typeface="Trebuchet MS" pitchFamily="34" charset="-122"/>
-                <a:cs typeface="Trebuchet MS" pitchFamily="34" charset="-120"/>
-              </a:rPr>
-              <a:t>t</a:t>
-            </a:r>
-            <a:endParaRPr lang="en-US" sz="900" dirty="0"/>
-          </a:p>
-        </p:txBody>
-      </p:sp>
-      <p:sp>
-        <p:nvSpPr>
-          <p:cNvPr id="56" name="Shape 54"/>
-          <p:cNvSpPr/>
-          <p:nvPr/>
-        </p:nvSpPr>
-        <p:spPr>
-          <a:xfrm>
-            <a:off x="5218730" y="4169664"/>
-            <a:ext cx="603504" cy="384048"/>
-          </a:xfrm>
-          <a:prstGeom prst="rect">
-            <a:avLst>
-              <a:gd name="adj" fmla="val 9524"/>
-            </a:avLst>
-          </a:prstGeom>
-          <a:solidFill>
-            <a:srgbClr val="FFFFFF"/>
-          </a:solidFill>
-          <a:ln w="12700">
-            <a:solidFill>
-              <a:srgbClr val="DB2777"/>
-            </a:solidFill>
-            <a:prstDash val="solid"/>
-          </a:ln>
-        </p:spPr>
-      </p:sp>
-      <p:sp>
-        <p:nvSpPr>
-          <p:cNvPr id="57" name="Text 55"/>
-          <p:cNvSpPr/>
-          <p:nvPr/>
-        </p:nvSpPr>
-        <p:spPr>
-          <a:xfrm>
-            <a:off x="5218730" y="4169664"/>
-            <a:ext cx="603504" cy="384048"/>
-          </a:xfrm>
-          <a:prstGeom prst="rect">
-            <a:avLst/>
-          </a:prstGeom>
-          <a:noFill/>
-          <a:ln/>
-        </p:spPr>
-        <p:txBody>
-          <a:bodyPr wrap="square" lIns="0" tIns="0" rIns="0" bIns="0" rtlCol="0" anchor="ctr"/>
-          <a:lstStyle/>
-          <a:p>
-            <a:pPr algn="ctr" indent="0" marL="0">
-              <a:buNone/>
-            </a:pPr>
-            <a:r>
-              <a:rPr lang="en-US" sz="900" b="1" dirty="0">
-                <a:solidFill>
-                  <a:srgbClr val="9D174D"/>
-                </a:solidFill>
-                <a:latin typeface="Trebuchet MS" pitchFamily="34" charset="0"/>
-                <a:ea typeface="Trebuchet MS" pitchFamily="34" charset="-122"/>
-                <a:cs typeface="Trebuchet MS" pitchFamily="34" charset="-120"/>
-              </a:rPr>
-              <a:t>a</a:t>
-            </a:r>
-            <a:endParaRPr lang="en-US" sz="900" dirty="0"/>
-          </a:p>
-        </p:txBody>
-      </p:sp>
-      <p:sp>
-        <p:nvSpPr>
-          <p:cNvPr id="58" name="Shape 56"/>
-          <p:cNvSpPr/>
-          <p:nvPr/>
-        </p:nvSpPr>
-        <p:spPr>
-          <a:xfrm>
-            <a:off x="5872111" y="4169664"/>
-            <a:ext cx="603504" cy="384048"/>
-          </a:xfrm>
-          <a:prstGeom prst="rect">
-            <a:avLst>
-              <a:gd name="adj" fmla="val 9524"/>
-            </a:avLst>
-          </a:prstGeom>
-          <a:solidFill>
-            <a:srgbClr val="FFFFFF"/>
-          </a:solidFill>
-          <a:ln w="12700">
-            <a:solidFill>
-              <a:srgbClr val="DB2777"/>
-            </a:solidFill>
-            <a:prstDash val="solid"/>
-          </a:ln>
-        </p:spPr>
-      </p:sp>
-      <p:sp>
-        <p:nvSpPr>
-          <p:cNvPr id="59" name="Text 57"/>
-          <p:cNvSpPr/>
-          <p:nvPr/>
-        </p:nvSpPr>
-        <p:spPr>
-          <a:xfrm>
-            <a:off x="5872111" y="4169664"/>
-            <a:ext cx="603504" cy="384048"/>
-          </a:xfrm>
-          <a:prstGeom prst="rect">
-            <a:avLst/>
-          </a:prstGeom>
-          <a:noFill/>
-          <a:ln/>
-        </p:spPr>
-        <p:txBody>
-          <a:bodyPr wrap="square" lIns="0" tIns="0" rIns="0" bIns="0" rtlCol="0" anchor="ctr"/>
-          <a:lstStyle/>
-          <a:p>
-            <a:pPr algn="ctr" indent="0" marL="0">
-              <a:buNone/>
-            </a:pPr>
-            <a:r>
-              <a:rPr lang="en-US" sz="900" b="1" dirty="0">
-                <a:solidFill>
-                  <a:srgbClr val="9D174D"/>
-                </a:solidFill>
-                <a:latin typeface="Trebuchet MS" pitchFamily="34" charset="0"/>
-                <a:ea typeface="Trebuchet MS" pitchFamily="34" charset="-122"/>
-                <a:cs typeface="Trebuchet MS" pitchFamily="34" charset="-120"/>
-              </a:rPr>
-              <a:t>c</a:t>
-            </a:r>
-            <a:endParaRPr lang="en-US" sz="900" dirty="0"/>
-          </a:p>
-        </p:txBody>
-      </p:sp>
-      <p:sp>
-        <p:nvSpPr>
-          <p:cNvPr id="60" name="Text 58"/>
-          <p:cNvSpPr/>
-          <p:nvPr/>
-        </p:nvSpPr>
-        <p:spPr>
-          <a:xfrm>
-            <a:off x="5872111" y="4572000"/>
-            <a:ext cx="603504" cy="219456"/>
-          </a:xfrm>
-          <a:prstGeom prst="rect">
-            <a:avLst/>
-          </a:prstGeom>
-          <a:noFill/>
-          <a:ln/>
-        </p:spPr>
-        <p:txBody>
-          <a:bodyPr wrap="square" lIns="0" tIns="0" rIns="0" bIns="0" rtlCol="0" anchor="t"/>
-          <a:lstStyle/>
-          <a:p>
-            <a:pPr algn="ctr" indent="0" marL="0">
-              <a:buNone/>
-            </a:pPr>
-            <a:r>
-              <a:rPr lang="en-US" sz="750" i="1" dirty="0">
-                <a:solidFill>
-                  <a:srgbClr val="94A3B8"/>
-                </a:solidFill>
-                <a:latin typeface="Calibri" pitchFamily="34" charset="0"/>
-                <a:ea typeface="Calibri" pitchFamily="34" charset="-122"/>
-                <a:cs typeface="Calibri" pitchFamily="34" charset="-120"/>
-              </a:rPr>
-              <a:t>/k/</a:t>
-            </a:r>
-            <a:endParaRPr lang="en-US" sz="750" dirty="0"/>
-          </a:p>
-        </p:txBody>
-      </p:sp>
-      <p:sp>
-        <p:nvSpPr>
-          <p:cNvPr id="61" name="Shape 59"/>
-          <p:cNvSpPr/>
-          <p:nvPr/>
-        </p:nvSpPr>
-        <p:spPr>
-          <a:xfrm>
-            <a:off x="6525491" y="4169664"/>
-            <a:ext cx="603504" cy="384048"/>
-          </a:xfrm>
-          <a:prstGeom prst="rect">
-            <a:avLst>
-              <a:gd name="adj" fmla="val 9524"/>
-            </a:avLst>
-          </a:prstGeom>
-          <a:solidFill>
-            <a:srgbClr val="FFFFFF"/>
-          </a:solidFill>
-          <a:ln w="12700">
-            <a:solidFill>
-              <a:srgbClr val="DB2777"/>
-            </a:solidFill>
-            <a:prstDash val="solid"/>
-          </a:ln>
-        </p:spPr>
-      </p:sp>
-      <p:sp>
-        <p:nvSpPr>
-          <p:cNvPr id="62" name="Text 60"/>
-          <p:cNvSpPr/>
-          <p:nvPr/>
-        </p:nvSpPr>
-        <p:spPr>
-          <a:xfrm>
-            <a:off x="6525491" y="4169664"/>
-            <a:ext cx="603504" cy="384048"/>
-          </a:xfrm>
-          <a:prstGeom prst="rect">
-            <a:avLst/>
-          </a:prstGeom>
-          <a:noFill/>
-          <a:ln/>
-        </p:spPr>
-        <p:txBody>
-          <a:bodyPr wrap="square" lIns="0" tIns="0" rIns="0" bIns="0" rtlCol="0" anchor="ctr"/>
-          <a:lstStyle/>
-          <a:p>
-            <a:pPr algn="ctr" indent="0" marL="0">
-              <a:buNone/>
-            </a:pPr>
-            <a:r>
-              <a:rPr lang="en-US" sz="900" b="1" dirty="0">
-                <a:solidFill>
-                  <a:srgbClr val="9D174D"/>
-                </a:solidFill>
-                <a:latin typeface="Trebuchet MS" pitchFamily="34" charset="0"/>
-                <a:ea typeface="Trebuchet MS" pitchFamily="34" charset="-122"/>
-                <a:cs typeface="Trebuchet MS" pitchFamily="34" charset="-120"/>
-              </a:rPr>
-              <a:t>u</a:t>
-            </a:r>
-            <a:endParaRPr lang="en-US" sz="900" dirty="0"/>
-          </a:p>
-        </p:txBody>
-      </p:sp>
-      <p:sp>
-        <p:nvSpPr>
-          <p:cNvPr id="63" name="Shape 61"/>
-          <p:cNvSpPr/>
-          <p:nvPr/>
-        </p:nvSpPr>
-        <p:spPr>
-          <a:xfrm>
-            <a:off x="7178871" y="4169664"/>
-            <a:ext cx="603504" cy="384048"/>
-          </a:xfrm>
-          <a:prstGeom prst="rect">
-            <a:avLst>
-              <a:gd name="adj" fmla="val 9524"/>
-            </a:avLst>
-          </a:prstGeom>
-          <a:solidFill>
-            <a:srgbClr val="FFFFFF"/>
-          </a:solidFill>
-          <a:ln w="12700">
-            <a:solidFill>
-              <a:srgbClr val="DB2777"/>
-            </a:solidFill>
-            <a:prstDash val="solid"/>
-          </a:ln>
-        </p:spPr>
-      </p:sp>
-      <p:sp>
-        <p:nvSpPr>
-          <p:cNvPr id="64" name="Text 62"/>
-          <p:cNvSpPr/>
-          <p:nvPr/>
-        </p:nvSpPr>
-        <p:spPr>
-          <a:xfrm>
-            <a:off x="7178871" y="4169664"/>
-            <a:ext cx="603504" cy="384048"/>
-          </a:xfrm>
-          <a:prstGeom prst="rect">
-            <a:avLst/>
-          </a:prstGeom>
-          <a:noFill/>
-          <a:ln/>
-        </p:spPr>
-        <p:txBody>
-          <a:bodyPr wrap="square" lIns="0" tIns="0" rIns="0" bIns="0" rtlCol="0" anchor="ctr"/>
-          <a:lstStyle/>
-          <a:p>
-            <a:pPr algn="ctr" indent="0" marL="0">
-              <a:buNone/>
-            </a:pPr>
-            <a:r>
-              <a:rPr lang="en-US" sz="900" b="1" dirty="0">
-                <a:solidFill>
-                  <a:srgbClr val="9D174D"/>
-                </a:solidFill>
-                <a:latin typeface="Trebuchet MS" pitchFamily="34" charset="0"/>
-                <a:ea typeface="Trebuchet MS" pitchFamily="34" charset="-122"/>
-                <a:cs typeface="Trebuchet MS" pitchFamily="34" charset="-120"/>
-              </a:rPr>
-              <a:t>l</a:t>
-            </a:r>
-            <a:endParaRPr lang="en-US" sz="900" dirty="0"/>
-          </a:p>
-        </p:txBody>
-      </p:sp>
-      <p:sp>
-        <p:nvSpPr>
-          <p:cNvPr id="65" name="Shape 63"/>
-          <p:cNvSpPr/>
-          <p:nvPr/>
-        </p:nvSpPr>
-        <p:spPr>
-          <a:xfrm>
-            <a:off x="7832252" y="4169664"/>
-            <a:ext cx="603504" cy="384048"/>
-          </a:xfrm>
-          <a:prstGeom prst="rect">
-            <a:avLst>
-              <a:gd name="adj" fmla="val 9524"/>
-            </a:avLst>
-          </a:prstGeom>
-          <a:solidFill>
-            <a:srgbClr val="FFFFFF"/>
-          </a:solidFill>
-          <a:ln w="12700">
-            <a:solidFill>
-              <a:srgbClr val="DB2777"/>
-            </a:solidFill>
-            <a:prstDash val="solid"/>
-          </a:ln>
-        </p:spPr>
-      </p:sp>
-      <p:sp>
-        <p:nvSpPr>
-          <p:cNvPr id="66" name="Text 64"/>
-          <p:cNvSpPr/>
-          <p:nvPr/>
-        </p:nvSpPr>
-        <p:spPr>
-          <a:xfrm>
-            <a:off x="7832252" y="4169664"/>
-            <a:ext cx="603504" cy="384048"/>
-          </a:xfrm>
-          <a:prstGeom prst="rect">
-            <a:avLst/>
-          </a:prstGeom>
-          <a:noFill/>
-          <a:ln/>
-        </p:spPr>
-        <p:txBody>
-          <a:bodyPr wrap="square" lIns="0" tIns="0" rIns="0" bIns="0" rtlCol="0" anchor="ctr"/>
-          <a:lstStyle/>
-          <a:p>
-            <a:pPr algn="ctr" indent="0" marL="0">
-              <a:buNone/>
-            </a:pPr>
-            <a:r>
-              <a:rPr lang="en-US" sz="900" b="1" dirty="0">
-                <a:solidFill>
-                  <a:srgbClr val="9D174D"/>
-                </a:solidFill>
-                <a:latin typeface="Trebuchet MS" pitchFamily="34" charset="0"/>
-                <a:ea typeface="Trebuchet MS" pitchFamily="34" charset="-122"/>
-                <a:cs typeface="Trebuchet MS" pitchFamily="34" charset="-120"/>
-              </a:rPr>
-              <a:t>ar</a:t>
+              <a:t>v</a:t>
             </a:r>
             <a:endParaRPr lang="en-US" sz="900" dirty="0"/>
           </a:p>
@@ -34662,7 +34488,7 @@
                 <a:ea typeface="Calibri" pitchFamily="34" charset="-122"/>
                 <a:cs typeface="Calibri" pitchFamily="34" charset="-120"/>
               </a:rPr>
-              <a:t>Word Labs  •  wordlabs.app  •  Root: 'spect' = to look, watch, see</a:t>
+              <a:t>Word Labs  •  wordlabs.app  •  Root: 'spect' = look; watch</a:t>
             </a:r>
             <a:endParaRPr lang="en-US" sz="800" dirty="0"/>
           </a:p>
@@ -35831,7 +35657,7 @@
                 <a:ea typeface="Calibri" pitchFamily="34" charset="-122"/>
                 <a:cs typeface="Calibri" pitchFamily="34" charset="-120"/>
               </a:rPr>
-              <a:t>Word Labs  •  wordlabs.app  •  Root: 'spect' = to look, watch, see</a:t>
+              <a:t>Word Labs  •  wordlabs.app  •  Root: 'spect' = look; watch</a:t>
             </a:r>
             <a:endParaRPr lang="en-US" sz="800" dirty="0"/>
           </a:p>
@@ -36132,7 +35958,7 @@
                 <a:ea typeface="Trebuchet MS" pitchFamily="34" charset="-122"/>
                 <a:cs typeface="Trebuchet MS" pitchFamily="34" charset="-120"/>
               </a:rPr>
-              <a:t>in-</a:t>
+              <a:t>a-</a:t>
             </a:r>
             <a:endParaRPr lang="en-US" sz="1300" dirty="0"/>
           </a:p>
@@ -36260,7 +36086,7 @@
                 <a:ea typeface="Trebuchet MS" pitchFamily="34" charset="-122"/>
                 <a:cs typeface="Trebuchet MS" pitchFamily="34" charset="-120"/>
               </a:rPr>
-              <a:t>-or</a:t>
+              <a:t>-s</a:t>
             </a:r>
             <a:endParaRPr lang="en-US" sz="1300" dirty="0"/>
           </a:p>
@@ -36324,7 +36150,7 @@
                 <a:ea typeface="Trebuchet MS" pitchFamily="34" charset="-122"/>
                 <a:cs typeface="Trebuchet MS" pitchFamily="34" charset="-120"/>
               </a:rPr>
-              <a:t>re-</a:t>
+              <a:t>circum-</a:t>
             </a:r>
             <a:endParaRPr lang="en-US" sz="1300" dirty="0"/>
           </a:p>
@@ -36413,7 +36239,7 @@
                 <a:ea typeface="Trebuchet MS" pitchFamily="34" charset="-122"/>
                 <a:cs typeface="Trebuchet MS" pitchFamily="34" charset="-120"/>
               </a:rPr>
-              <a:t>-ion</a:t>
+              <a:t>-ed</a:t>
             </a:r>
             <a:endParaRPr lang="en-US" sz="1300" dirty="0"/>
           </a:p>
@@ -36477,7 +36303,7 @@
                 <a:ea typeface="Trebuchet MS" pitchFamily="34" charset="-122"/>
                 <a:cs typeface="Trebuchet MS" pitchFamily="34" charset="-120"/>
               </a:rPr>
-              <a:t>ex-</a:t>
+              <a:t>in-</a:t>
             </a:r>
             <a:endParaRPr lang="en-US" sz="1300" dirty="0"/>
           </a:p>
@@ -36566,7 +36392,7 @@
                 <a:ea typeface="Trebuchet MS" pitchFamily="34" charset="-122"/>
                 <a:cs typeface="Trebuchet MS" pitchFamily="34" charset="-120"/>
               </a:rPr>
-              <a:t>-ive</a:t>
+              <a:t>-or</a:t>
             </a:r>
             <a:endParaRPr lang="en-US" sz="1300" dirty="0"/>
           </a:p>
@@ -36719,7 +36545,7 @@
                 <a:ea typeface="Trebuchet MS" pitchFamily="34" charset="-122"/>
                 <a:cs typeface="Trebuchet MS" pitchFamily="34" charset="-120"/>
               </a:rPr>
-              <a:t>-acle</a:t>
+              <a:t>-ive</a:t>
             </a:r>
             <a:endParaRPr lang="en-US" sz="1300" dirty="0"/>
           </a:p>
@@ -36783,7 +36609,7 @@
                 <a:ea typeface="Trebuchet MS" pitchFamily="34" charset="-122"/>
                 <a:cs typeface="Trebuchet MS" pitchFamily="34" charset="-120"/>
               </a:rPr>
-              <a:t>sus-</a:t>
+              <a:t>retro-</a:t>
             </a:r>
             <a:endParaRPr lang="en-US" sz="1300" dirty="0"/>
           </a:p>
@@ -36872,7 +36698,7 @@
                 <a:ea typeface="Trebuchet MS" pitchFamily="34" charset="-122"/>
                 <a:cs typeface="Trebuchet MS" pitchFamily="34" charset="-120"/>
               </a:rPr>
-              <a:t>-ful</a:t>
+              <a:t>-ate</a:t>
             </a:r>
             <a:endParaRPr lang="en-US" sz="1300" dirty="0"/>
           </a:p>
@@ -37043,7 +36869,7 @@
                 <a:ea typeface="Trebuchet MS" pitchFamily="34" charset="-122"/>
                 <a:cs typeface="Trebuchet MS" pitchFamily="34" charset="-120"/>
               </a:rPr>
-              <a:t>respect</a:t>
+              <a:t>inspected</a:t>
             </a:r>
             <a:endParaRPr lang="en-US" sz="1200" dirty="0"/>
           </a:p>
@@ -37109,7 +36935,7 @@
                 <a:ea typeface="Trebuchet MS" pitchFamily="34" charset="-122"/>
                 <a:cs typeface="Trebuchet MS" pitchFamily="34" charset="-120"/>
               </a:rPr>
-              <a:t>expect</a:t>
+              <a:t>inspector</a:t>
             </a:r>
             <a:endParaRPr lang="en-US" sz="1200" dirty="0"/>
           </a:p>
@@ -37175,7 +37001,7 @@
                 <a:ea typeface="Trebuchet MS" pitchFamily="34" charset="-122"/>
                 <a:cs typeface="Trebuchet MS" pitchFamily="34" charset="-120"/>
               </a:rPr>
-              <a:t>spectator</a:t>
+              <a:t>inspectors</a:t>
             </a:r>
             <a:endParaRPr lang="en-US" sz="1200" dirty="0"/>
           </a:p>
@@ -37241,7 +37067,7 @@
                 <a:ea typeface="Trebuchet MS" pitchFamily="34" charset="-122"/>
                 <a:cs typeface="Trebuchet MS" pitchFamily="34" charset="-120"/>
               </a:rPr>
-              <a:t>spectacular</a:t>
+              <a:t>prospect</a:t>
             </a:r>
             <a:endParaRPr lang="en-US" sz="1200" dirty="0"/>
           </a:p>
@@ -37307,7 +37133,7 @@
                 <a:ea typeface="Trebuchet MS" pitchFamily="34" charset="-122"/>
                 <a:cs typeface="Trebuchet MS" pitchFamily="34" charset="-120"/>
               </a:rPr>
-              <a:t>spectacle</a:t>
+              <a:t>prospects</a:t>
             </a:r>
             <a:endParaRPr lang="en-US" sz="1200" dirty="0"/>
           </a:p>
@@ -37373,73 +37199,7 @@
                 <a:ea typeface="Trebuchet MS" pitchFamily="34" charset="-122"/>
                 <a:cs typeface="Trebuchet MS" pitchFamily="34" charset="-120"/>
               </a:rPr>
-              <a:t>prospect</a:t>
-            </a:r>
-            <a:endParaRPr lang="en-US" sz="1200" dirty="0"/>
-          </a:p>
-        </p:txBody>
-      </p:sp>
-      <p:sp>
-        <p:nvSpPr>
-          <p:cNvPr id="58" name="Shape 56"/>
-          <p:cNvSpPr/>
-          <p:nvPr/>
-        </p:nvSpPr>
-        <p:spPr>
-          <a:xfrm>
-            <a:off x="6894576" y="4498848"/>
-            <a:ext cx="2011680" cy="402336"/>
-          </a:xfrm>
-          <a:prstGeom prst="rect">
-            <a:avLst>
-              <a:gd name="adj" fmla="val 13636"/>
-            </a:avLst>
-          </a:prstGeom>
-          <a:solidFill>
-            <a:srgbClr val="EEF2FF"/>
-          </a:solidFill>
-          <a:ln w="12700">
-            <a:solidFill>
-              <a:srgbClr val="6366F1"/>
-            </a:solidFill>
-            <a:prstDash val="solid"/>
-          </a:ln>
-        </p:spPr>
-      </p:sp>
-      <p:sp>
-        <p:nvSpPr>
-          <p:cNvPr id="59" name="Text 57"/>
-          <p:cNvSpPr/>
-          <p:nvPr/>
-        </p:nvSpPr>
-        <p:spPr>
-          <a:xfrm>
-            <a:off x="6894576" y="4498848"/>
-            <a:ext cx="2011680" cy="402336"/>
-          </a:xfrm>
-          <a:prstGeom prst="rect">
-            <a:avLst/>
-          </a:prstGeom>
-          <a:noFill/>
-          <a:ln/>
-        </p:spPr>
-        <p:txBody>
-          <a:bodyPr wrap="square" lIns="0" tIns="0" rIns="0" bIns="0" rtlCol="0" anchor="ctr"/>
-          <a:lstStyle/>
-          <a:p>
-            <a:pPr algn="ctr" indent="0" marL="0">
-              <a:buNone/>
-            </a:pPr>
-            <a:r>
-              <a:rPr lang="en-US" sz="1200" b="1" dirty="0">
-                <a:solidFill>
-                  <a:srgbClr val="4338CA"/>
-                </a:solidFill>
-                <a:latin typeface="Trebuchet MS" pitchFamily="34" charset="0"/>
-                <a:ea typeface="Trebuchet MS" pitchFamily="34" charset="-122"/>
-                <a:cs typeface="Trebuchet MS" pitchFamily="34" charset="-120"/>
-              </a:rPr>
-              <a:t>inspector</a:t>
+              <a:t>spectator</a:t>
             </a:r>
             <a:endParaRPr lang="en-US" sz="1200" dirty="0"/>
           </a:p>
@@ -37731,7 +37491,7 @@
                 <a:ea typeface="Calibri" pitchFamily="34" charset="-122"/>
                 <a:cs typeface="Calibri" pitchFamily="34" charset="-120"/>
               </a:rPr>
-              <a:t>Word Labs  •  wordlabs.app  •  Root: 'spect' = to look, watch, see</a:t>
+              <a:t>Word Labs  •  wordlabs.app  •  Root: 'spect' = look; watch</a:t>
             </a:r>
             <a:endParaRPr lang="en-US" sz="800" dirty="0"/>
           </a:p>
@@ -37895,7 +37655,7 @@
                 <a:ea typeface="Calibri" pitchFamily="34" charset="-122"/>
                 <a:cs typeface="Calibri" pitchFamily="34" charset="-120"/>
               </a:rPr>
-              <a:t>The core part of a word carrying its basic meaning. For example, 'spect' means 'to look, watch, see'.</a:t>
+              <a:t>The core part of a word carrying its basic meaning. For example, 'spect' means 'look; watch'.</a:t>
             </a:r>
             <a:endParaRPr lang="en-US" sz="1350" dirty="0"/>
           </a:p>
@@ -38515,7 +38275,7 @@
                 <a:ea typeface="Calibri" pitchFamily="34" charset="-122"/>
                 <a:cs typeface="Calibri" pitchFamily="34" charset="-120"/>
               </a:rPr>
-              <a:t>Word Labs  •  wordlabs.app  •  Root: 'spect' = to look, watch, see</a:t>
+              <a:t>Word Labs  •  wordlabs.app  •  Root: 'spect' = look; watch</a:t>
             </a:r>
             <a:endParaRPr lang="en-US" sz="800" dirty="0"/>
           </a:p>
@@ -38627,7 +38387,7 @@
                 <a:ea typeface="Calibri" pitchFamily="34" charset="-122"/>
                 <a:cs typeface="Calibri" pitchFamily="34" charset="-120"/>
               </a:rPr>
-              <a:t>1.  A spectator is someone who watches an event.</a:t>
+              <a:t>1.  'spect' means 'look; watch'.</a:t>
             </a:r>
             <a:endParaRPr lang="en-US" sz="1300" dirty="0"/>
           </a:p>
@@ -38766,7 +38526,7 @@
                 <a:ea typeface="Calibri" pitchFamily="34" charset="-122"/>
                 <a:cs typeface="Calibri" pitchFamily="34" charset="-120"/>
               </a:rPr>
-              <a:t>2.  The word 'spectacular' has nothing to do with looking or seeing.</a:t>
+              <a:t>2.  'inspected' means 'threw something away'.</a:t>
             </a:r>
             <a:endParaRPr lang="en-US" sz="1300" dirty="0"/>
           </a:p>
@@ -38905,7 +38665,7 @@
                 <a:ea typeface="Calibri" pitchFamily="34" charset="-122"/>
                 <a:cs typeface="Calibri" pitchFamily="34" charset="-120"/>
               </a:rPr>
-              <a:t>3.  The word 'inspect' contains the root 'spect'.</a:t>
+              <a:t>3.  'inspect' means 'to look at something closely to check it is correct or safe'.</a:t>
             </a:r>
             <a:endParaRPr lang="en-US" sz="1300" dirty="0"/>
           </a:p>
@@ -39044,7 +38804,7 @@
                 <a:ea typeface="Calibri" pitchFamily="34" charset="-122"/>
                 <a:cs typeface="Calibri" pitchFamily="34" charset="-120"/>
               </a:rPr>
-              <a:t>4.  The root 'spect' comes from a Latin word meaning to look or watch.</a:t>
+              <a:t>4.  'inspect' means 'to throw something away'.</a:t>
             </a:r>
             <a:endParaRPr lang="en-US" sz="1300" dirty="0"/>
           </a:p>
@@ -39067,11 +38827,11 @@
             </a:avLst>
           </a:prstGeom>
           <a:solidFill>
-            <a:srgbClr val="DCFCE7"/>
-          </a:solidFill>
-          <a:ln w="12700">
-            <a:solidFill>
-              <a:srgbClr val="16A34A"/>
+            <a:srgbClr val="FEE2E2"/>
+          </a:solidFill>
+          <a:ln w="12700">
+            <a:solidFill>
+              <a:srgbClr val="DC2626"/>
             </a:solidFill>
             <a:prstDash val="solid"/>
           </a:ln>
@@ -39104,13 +38864,13 @@
             <a:r>
               <a:rPr lang="en-US" sz="1100" b="1" dirty="0">
                 <a:solidFill>
-                  <a:srgbClr val="16A34A"/>
+                  <a:srgbClr val="DC2626"/>
                 </a:solidFill>
                 <a:latin typeface="Trebuchet MS" pitchFamily="34" charset="0"/>
                 <a:ea typeface="Trebuchet MS" pitchFamily="34" charset="-122"/>
                 <a:cs typeface="Trebuchet MS" pitchFamily="34" charset="-120"/>
               </a:rPr>
-              <a:t>TRUE</a:t>
+              <a:t>FALSE</a:t>
             </a:r>
             <a:endParaRPr lang="en-US" sz="1100" dirty="0"/>
           </a:p>
@@ -39183,7 +38943,7 @@
                 <a:ea typeface="Calibri" pitchFamily="34" charset="-122"/>
                 <a:cs typeface="Calibri" pitchFamily="34" charset="-120"/>
               </a:rPr>
-              <a:t>5.  The root 'spect' means to speak or talk.</a:t>
+              <a:t>5.  'inspected' means 'looked at something closely to check it in the past'.</a:t>
             </a:r>
             <a:endParaRPr lang="en-US" sz="1300" dirty="0"/>
           </a:p>
@@ -39206,11 +38966,11 @@
             </a:avLst>
           </a:prstGeom>
           <a:solidFill>
-            <a:srgbClr val="FEE2E2"/>
-          </a:solidFill>
-          <a:ln w="12700">
-            <a:solidFill>
-              <a:srgbClr val="DC2626"/>
+            <a:srgbClr val="DCFCE7"/>
+          </a:solidFill>
+          <a:ln w="12700">
+            <a:solidFill>
+              <a:srgbClr val="16A34A"/>
             </a:solidFill>
             <a:prstDash val="solid"/>
           </a:ln>
@@ -39243,13 +39003,13 @@
             <a:r>
               <a:rPr lang="en-US" sz="1100" b="1" dirty="0">
                 <a:solidFill>
-                  <a:srgbClr val="DC2626"/>
+                  <a:srgbClr val="16A34A"/>
                 </a:solidFill>
                 <a:latin typeface="Trebuchet MS" pitchFamily="34" charset="0"/>
                 <a:ea typeface="Trebuchet MS" pitchFamily="34" charset="-122"/>
                 <a:cs typeface="Trebuchet MS" pitchFamily="34" charset="-120"/>
               </a:rPr>
-              <a:t>FALSE</a:t>
+              <a:t>TRUE</a:t>
             </a:r>
             <a:endParaRPr lang="en-US" sz="1100" dirty="0"/>
           </a:p>
@@ -39541,7 +39301,7 @@
                 <a:ea typeface="Calibri" pitchFamily="34" charset="-122"/>
                 <a:cs typeface="Calibri" pitchFamily="34" charset="-120"/>
               </a:rPr>
-              <a:t>Word Labs  •  wordlabs.app  •  Root: 'spect' = to look, watch, see</a:t>
+              <a:t>Word Labs  •  wordlabs.app  •  Root: 'spect' = look; watch</a:t>
             </a:r>
             <a:endParaRPr lang="en-US" sz="800" dirty="0"/>
           </a:p>
@@ -39678,7 +39438,7 @@
                 <a:ea typeface="Trebuchet MS" pitchFamily="34" charset="-122"/>
                 <a:cs typeface="Trebuchet MS" pitchFamily="34" charset="-120"/>
               </a:rPr>
-              <a:t>to look, watch, see</a:t>
+              <a:t>look; watch</a:t>
             </a:r>
             <a:endParaRPr lang="en-US" sz="2000" dirty="0"/>
           </a:p>
@@ -39717,7 +39477,7 @@
                 <a:ea typeface="Calibri" pitchFamily="34" charset="-122"/>
                 <a:cs typeface="Calibri" pitchFamily="34" charset="-120"/>
               </a:rPr>
-              <a:t>Origin: Latin: spectare</a:t>
+              <a:t>Origin: Latin root</a:t>
             </a:r>
             <a:endParaRPr lang="en-US" sz="1100" dirty="0"/>
           </a:p>
@@ -39888,7 +39648,7 @@
                 <a:ea typeface="Trebuchet MS" pitchFamily="34" charset="-122"/>
                 <a:cs typeface="Trebuchet MS" pitchFamily="34" charset="-120"/>
               </a:rPr>
-              <a:t>respect</a:t>
+              <a:t>inspected</a:t>
             </a:r>
             <a:endParaRPr lang="en-US" sz="1300" dirty="0"/>
           </a:p>
@@ -39954,7 +39714,7 @@
                 <a:ea typeface="Trebuchet MS" pitchFamily="34" charset="-122"/>
                 <a:cs typeface="Trebuchet MS" pitchFamily="34" charset="-120"/>
               </a:rPr>
-              <a:t>expect</a:t>
+              <a:t>inspector</a:t>
             </a:r>
             <a:endParaRPr lang="en-US" sz="1300" dirty="0"/>
           </a:p>
@@ -40020,7 +39780,7 @@
                 <a:ea typeface="Trebuchet MS" pitchFamily="34" charset="-122"/>
                 <a:cs typeface="Trebuchet MS" pitchFamily="34" charset="-120"/>
               </a:rPr>
-              <a:t>spectator</a:t>
+              <a:t>inspectors</a:t>
             </a:r>
             <a:endParaRPr lang="en-US" sz="1300" dirty="0"/>
           </a:p>
@@ -40086,7 +39846,7 @@
                 <a:ea typeface="Trebuchet MS" pitchFamily="34" charset="-122"/>
                 <a:cs typeface="Trebuchet MS" pitchFamily="34" charset="-120"/>
               </a:rPr>
-              <a:t>spectacular</a:t>
+              <a:t>prospect</a:t>
             </a:r>
             <a:endParaRPr lang="en-US" sz="1300" dirty="0"/>
           </a:p>
@@ -40152,7 +39912,7 @@
                 <a:ea typeface="Trebuchet MS" pitchFamily="34" charset="-122"/>
                 <a:cs typeface="Trebuchet MS" pitchFamily="34" charset="-120"/>
               </a:rPr>
-              <a:t>spectacle</a:t>
+              <a:t>prospects</a:t>
             </a:r>
             <a:endParaRPr lang="en-US" sz="1300" dirty="0"/>
           </a:p>
@@ -40218,7 +39978,7 @@
                 <a:ea typeface="Trebuchet MS" pitchFamily="34" charset="-122"/>
                 <a:cs typeface="Trebuchet MS" pitchFamily="34" charset="-120"/>
               </a:rPr>
-              <a:t>prospect</a:t>
+              <a:t>spectator</a:t>
             </a:r>
             <a:endParaRPr lang="en-US" sz="1300" dirty="0"/>
           </a:p>
@@ -40510,7 +40270,7 @@
                 <a:ea typeface="Calibri" pitchFamily="34" charset="-122"/>
                 <a:cs typeface="Calibri" pitchFamily="34" charset="-120"/>
               </a:rPr>
-              <a:t>Word Labs  •  wordlabs.app  •  Root: 'spect' = to look, watch, see</a:t>
+              <a:t>Word Labs  •  wordlabs.app  •  Root: 'spect' = look; watch</a:t>
             </a:r>
             <a:endParaRPr lang="en-US" sz="800" dirty="0"/>
           </a:p>
@@ -40811,7 +40571,7 @@
                 <a:ea typeface="Trebuchet MS" pitchFamily="34" charset="-122"/>
                 <a:cs typeface="Trebuchet MS" pitchFamily="34" charset="-120"/>
               </a:rPr>
-              <a:t>in-</a:t>
+              <a:t>a-</a:t>
             </a:r>
             <a:endParaRPr lang="en-US" sz="1300" dirty="0"/>
           </a:p>
@@ -40939,7 +40699,7 @@
                 <a:ea typeface="Trebuchet MS" pitchFamily="34" charset="-122"/>
                 <a:cs typeface="Trebuchet MS" pitchFamily="34" charset="-120"/>
               </a:rPr>
-              <a:t>-or</a:t>
+              <a:t>-s</a:t>
             </a:r>
             <a:endParaRPr lang="en-US" sz="1300" dirty="0"/>
           </a:p>
@@ -41003,7 +40763,7 @@
                 <a:ea typeface="Trebuchet MS" pitchFamily="34" charset="-122"/>
                 <a:cs typeface="Trebuchet MS" pitchFamily="34" charset="-120"/>
               </a:rPr>
-              <a:t>re-</a:t>
+              <a:t>circum-</a:t>
             </a:r>
             <a:endParaRPr lang="en-US" sz="1300" dirty="0"/>
           </a:p>
@@ -41092,7 +40852,7 @@
                 <a:ea typeface="Trebuchet MS" pitchFamily="34" charset="-122"/>
                 <a:cs typeface="Trebuchet MS" pitchFamily="34" charset="-120"/>
               </a:rPr>
-              <a:t>-ion</a:t>
+              <a:t>-ed</a:t>
             </a:r>
             <a:endParaRPr lang="en-US" sz="1300" dirty="0"/>
           </a:p>
@@ -41156,7 +40916,7 @@
                 <a:ea typeface="Trebuchet MS" pitchFamily="34" charset="-122"/>
                 <a:cs typeface="Trebuchet MS" pitchFamily="34" charset="-120"/>
               </a:rPr>
-              <a:t>ex-</a:t>
+              <a:t>in-</a:t>
             </a:r>
             <a:endParaRPr lang="en-US" sz="1300" dirty="0"/>
           </a:p>
@@ -41245,7 +41005,7 @@
                 <a:ea typeface="Trebuchet MS" pitchFamily="34" charset="-122"/>
                 <a:cs typeface="Trebuchet MS" pitchFamily="34" charset="-120"/>
               </a:rPr>
-              <a:t>-ive</a:t>
+              <a:t>-or</a:t>
             </a:r>
             <a:endParaRPr lang="en-US" sz="1300" dirty="0"/>
           </a:p>
@@ -41398,7 +41158,7 @@
                 <a:ea typeface="Trebuchet MS" pitchFamily="34" charset="-122"/>
                 <a:cs typeface="Trebuchet MS" pitchFamily="34" charset="-120"/>
               </a:rPr>
-              <a:t>-acle</a:t>
+              <a:t>-ive</a:t>
             </a:r>
             <a:endParaRPr lang="en-US" sz="1300" dirty="0"/>
           </a:p>
@@ -41462,7 +41222,7 @@
                 <a:ea typeface="Trebuchet MS" pitchFamily="34" charset="-122"/>
                 <a:cs typeface="Trebuchet MS" pitchFamily="34" charset="-120"/>
               </a:rPr>
-              <a:t>sus-</a:t>
+              <a:t>retro-</a:t>
             </a:r>
             <a:endParaRPr lang="en-US" sz="1300" dirty="0"/>
           </a:p>
@@ -41551,7 +41311,7 @@
                 <a:ea typeface="Trebuchet MS" pitchFamily="34" charset="-122"/>
                 <a:cs typeface="Trebuchet MS" pitchFamily="34" charset="-120"/>
               </a:rPr>
-              <a:t>-ful</a:t>
+              <a:t>-ate</a:t>
             </a:r>
             <a:endParaRPr lang="en-US" sz="1300" dirty="0"/>
           </a:p>
@@ -41663,7 +41423,7 @@
                 <a:ea typeface="Trebuchet MS" pitchFamily="34" charset="-122"/>
                 <a:cs typeface="Trebuchet MS" pitchFamily="34" charset="-120"/>
               </a:rPr>
-              <a:t>in-</a:t>
+              <a:t>a-</a:t>
             </a:r>
             <a:endParaRPr lang="en-US" sz="1300" dirty="0"/>
           </a:p>
@@ -41887,7 +41647,7 @@
                 <a:ea typeface="Trebuchet MS" pitchFamily="34" charset="-122"/>
                 <a:cs typeface="Trebuchet MS" pitchFamily="34" charset="-120"/>
               </a:rPr>
-              <a:t>-or</a:t>
+              <a:t>-s</a:t>
             </a:r>
             <a:endParaRPr lang="en-US" sz="1300" dirty="0"/>
           </a:p>
@@ -42284,7 +42044,7 @@
                 <a:ea typeface="Calibri" pitchFamily="34" charset="-122"/>
                 <a:cs typeface="Calibri" pitchFamily="34" charset="-120"/>
               </a:rPr>
-              <a:t>Word Labs  •  wordlabs.app  •  Root: 'spect' = to look, watch, see</a:t>
+              <a:t>Word Labs  •  wordlabs.app  •  Root: 'spect' = look; watch</a:t>
             </a:r>
             <a:endParaRPr lang="en-US" sz="800" dirty="0"/>
           </a:p>
@@ -42462,7 +42222,7 @@
                 <a:ea typeface="Calibri" pitchFamily="34" charset="-122"/>
                 <a:cs typeface="Calibri" pitchFamily="34" charset="-120"/>
               </a:rPr>
-              <a:t>The chance or possibility of something happening in the future.</a:t>
+              <a:t>a person who watches an event, such as a sports game, without taking part</a:t>
             </a:r>
             <a:endParaRPr lang="en-US" sz="1200" dirty="0"/>
           </a:p>
@@ -42535,7 +42295,7 @@
                 <a:ea typeface="Trebuchet MS" pitchFamily="34" charset="-122"/>
                 <a:cs typeface="Trebuchet MS" pitchFamily="34" charset="-120"/>
               </a:rPr>
-              <a:t>respect</a:t>
+              <a:t>inspected</a:t>
             </a:r>
             <a:endParaRPr lang="en-US" sz="1200" dirty="0"/>
           </a:p>
@@ -42601,7 +42361,7 @@
                 <a:ea typeface="Calibri" pitchFamily="34" charset="-122"/>
                 <a:cs typeface="Calibri" pitchFamily="34" charset="-120"/>
               </a:rPr>
-              <a:t>Something amazing and impressive to look at.</a:t>
+              <a:t>the possibility that something will happen in the future</a:t>
             </a:r>
             <a:endParaRPr lang="en-US" sz="1200" dirty="0"/>
           </a:p>
@@ -42674,7 +42434,7 @@
                 <a:ea typeface="Trebuchet MS" pitchFamily="34" charset="-122"/>
                 <a:cs typeface="Trebuchet MS" pitchFamily="34" charset="-120"/>
               </a:rPr>
-              <a:t>expect</a:t>
+              <a:t>inspector</a:t>
             </a:r>
             <a:endParaRPr lang="en-US" sz="1200" dirty="0"/>
           </a:p>
@@ -42740,7 +42500,7 @@
                 <a:ea typeface="Calibri" pitchFamily="34" charset="-122"/>
                 <a:cs typeface="Calibri" pitchFamily="34" charset="-120"/>
               </a:rPr>
-              <a:t>Someone who watches an event, like a sport, without taking part.</a:t>
+              <a:t>people whose job is to check that things are done correctly and safely</a:t>
             </a:r>
             <a:endParaRPr lang="en-US" sz="1200" dirty="0"/>
           </a:p>
@@ -42813,7 +42573,7 @@
                 <a:ea typeface="Trebuchet MS" pitchFamily="34" charset="-122"/>
                 <a:cs typeface="Trebuchet MS" pitchFamily="34" charset="-120"/>
               </a:rPr>
-              <a:t>spectator</a:t>
+              <a:t>inspectors</a:t>
             </a:r>
             <a:endParaRPr lang="en-US" sz="1200" dirty="0"/>
           </a:p>
@@ -42879,7 +42639,7 @@
                 <a:ea typeface="Calibri" pitchFamily="34" charset="-122"/>
                 <a:cs typeface="Calibri" pitchFamily="34" charset="-120"/>
               </a:rPr>
-              <a:t>An impressive or unusual sight that many people stop to look at.</a:t>
+              <a:t>chances that something good will happen, especially in the future</a:t>
             </a:r>
             <a:endParaRPr lang="en-US" sz="1200" dirty="0"/>
           </a:p>
@@ -42952,7 +42712,7 @@
                 <a:ea typeface="Trebuchet MS" pitchFamily="34" charset="-122"/>
                 <a:cs typeface="Trebuchet MS" pitchFamily="34" charset="-120"/>
               </a:rPr>
-              <a:t>spectacular</a:t>
+              <a:t>prospect</a:t>
             </a:r>
             <a:endParaRPr lang="en-US" sz="1200" dirty="0"/>
           </a:p>
@@ -43018,7 +42778,7 @@
                 <a:ea typeface="Calibri" pitchFamily="34" charset="-122"/>
                 <a:cs typeface="Calibri" pitchFamily="34" charset="-120"/>
               </a:rPr>
-              <a:t>To think something is going to happen or arrive.</a:t>
+              <a:t>a person whose job is to check that things are done correctly and safely</a:t>
             </a:r>
             <a:endParaRPr lang="en-US" sz="1200" dirty="0"/>
           </a:p>
@@ -43091,7 +42851,7 @@
                 <a:ea typeface="Trebuchet MS" pitchFamily="34" charset="-122"/>
                 <a:cs typeface="Trebuchet MS" pitchFamily="34" charset="-120"/>
               </a:rPr>
-              <a:t>spectacle</a:t>
+              <a:t>prospects</a:t>
             </a:r>
             <a:endParaRPr lang="en-US" sz="1200" dirty="0"/>
           </a:p>
@@ -43157,7 +42917,7 @@
                 <a:ea typeface="Calibri" pitchFamily="34" charset="-122"/>
                 <a:cs typeface="Calibri" pitchFamily="34" charset="-120"/>
               </a:rPr>
-              <a:t>To look at something very carefully to check it.</a:t>
+              <a:t>to look at something closely to check it is correct or safe</a:t>
             </a:r>
             <a:endParaRPr lang="en-US" sz="1200" dirty="0"/>
           </a:p>
@@ -43230,7 +42990,7 @@
                 <a:ea typeface="Trebuchet MS" pitchFamily="34" charset="-122"/>
                 <a:cs typeface="Trebuchet MS" pitchFamily="34" charset="-120"/>
               </a:rPr>
-              <a:t>prospect</a:t>
+              <a:t>spectator</a:t>
             </a:r>
             <a:endParaRPr lang="en-US" sz="1200" dirty="0"/>
           </a:p>
@@ -43296,7 +43056,7 @@
                 <a:ea typeface="Calibri" pitchFamily="34" charset="-122"/>
                 <a:cs typeface="Calibri" pitchFamily="34" charset="-120"/>
               </a:rPr>
-              <a:t>To look up to someone and treat them well because you admire them.</a:t>
+              <a:t>looked at something closely to check it in the past</a:t>
             </a:r>
             <a:endParaRPr lang="en-US" sz="1200" dirty="0"/>
           </a:p>
@@ -43588,7 +43348,7 @@
                 <a:ea typeface="Calibri" pitchFamily="34" charset="-122"/>
                 <a:cs typeface="Calibri" pitchFamily="34" charset="-120"/>
               </a:rPr>
-              <a:t>Word Labs  •  wordlabs.app  •  Root: 'spect' = to look, watch, see</a:t>
+              <a:t>Word Labs  •  wordlabs.app  •  Root: 'spect' = look; watch</a:t>
             </a:r>
             <a:endParaRPr lang="en-US" sz="800" dirty="0"/>
           </a:p>
@@ -43791,7 +43551,7 @@
                 <a:ea typeface="Calibri" pitchFamily="34" charset="-122"/>
                 <a:cs typeface="Calibri" pitchFamily="34" charset="-120"/>
               </a:rPr>
-              <a:t>The inspector arrived at the school to inspect every classroom and check it was safe.</a:t>
+              <a:t>The mechanic will inspect the car before the long trip.</a:t>
             </a:r>
             <a:endParaRPr lang="en-US" sz="1500" dirty="0"/>
           </a:p>
@@ -43955,7 +43715,7 @@
                 <a:ea typeface="Calibri" pitchFamily="34" charset="-122"/>
                 <a:cs typeface="Calibri" pitchFamily="34" charset="-120"/>
               </a:rPr>
-              <a:t>The spectacular fireworks display made every spectator gasp with amazement.</a:t>
+              <a:t>The safety officer inspected the playground equipment yesterday.</a:t>
             </a:r>
             <a:endParaRPr lang="en-US" sz="1500" dirty="0"/>
           </a:p>
@@ -44119,7 +43879,7 @@
                 <a:ea typeface="Calibri" pitchFamily="34" charset="-122"/>
                 <a:cs typeface="Calibri" pitchFamily="34" charset="-120"/>
               </a:rPr>
-              <a:t>We need to respect other people's belongings and never take them without asking.</a:t>
+              <a:t>The inspector checked that the fire exits were not blocked.</a:t>
             </a:r>
             <a:endParaRPr lang="en-US" sz="1500" dirty="0"/>
           </a:p>
